--- a/workflow_analysis/spm_figures/spm_dags/1kg_dags.pptx
+++ b/workflow_analysis/spm_figures/spm_dags/1kg_dags.pptx
@@ -5,7 +5,7 @@
     <p:sldMasterId id="2147483648" r:id="rId1"/>
   </p:sldMasterIdLst>
   <p:sldIdLst>
-    <p:sldId id="261" r:id="rId2"/>
+    <p:sldId id="262" r:id="rId2"/>
   </p:sldIdLst>
   <p:sldSz cx="12192000" cy="6858000"/>
   <p:notesSz cx="6858000" cy="9144000"/>
@@ -259,7 +259,7 @@
           <a:p>
             <a:fld id="{55E644DB-C3A0-4FF1-A7C5-619927E31133}" type="datetimeFigureOut">
               <a:rPr lang="en-US" smtClean="0"/>
-              <a:t>2/5/2025</a:t>
+              <a:t>9/18/2025</a:t>
             </a:fld>
             <a:endParaRPr lang="en-US"/>
           </a:p>
@@ -457,7 +457,7 @@
           <a:p>
             <a:fld id="{55E644DB-C3A0-4FF1-A7C5-619927E31133}" type="datetimeFigureOut">
               <a:rPr lang="en-US" smtClean="0"/>
-              <a:t>2/5/2025</a:t>
+              <a:t>9/18/2025</a:t>
             </a:fld>
             <a:endParaRPr lang="en-US"/>
           </a:p>
@@ -665,7 +665,7 @@
           <a:p>
             <a:fld id="{55E644DB-C3A0-4FF1-A7C5-619927E31133}" type="datetimeFigureOut">
               <a:rPr lang="en-US" smtClean="0"/>
-              <a:t>2/5/2025</a:t>
+              <a:t>9/18/2025</a:t>
             </a:fld>
             <a:endParaRPr lang="en-US"/>
           </a:p>
@@ -863,7 +863,7 @@
           <a:p>
             <a:fld id="{55E644DB-C3A0-4FF1-A7C5-619927E31133}" type="datetimeFigureOut">
               <a:rPr lang="en-US" smtClean="0"/>
-              <a:t>2/5/2025</a:t>
+              <a:t>9/18/2025</a:t>
             </a:fld>
             <a:endParaRPr lang="en-US"/>
           </a:p>
@@ -1138,7 +1138,7 @@
           <a:p>
             <a:fld id="{55E644DB-C3A0-4FF1-A7C5-619927E31133}" type="datetimeFigureOut">
               <a:rPr lang="en-US" smtClean="0"/>
-              <a:t>2/5/2025</a:t>
+              <a:t>9/18/2025</a:t>
             </a:fld>
             <a:endParaRPr lang="en-US"/>
           </a:p>
@@ -1403,7 +1403,7 @@
           <a:p>
             <a:fld id="{55E644DB-C3A0-4FF1-A7C5-619927E31133}" type="datetimeFigureOut">
               <a:rPr lang="en-US" smtClean="0"/>
-              <a:t>2/5/2025</a:t>
+              <a:t>9/18/2025</a:t>
             </a:fld>
             <a:endParaRPr lang="en-US"/>
           </a:p>
@@ -1815,7 +1815,7 @@
           <a:p>
             <a:fld id="{55E644DB-C3A0-4FF1-A7C5-619927E31133}" type="datetimeFigureOut">
               <a:rPr lang="en-US" smtClean="0"/>
-              <a:t>2/5/2025</a:t>
+              <a:t>9/18/2025</a:t>
             </a:fld>
             <a:endParaRPr lang="en-US"/>
           </a:p>
@@ -1956,7 +1956,7 @@
           <a:p>
             <a:fld id="{55E644DB-C3A0-4FF1-A7C5-619927E31133}" type="datetimeFigureOut">
               <a:rPr lang="en-US" smtClean="0"/>
-              <a:t>2/5/2025</a:t>
+              <a:t>9/18/2025</a:t>
             </a:fld>
             <a:endParaRPr lang="en-US"/>
           </a:p>
@@ -2069,7 +2069,7 @@
           <a:p>
             <a:fld id="{55E644DB-C3A0-4FF1-A7C5-619927E31133}" type="datetimeFigureOut">
               <a:rPr lang="en-US" smtClean="0"/>
-              <a:t>2/5/2025</a:t>
+              <a:t>9/18/2025</a:t>
             </a:fld>
             <a:endParaRPr lang="en-US"/>
           </a:p>
@@ -2380,7 +2380,7 @@
           <a:p>
             <a:fld id="{55E644DB-C3A0-4FF1-A7C5-619927E31133}" type="datetimeFigureOut">
               <a:rPr lang="en-US" smtClean="0"/>
-              <a:t>2/5/2025</a:t>
+              <a:t>9/18/2025</a:t>
             </a:fld>
             <a:endParaRPr lang="en-US"/>
           </a:p>
@@ -2668,7 +2668,7 @@
           <a:p>
             <a:fld id="{55E644DB-C3A0-4FF1-A7C5-619927E31133}" type="datetimeFigureOut">
               <a:rPr lang="en-US" smtClean="0"/>
-              <a:t>2/5/2025</a:t>
+              <a:t>9/18/2025</a:t>
             </a:fld>
             <a:endParaRPr lang="en-US"/>
           </a:p>
@@ -2909,7 +2909,7 @@
           <a:p>
             <a:fld id="{55E644DB-C3A0-4FF1-A7C5-619927E31133}" type="datetimeFigureOut">
               <a:rPr lang="en-US" smtClean="0"/>
-              <a:t>2/5/2025</a:t>
+              <a:t>9/18/2025</a:t>
             </a:fld>
             <a:endParaRPr lang="en-US"/>
           </a:p>
@@ -3314,7 +3314,13 @@
   <p:cSld>
     <p:spTree>
       <p:nvGrpSpPr>
-        <p:cNvPr id="1" name=""/>
+        <p:cNvPr id="1" name="">
+          <a:extLst>
+            <a:ext uri="{FF2B5EF4-FFF2-40B4-BE49-F238E27FC236}">
+              <a16:creationId xmlns:a16="http://schemas.microsoft.com/office/drawing/2014/main" id="{73121EB8-0B9C-2F02-6B87-F1501492AAC0}"/>
+            </a:ext>
+          </a:extLst>
+        </p:cNvPr>
         <p:cNvGrpSpPr/>
         <p:nvPr/>
       </p:nvGrpSpPr>
@@ -3331,7 +3337,7 @@
           <p:cNvPr id="28" name="Group 27">
             <a:extLst>
               <a:ext uri="{FF2B5EF4-FFF2-40B4-BE49-F238E27FC236}">
-                <a16:creationId xmlns:a16="http://schemas.microsoft.com/office/drawing/2014/main" id="{DAF7C894-08D7-D69E-56B5-C37AF9528F76}"/>
+                <a16:creationId xmlns:a16="http://schemas.microsoft.com/office/drawing/2014/main" id="{53B8F04C-464B-4653-30D3-AB787A9E1E8E}"/>
               </a:ext>
             </a:extLst>
           </p:cNvPr>
@@ -3351,7 +3357,7 @@
             <p:cNvPr id="58" name="TextBox 57">
               <a:extLst>
                 <a:ext uri="{FF2B5EF4-FFF2-40B4-BE49-F238E27FC236}">
-                  <a16:creationId xmlns:a16="http://schemas.microsoft.com/office/drawing/2014/main" id="{B5753BFA-502A-FD76-F2F6-16B56DDB0FAF}"/>
+                  <a16:creationId xmlns:a16="http://schemas.microsoft.com/office/drawing/2014/main" id="{B4140C48-CB34-5395-CDAA-3119EE4EC938}"/>
                 </a:ext>
               </a:extLst>
             </p:cNvPr>
@@ -3397,7 +3403,7 @@
             <p:cNvPr id="59" name="Rectangle: Rounded Corners 58">
               <a:extLst>
                 <a:ext uri="{FF2B5EF4-FFF2-40B4-BE49-F238E27FC236}">
-                  <a16:creationId xmlns:a16="http://schemas.microsoft.com/office/drawing/2014/main" id="{6F335E1D-97E9-D5E0-773F-1B2253F25B44}"/>
+                  <a16:creationId xmlns:a16="http://schemas.microsoft.com/office/drawing/2014/main" id="{A903490B-E5C5-CFEC-F186-C53603E3C150}"/>
                 </a:ext>
               </a:extLst>
             </p:cNvPr>
@@ -3454,7 +3460,7 @@
           <p:cNvPr id="29" name="Group 28">
             <a:extLst>
               <a:ext uri="{FF2B5EF4-FFF2-40B4-BE49-F238E27FC236}">
-                <a16:creationId xmlns:a16="http://schemas.microsoft.com/office/drawing/2014/main" id="{4D3CC46F-42ED-FA88-3608-404E9CEE3C86}"/>
+                <a16:creationId xmlns:a16="http://schemas.microsoft.com/office/drawing/2014/main" id="{0108D020-54C8-0B37-B3A0-2CE5B6427871}"/>
               </a:ext>
             </a:extLst>
           </p:cNvPr>
@@ -3474,7 +3480,7 @@
             <p:cNvPr id="54" name="Oval 53">
               <a:extLst>
                 <a:ext uri="{FF2B5EF4-FFF2-40B4-BE49-F238E27FC236}">
-                  <a16:creationId xmlns:a16="http://schemas.microsoft.com/office/drawing/2014/main" id="{9EC5C87F-B220-7E41-3014-AB05DAE859ED}"/>
+                  <a16:creationId xmlns:a16="http://schemas.microsoft.com/office/drawing/2014/main" id="{EDDA0377-43FA-8115-3E8E-E0DE8A064722}"/>
                 </a:ext>
               </a:extLst>
             </p:cNvPr>
@@ -3526,7 +3532,7 @@
             <p:cNvPr id="55" name="Oval 54">
               <a:extLst>
                 <a:ext uri="{FF2B5EF4-FFF2-40B4-BE49-F238E27FC236}">
-                  <a16:creationId xmlns:a16="http://schemas.microsoft.com/office/drawing/2014/main" id="{16FA9D1B-347A-1346-44F5-2348C32E9DCE}"/>
+                  <a16:creationId xmlns:a16="http://schemas.microsoft.com/office/drawing/2014/main" id="{32B5AA5C-F3B5-FE5C-A510-8D74B2660805}"/>
                 </a:ext>
               </a:extLst>
             </p:cNvPr>
@@ -3578,7 +3584,7 @@
             <p:cNvPr id="56" name="Oval 55">
               <a:extLst>
                 <a:ext uri="{FF2B5EF4-FFF2-40B4-BE49-F238E27FC236}">
-                  <a16:creationId xmlns:a16="http://schemas.microsoft.com/office/drawing/2014/main" id="{2212F833-B076-A740-A4E2-4F98870A156E}"/>
+                  <a16:creationId xmlns:a16="http://schemas.microsoft.com/office/drawing/2014/main" id="{6863B0B9-1FD3-E2C0-C06A-0CDE83C77E42}"/>
                 </a:ext>
               </a:extLst>
             </p:cNvPr>
@@ -3630,7 +3636,7 @@
             <p:cNvPr id="57" name="Oval 56">
               <a:extLst>
                 <a:ext uri="{FF2B5EF4-FFF2-40B4-BE49-F238E27FC236}">
-                  <a16:creationId xmlns:a16="http://schemas.microsoft.com/office/drawing/2014/main" id="{FF6A12AE-521F-A83B-060B-95817D9D4FA0}"/>
+                  <a16:creationId xmlns:a16="http://schemas.microsoft.com/office/drawing/2014/main" id="{99199CC0-E391-A1FE-25F2-3492DF02CB55}"/>
                 </a:ext>
               </a:extLst>
             </p:cNvPr>
@@ -3683,7 +3689,7 @@
           <p:cNvPr id="30" name="Group 29">
             <a:extLst>
               <a:ext uri="{FF2B5EF4-FFF2-40B4-BE49-F238E27FC236}">
-                <a16:creationId xmlns:a16="http://schemas.microsoft.com/office/drawing/2014/main" id="{11C736B2-C4EA-AEA9-19A5-074689E87ACA}"/>
+                <a16:creationId xmlns:a16="http://schemas.microsoft.com/office/drawing/2014/main" id="{EDCB12F6-0132-C600-34B6-B2CE4AADBCE1}"/>
               </a:ext>
             </a:extLst>
           </p:cNvPr>
@@ -3703,7 +3709,7 @@
             <p:cNvPr id="52" name="Oval 51">
               <a:extLst>
                 <a:ext uri="{FF2B5EF4-FFF2-40B4-BE49-F238E27FC236}">
-                  <a16:creationId xmlns:a16="http://schemas.microsoft.com/office/drawing/2014/main" id="{769255AC-C420-82EF-15AF-EC786814002D}"/>
+                  <a16:creationId xmlns:a16="http://schemas.microsoft.com/office/drawing/2014/main" id="{1E918323-E800-851E-4E01-179FB30AAC3D}"/>
                 </a:ext>
               </a:extLst>
             </p:cNvPr>
@@ -3755,7 +3761,7 @@
             <p:cNvPr id="53" name="Oval 52">
               <a:extLst>
                 <a:ext uri="{FF2B5EF4-FFF2-40B4-BE49-F238E27FC236}">
-                  <a16:creationId xmlns:a16="http://schemas.microsoft.com/office/drawing/2014/main" id="{92AE3B1F-81E9-2A28-9F57-04E4120B4199}"/>
+                  <a16:creationId xmlns:a16="http://schemas.microsoft.com/office/drawing/2014/main" id="{6B7DC230-E1D6-E733-AFA4-FDB996F84F98}"/>
                 </a:ext>
               </a:extLst>
             </p:cNvPr>
@@ -3808,7 +3814,7 @@
           <p:cNvPr id="31" name="Rectangle 30">
             <a:extLst>
               <a:ext uri="{FF2B5EF4-FFF2-40B4-BE49-F238E27FC236}">
-                <a16:creationId xmlns:a16="http://schemas.microsoft.com/office/drawing/2014/main" id="{CDEBD692-A5E8-A01B-5763-12E6BBC688E2}"/>
+                <a16:creationId xmlns:a16="http://schemas.microsoft.com/office/drawing/2014/main" id="{FA6E1783-3E9A-A1E0-7AF5-A8D6094ED632}"/>
               </a:ext>
             </a:extLst>
           </p:cNvPr>
@@ -3863,7 +3869,7 @@
           <p:cNvPr id="32" name="Straight Arrow Connector 31">
             <a:extLst>
               <a:ext uri="{FF2B5EF4-FFF2-40B4-BE49-F238E27FC236}">
-                <a16:creationId xmlns:a16="http://schemas.microsoft.com/office/drawing/2014/main" id="{92A34E27-BCF1-D531-4132-284FC20E3B30}"/>
+                <a16:creationId xmlns:a16="http://schemas.microsoft.com/office/drawing/2014/main" id="{FC894647-6DD1-889D-5614-8F3829471D97}"/>
               </a:ext>
             </a:extLst>
           </p:cNvPr>
@@ -3909,7 +3915,7 @@
           <p:cNvPr id="33" name="Straight Arrow Connector 32">
             <a:extLst>
               <a:ext uri="{FF2B5EF4-FFF2-40B4-BE49-F238E27FC236}">
-                <a16:creationId xmlns:a16="http://schemas.microsoft.com/office/drawing/2014/main" id="{703FCD1C-DA45-2EFA-96DD-99DB3C7141E8}"/>
+                <a16:creationId xmlns:a16="http://schemas.microsoft.com/office/drawing/2014/main" id="{C929E959-ED0A-7088-B0D9-0757D49449B9}"/>
               </a:ext>
             </a:extLst>
           </p:cNvPr>
@@ -3955,7 +3961,7 @@
           <p:cNvPr id="34" name="Straight Arrow Connector 33">
             <a:extLst>
               <a:ext uri="{FF2B5EF4-FFF2-40B4-BE49-F238E27FC236}">
-                <a16:creationId xmlns:a16="http://schemas.microsoft.com/office/drawing/2014/main" id="{00FFEE6E-B865-A675-D3BC-21BE5AFCB79A}"/>
+                <a16:creationId xmlns:a16="http://schemas.microsoft.com/office/drawing/2014/main" id="{804CF216-80D3-092B-7D35-5AF48AE07226}"/>
               </a:ext>
             </a:extLst>
           </p:cNvPr>
@@ -4001,7 +4007,7 @@
           <p:cNvPr id="35" name="Straight Arrow Connector 34">
             <a:extLst>
               <a:ext uri="{FF2B5EF4-FFF2-40B4-BE49-F238E27FC236}">
-                <a16:creationId xmlns:a16="http://schemas.microsoft.com/office/drawing/2014/main" id="{E5E49CAE-5AE9-3FE1-2E10-A0812D357A3F}"/>
+                <a16:creationId xmlns:a16="http://schemas.microsoft.com/office/drawing/2014/main" id="{290D0AD8-4865-7F15-94AE-D482FFDECEEF}"/>
               </a:ext>
             </a:extLst>
           </p:cNvPr>
@@ -4047,7 +4053,7 @@
           <p:cNvPr id="36" name="Group 35">
             <a:extLst>
               <a:ext uri="{FF2B5EF4-FFF2-40B4-BE49-F238E27FC236}">
-                <a16:creationId xmlns:a16="http://schemas.microsoft.com/office/drawing/2014/main" id="{E6CD7261-22C1-22AC-D68D-EAC03E3467FD}"/>
+                <a16:creationId xmlns:a16="http://schemas.microsoft.com/office/drawing/2014/main" id="{7A47EBF9-6BD2-D2E6-C6D6-BF9FEB4CDF1F}"/>
               </a:ext>
             </a:extLst>
           </p:cNvPr>
@@ -4067,7 +4073,7 @@
             <p:cNvPr id="50" name="TextBox 49">
               <a:extLst>
                 <a:ext uri="{FF2B5EF4-FFF2-40B4-BE49-F238E27FC236}">
-                  <a16:creationId xmlns:a16="http://schemas.microsoft.com/office/drawing/2014/main" id="{F76B3B74-EC93-FBE8-AB9F-84CF5BB8AB36}"/>
+                  <a16:creationId xmlns:a16="http://schemas.microsoft.com/office/drawing/2014/main" id="{7F16F95E-5256-1C24-1E68-7025E6E6375E}"/>
                 </a:ext>
               </a:extLst>
             </p:cNvPr>
@@ -4077,7 +4083,7 @@
           <p:spPr>
             <a:xfrm>
               <a:off x="2290518" y="1665141"/>
-              <a:ext cx="1039907" cy="789525"/>
+              <a:ext cx="1039907" cy="800072"/>
             </a:xfrm>
             <a:prstGeom prst="rect">
               <a:avLst/>
@@ -4118,7 +4124,7 @@
             <p:cNvPr id="51" name="Rectangle: Rounded Corners 50">
               <a:extLst>
                 <a:ext uri="{FF2B5EF4-FFF2-40B4-BE49-F238E27FC236}">
-                  <a16:creationId xmlns:a16="http://schemas.microsoft.com/office/drawing/2014/main" id="{B3B49516-311E-997F-9D54-2959B94B392E}"/>
+                  <a16:creationId xmlns:a16="http://schemas.microsoft.com/office/drawing/2014/main" id="{1B97BFD8-5654-7B6E-6CB8-76A64FE3F4F2}"/>
                 </a:ext>
               </a:extLst>
             </p:cNvPr>
@@ -4175,7 +4181,7 @@
           <p:cNvPr id="37" name="Group 36">
             <a:extLst>
               <a:ext uri="{FF2B5EF4-FFF2-40B4-BE49-F238E27FC236}">
-                <a16:creationId xmlns:a16="http://schemas.microsoft.com/office/drawing/2014/main" id="{B76E83C9-008B-8902-5F8B-9AD23162F4F7}"/>
+                <a16:creationId xmlns:a16="http://schemas.microsoft.com/office/drawing/2014/main" id="{27C3C949-B1F3-212B-AD1B-089AC06F9F59}"/>
               </a:ext>
             </a:extLst>
           </p:cNvPr>
@@ -4195,7 +4201,7 @@
             <p:cNvPr id="46" name="Rectangle 45">
               <a:extLst>
                 <a:ext uri="{FF2B5EF4-FFF2-40B4-BE49-F238E27FC236}">
-                  <a16:creationId xmlns:a16="http://schemas.microsoft.com/office/drawing/2014/main" id="{E7CB2C50-CCEA-5BF5-5AF1-47F32B14BA4B}"/>
+                  <a16:creationId xmlns:a16="http://schemas.microsoft.com/office/drawing/2014/main" id="{0D026A02-E8C8-51B2-267E-303FCBE37304}"/>
                 </a:ext>
               </a:extLst>
             </p:cNvPr>
@@ -4250,7 +4256,7 @@
             <p:cNvPr id="47" name="Rectangle 46">
               <a:extLst>
                 <a:ext uri="{FF2B5EF4-FFF2-40B4-BE49-F238E27FC236}">
-                  <a16:creationId xmlns:a16="http://schemas.microsoft.com/office/drawing/2014/main" id="{4D025881-D3C6-E006-39CB-2A68BC402EC8}"/>
+                  <a16:creationId xmlns:a16="http://schemas.microsoft.com/office/drawing/2014/main" id="{5EFACFA0-8B2E-5C51-B0F0-2490E89CC2B9}"/>
                 </a:ext>
               </a:extLst>
             </p:cNvPr>
@@ -4305,7 +4311,7 @@
             <p:cNvPr id="48" name="Rectangle 47">
               <a:extLst>
                 <a:ext uri="{FF2B5EF4-FFF2-40B4-BE49-F238E27FC236}">
-                  <a16:creationId xmlns:a16="http://schemas.microsoft.com/office/drawing/2014/main" id="{635767C3-58AB-1110-8FF6-A67208098407}"/>
+                  <a16:creationId xmlns:a16="http://schemas.microsoft.com/office/drawing/2014/main" id="{570314D7-B988-06F0-254B-B6D1EFFDCA94}"/>
                 </a:ext>
               </a:extLst>
             </p:cNvPr>
@@ -4360,7 +4366,7 @@
             <p:cNvPr id="49" name="Rectangle 48">
               <a:extLst>
                 <a:ext uri="{FF2B5EF4-FFF2-40B4-BE49-F238E27FC236}">
-                  <a16:creationId xmlns:a16="http://schemas.microsoft.com/office/drawing/2014/main" id="{FA8CA70E-916A-2FD9-15D9-43A8CBC369B8}"/>
+                  <a16:creationId xmlns:a16="http://schemas.microsoft.com/office/drawing/2014/main" id="{5E21D8C0-B541-4815-91F5-10EE672A0693}"/>
                 </a:ext>
               </a:extLst>
             </p:cNvPr>
@@ -4416,7 +4422,7 @@
           <p:cNvPr id="38" name="Straight Arrow Connector 37">
             <a:extLst>
               <a:ext uri="{FF2B5EF4-FFF2-40B4-BE49-F238E27FC236}">
-                <a16:creationId xmlns:a16="http://schemas.microsoft.com/office/drawing/2014/main" id="{C27219EB-5117-8EA6-692B-207009DC246F}"/>
+                <a16:creationId xmlns:a16="http://schemas.microsoft.com/office/drawing/2014/main" id="{3C10F59B-9063-4867-002B-86B8F9FF58B1}"/>
               </a:ext>
             </a:extLst>
           </p:cNvPr>
@@ -4461,7 +4467,7 @@
           <p:cNvPr id="39" name="Straight Arrow Connector 38">
             <a:extLst>
               <a:ext uri="{FF2B5EF4-FFF2-40B4-BE49-F238E27FC236}">
-                <a16:creationId xmlns:a16="http://schemas.microsoft.com/office/drawing/2014/main" id="{D33A4B7F-E5E7-BF30-DB91-41C386ACCFD7}"/>
+                <a16:creationId xmlns:a16="http://schemas.microsoft.com/office/drawing/2014/main" id="{08AE0383-E92A-918F-CC49-6688C660B86A}"/>
               </a:ext>
             </a:extLst>
           </p:cNvPr>
@@ -4506,7 +4512,7 @@
           <p:cNvPr id="40" name="Straight Arrow Connector 39">
             <a:extLst>
               <a:ext uri="{FF2B5EF4-FFF2-40B4-BE49-F238E27FC236}">
-                <a16:creationId xmlns:a16="http://schemas.microsoft.com/office/drawing/2014/main" id="{B3845A64-B93E-793C-0041-0F55A21695A4}"/>
+                <a16:creationId xmlns:a16="http://schemas.microsoft.com/office/drawing/2014/main" id="{33012D8E-2846-20A9-14E3-CCFDEA7815A5}"/>
               </a:ext>
             </a:extLst>
           </p:cNvPr>
@@ -4551,7 +4557,7 @@
           <p:cNvPr id="41" name="Straight Arrow Connector 40">
             <a:extLst>
               <a:ext uri="{FF2B5EF4-FFF2-40B4-BE49-F238E27FC236}">
-                <a16:creationId xmlns:a16="http://schemas.microsoft.com/office/drawing/2014/main" id="{079AFBAB-11BA-BA48-6A73-E658E9C371DC}"/>
+                <a16:creationId xmlns:a16="http://schemas.microsoft.com/office/drawing/2014/main" id="{E0663226-C1CE-8AEE-C854-1EAF38B00B4A}"/>
               </a:ext>
             </a:extLst>
           </p:cNvPr>
@@ -4596,7 +4602,7 @@
           <p:cNvPr id="42" name="Straight Arrow Connector 41">
             <a:extLst>
               <a:ext uri="{FF2B5EF4-FFF2-40B4-BE49-F238E27FC236}">
-                <a16:creationId xmlns:a16="http://schemas.microsoft.com/office/drawing/2014/main" id="{95F9AC64-18B3-7575-6854-44DA885851ED}"/>
+                <a16:creationId xmlns:a16="http://schemas.microsoft.com/office/drawing/2014/main" id="{3A883156-BC63-8E6B-770E-6CC73D973167}"/>
               </a:ext>
             </a:extLst>
           </p:cNvPr>
@@ -4642,7 +4648,7 @@
           <p:cNvPr id="43" name="Straight Arrow Connector 42">
             <a:extLst>
               <a:ext uri="{FF2B5EF4-FFF2-40B4-BE49-F238E27FC236}">
-                <a16:creationId xmlns:a16="http://schemas.microsoft.com/office/drawing/2014/main" id="{EEB147A8-A6AF-6726-8E15-7F15890E7314}"/>
+                <a16:creationId xmlns:a16="http://schemas.microsoft.com/office/drawing/2014/main" id="{2F3E6C20-3368-4064-2D42-4C297CA0C9DC}"/>
               </a:ext>
             </a:extLst>
           </p:cNvPr>
@@ -4687,7 +4693,7 @@
           <p:cNvPr id="44" name="Straight Arrow Connector 43">
             <a:extLst>
               <a:ext uri="{FF2B5EF4-FFF2-40B4-BE49-F238E27FC236}">
-                <a16:creationId xmlns:a16="http://schemas.microsoft.com/office/drawing/2014/main" id="{A3652BAA-F190-8D6C-AFF4-79714791D5B9}"/>
+                <a16:creationId xmlns:a16="http://schemas.microsoft.com/office/drawing/2014/main" id="{753AF8CA-205C-DEEE-4D24-1B9EA39902A4}"/>
               </a:ext>
             </a:extLst>
           </p:cNvPr>
@@ -4732,7 +4738,7 @@
           <p:cNvPr id="45" name="Straight Arrow Connector 44">
             <a:extLst>
               <a:ext uri="{FF2B5EF4-FFF2-40B4-BE49-F238E27FC236}">
-                <a16:creationId xmlns:a16="http://schemas.microsoft.com/office/drawing/2014/main" id="{303313BC-21D0-60AB-39CC-1297FC19E5B6}"/>
+                <a16:creationId xmlns:a16="http://schemas.microsoft.com/office/drawing/2014/main" id="{5D554783-E635-A41A-19FF-BF3ECCB4DD21}"/>
               </a:ext>
             </a:extLst>
           </p:cNvPr>
@@ -4777,7 +4783,7 @@
           <p:cNvPr id="61" name="Rectangle 60">
             <a:extLst>
               <a:ext uri="{FF2B5EF4-FFF2-40B4-BE49-F238E27FC236}">
-                <a16:creationId xmlns:a16="http://schemas.microsoft.com/office/drawing/2014/main" id="{18099601-9144-8C8D-96C9-6532BFABC87C}"/>
+                <a16:creationId xmlns:a16="http://schemas.microsoft.com/office/drawing/2014/main" id="{E34E00DF-D112-D8B0-A823-FC1B9A918D50}"/>
               </a:ext>
             </a:extLst>
           </p:cNvPr>
@@ -4786,7 +4792,7 @@
         </p:nvSpPr>
         <p:spPr>
           <a:xfrm>
-            <a:off x="5487115" y="1921232"/>
+            <a:off x="5500178" y="2234744"/>
             <a:ext cx="379897" cy="405247"/>
           </a:xfrm>
           <a:prstGeom prst="rect">
@@ -4832,7 +4838,7 @@
           <p:cNvPr id="62" name="Group 61">
             <a:extLst>
               <a:ext uri="{FF2B5EF4-FFF2-40B4-BE49-F238E27FC236}">
-                <a16:creationId xmlns:a16="http://schemas.microsoft.com/office/drawing/2014/main" id="{BE29EC15-E29E-E00A-DBA8-7E71643B04C9}"/>
+                <a16:creationId xmlns:a16="http://schemas.microsoft.com/office/drawing/2014/main" id="{977EBBFC-DCB5-ACEB-E3A1-7D7B93B0A8D1}"/>
               </a:ext>
             </a:extLst>
           </p:cNvPr>
@@ -4841,7 +4847,7 @@
         </p:nvGrpSpPr>
         <p:grpSpPr>
           <a:xfrm>
-            <a:off x="4599652" y="1398862"/>
+            <a:off x="4612715" y="1712374"/>
             <a:ext cx="433450" cy="960431"/>
             <a:chOff x="2661401" y="2604643"/>
             <a:chExt cx="285510" cy="632628"/>
@@ -4852,7 +4858,7 @@
             <p:cNvPr id="81" name="Oval 80">
               <a:extLst>
                 <a:ext uri="{FF2B5EF4-FFF2-40B4-BE49-F238E27FC236}">
-                  <a16:creationId xmlns:a16="http://schemas.microsoft.com/office/drawing/2014/main" id="{8A131E35-FBCA-D676-C97E-A2F42337DB06}"/>
+                  <a16:creationId xmlns:a16="http://schemas.microsoft.com/office/drawing/2014/main" id="{FB47EC8F-4239-034C-73E7-1FB58851C8BF}"/>
                 </a:ext>
               </a:extLst>
             </p:cNvPr>
@@ -4904,7 +4910,7 @@
             <p:cNvPr id="82" name="Oval 81">
               <a:extLst>
                 <a:ext uri="{FF2B5EF4-FFF2-40B4-BE49-F238E27FC236}">
-                  <a16:creationId xmlns:a16="http://schemas.microsoft.com/office/drawing/2014/main" id="{71DB9553-8E39-21BA-F45A-1260AC2E16BC}"/>
+                  <a16:creationId xmlns:a16="http://schemas.microsoft.com/office/drawing/2014/main" id="{25C285D2-CE8C-7B78-B079-D140FBE17F4F}"/>
                 </a:ext>
               </a:extLst>
             </p:cNvPr>
@@ -4957,7 +4963,7 @@
           <p:cNvPr id="63" name="Straight Arrow Connector 62">
             <a:extLst>
               <a:ext uri="{FF2B5EF4-FFF2-40B4-BE49-F238E27FC236}">
-                <a16:creationId xmlns:a16="http://schemas.microsoft.com/office/drawing/2014/main" id="{E14279BC-0DD5-0A69-7C86-BCB60387679B}"/>
+                <a16:creationId xmlns:a16="http://schemas.microsoft.com/office/drawing/2014/main" id="{1C159549-0C42-CD74-8890-91CAF3AB838E}"/>
               </a:ext>
             </a:extLst>
           </p:cNvPr>
@@ -4970,7 +4976,7 @@
         </p:nvCxnSpPr>
         <p:spPr>
           <a:xfrm>
-            <a:off x="5029712" y="1613892"/>
+            <a:off x="5042775" y="1927404"/>
             <a:ext cx="457403" cy="36813"/>
           </a:xfrm>
           <a:prstGeom prst="straightConnector1">
@@ -5003,7 +5009,7 @@
           <p:cNvPr id="64" name="Straight Arrow Connector 63">
             <a:extLst>
               <a:ext uri="{FF2B5EF4-FFF2-40B4-BE49-F238E27FC236}">
-                <a16:creationId xmlns:a16="http://schemas.microsoft.com/office/drawing/2014/main" id="{491E528A-BEEF-7CC8-9A90-5E9BC122D915}"/>
+                <a16:creationId xmlns:a16="http://schemas.microsoft.com/office/drawing/2014/main" id="{2B8EF8BB-0D40-01F4-35E7-E9FEFD3CAF09}"/>
               </a:ext>
             </a:extLst>
           </p:cNvPr>
@@ -5016,7 +5022,7 @@
         </p:nvCxnSpPr>
         <p:spPr>
           <a:xfrm flipV="1">
-            <a:off x="5033102" y="2123856"/>
+            <a:off x="5046165" y="2437368"/>
             <a:ext cx="454013" cy="20408"/>
           </a:xfrm>
           <a:prstGeom prst="straightConnector1">
@@ -5049,7 +5055,7 @@
           <p:cNvPr id="65" name="Group 64">
             <a:extLst>
               <a:ext uri="{FF2B5EF4-FFF2-40B4-BE49-F238E27FC236}">
-                <a16:creationId xmlns:a16="http://schemas.microsoft.com/office/drawing/2014/main" id="{2EF7356A-5554-A72A-2B03-CD0855415F3F}"/>
+                <a16:creationId xmlns:a16="http://schemas.microsoft.com/office/drawing/2014/main" id="{FC1B9D09-9753-AA12-5E64-6F234ACE56CE}"/>
               </a:ext>
             </a:extLst>
           </p:cNvPr>
@@ -5058,7 +5064,7 @@
         </p:nvGrpSpPr>
         <p:grpSpPr>
           <a:xfrm>
-            <a:off x="6351227" y="1406056"/>
+            <a:off x="6351227" y="1706503"/>
             <a:ext cx="430991" cy="948398"/>
             <a:chOff x="6234952" y="1863964"/>
             <a:chExt cx="443753" cy="976481"/>
@@ -5069,7 +5075,7 @@
             <p:cNvPr id="79" name="Oval 78">
               <a:extLst>
                 <a:ext uri="{FF2B5EF4-FFF2-40B4-BE49-F238E27FC236}">
-                  <a16:creationId xmlns:a16="http://schemas.microsoft.com/office/drawing/2014/main" id="{38FAEFD3-7D60-893A-FF7E-8E5A508ADD82}"/>
+                  <a16:creationId xmlns:a16="http://schemas.microsoft.com/office/drawing/2014/main" id="{FE916DFD-648F-DF0B-13FA-EF121502BDB7}"/>
                 </a:ext>
               </a:extLst>
             </p:cNvPr>
@@ -5121,7 +5127,7 @@
             <p:cNvPr id="80" name="Oval 79">
               <a:extLst>
                 <a:ext uri="{FF2B5EF4-FFF2-40B4-BE49-F238E27FC236}">
-                  <a16:creationId xmlns:a16="http://schemas.microsoft.com/office/drawing/2014/main" id="{F2EA3971-54FD-0243-600B-A8694F3D506C}"/>
+                  <a16:creationId xmlns:a16="http://schemas.microsoft.com/office/drawing/2014/main" id="{F0AC49FB-588D-4405-F9BC-776EAF8423F3}"/>
                 </a:ext>
               </a:extLst>
             </p:cNvPr>
@@ -5171,24 +5177,24 @@
       </p:grpSp>
       <p:cxnSp>
         <p:nvCxnSpPr>
-          <p:cNvPr id="66" name="Straight Arrow Connector 65">
-            <a:extLst>
-              <a:ext uri="{FF2B5EF4-FFF2-40B4-BE49-F238E27FC236}">
-                <a16:creationId xmlns:a16="http://schemas.microsoft.com/office/drawing/2014/main" id="{C1042DD9-57CF-CB45-0A67-48CB45DF1AE4}"/>
+          <p:cNvPr id="67" name="Straight Arrow Connector 66">
+            <a:extLst>
+              <a:ext uri="{FF2B5EF4-FFF2-40B4-BE49-F238E27FC236}">
+                <a16:creationId xmlns:a16="http://schemas.microsoft.com/office/drawing/2014/main" id="{75F74638-0C3E-5077-7E4E-9FE19FE44650}"/>
               </a:ext>
             </a:extLst>
           </p:cNvPr>
           <p:cNvCxnSpPr>
             <a:cxnSpLocks/>
             <a:stCxn id="61" idx="3"/>
-            <a:endCxn id="79" idx="2"/>
+            <a:endCxn id="80" idx="2"/>
           </p:cNvCxnSpPr>
           <p:nvPr/>
         </p:nvCxnSpPr>
         <p:spPr>
-          <a:xfrm flipV="1">
-            <a:off x="5867012" y="1621552"/>
-            <a:ext cx="484215" cy="502304"/>
+          <a:xfrm>
+            <a:off x="5880075" y="2437368"/>
+            <a:ext cx="471152" cy="2038"/>
           </a:xfrm>
           <a:prstGeom prst="straightConnector1">
             <a:avLst/>
@@ -5215,58 +5221,12 @@
           </a:fontRef>
         </p:style>
       </p:cxnSp>
-      <p:cxnSp>
-        <p:nvCxnSpPr>
-          <p:cNvPr id="67" name="Straight Arrow Connector 66">
-            <a:extLst>
-              <a:ext uri="{FF2B5EF4-FFF2-40B4-BE49-F238E27FC236}">
-                <a16:creationId xmlns:a16="http://schemas.microsoft.com/office/drawing/2014/main" id="{D4A00B54-FBA0-9263-2BF1-2745400A144A}"/>
-              </a:ext>
-            </a:extLst>
-          </p:cNvPr>
-          <p:cNvCxnSpPr>
-            <a:cxnSpLocks/>
-            <a:stCxn id="61" idx="3"/>
-            <a:endCxn id="80" idx="2"/>
-          </p:cNvCxnSpPr>
-          <p:nvPr/>
-        </p:nvCxnSpPr>
-        <p:spPr>
-          <a:xfrm>
-            <a:off x="5867012" y="2123856"/>
-            <a:ext cx="484215" cy="15103"/>
-          </a:xfrm>
-          <a:prstGeom prst="straightConnector1">
-            <a:avLst/>
-          </a:prstGeom>
-          <a:ln w="12700">
-            <a:solidFill>
-              <a:srgbClr val="00B0F0"/>
-            </a:solidFill>
-            <a:tailEnd type="triangle"/>
-          </a:ln>
-        </p:spPr>
-        <p:style>
-          <a:lnRef idx="2">
-            <a:schemeClr val="accent1"/>
-          </a:lnRef>
-          <a:fillRef idx="0">
-            <a:schemeClr val="accent1"/>
-          </a:fillRef>
-          <a:effectRef idx="1">
-            <a:schemeClr val="accent1"/>
-          </a:effectRef>
-          <a:fontRef idx="minor">
-            <a:schemeClr val="tx1"/>
-          </a:fontRef>
-        </p:style>
-      </p:cxnSp>
       <p:grpSp>
         <p:nvGrpSpPr>
           <p:cNvPr id="68" name="Group 67">
             <a:extLst>
               <a:ext uri="{FF2B5EF4-FFF2-40B4-BE49-F238E27FC236}">
-                <a16:creationId xmlns:a16="http://schemas.microsoft.com/office/drawing/2014/main" id="{3EF9862F-B70B-079C-270D-C2F1E9075598}"/>
+                <a16:creationId xmlns:a16="http://schemas.microsoft.com/office/drawing/2014/main" id="{14FC89CD-8299-9EFF-336D-CD30A13F4B3A}"/>
               </a:ext>
             </a:extLst>
           </p:cNvPr>
@@ -5275,7 +5235,7 @@
         </p:nvGrpSpPr>
         <p:grpSpPr>
           <a:xfrm>
-            <a:off x="7244563" y="1424003"/>
+            <a:off x="7244563" y="1724450"/>
             <a:ext cx="334694" cy="914743"/>
             <a:chOff x="6724841" y="1876216"/>
             <a:chExt cx="363072" cy="992303"/>
@@ -5292,7 +5252,7 @@
             <p:cNvPr id="77" name="Rectangle 76">
               <a:extLst>
                 <a:ext uri="{FF2B5EF4-FFF2-40B4-BE49-F238E27FC236}">
-                  <a16:creationId xmlns:a16="http://schemas.microsoft.com/office/drawing/2014/main" id="{B3EB0905-B8D2-1BB4-8636-932B4698207A}"/>
+                  <a16:creationId xmlns:a16="http://schemas.microsoft.com/office/drawing/2014/main" id="{E341CFF0-01B8-5DB9-B22B-B93901F73E7F}"/>
                 </a:ext>
               </a:extLst>
             </p:cNvPr>
@@ -5342,7 +5302,7 @@
             <p:cNvPr id="78" name="Rectangle 77">
               <a:extLst>
                 <a:ext uri="{FF2B5EF4-FFF2-40B4-BE49-F238E27FC236}">
-                  <a16:creationId xmlns:a16="http://schemas.microsoft.com/office/drawing/2014/main" id="{EAC81710-ED4B-0188-6A4E-AEA3812747AC}"/>
+                  <a16:creationId xmlns:a16="http://schemas.microsoft.com/office/drawing/2014/main" id="{8D3EAC39-4B95-C390-F01F-9C04379ACE41}"/>
                 </a:ext>
               </a:extLst>
             </p:cNvPr>
@@ -5393,7 +5353,7 @@
           <p:cNvPr id="69" name="Straight Arrow Connector 68">
             <a:extLst>
               <a:ext uri="{FF2B5EF4-FFF2-40B4-BE49-F238E27FC236}">
-                <a16:creationId xmlns:a16="http://schemas.microsoft.com/office/drawing/2014/main" id="{8577F77C-8355-9CE8-3B72-ACEC00615C21}"/>
+                <a16:creationId xmlns:a16="http://schemas.microsoft.com/office/drawing/2014/main" id="{BA769B34-EADC-DB37-6C07-D302132B4CD6}"/>
               </a:ext>
             </a:extLst>
           </p:cNvPr>
@@ -5406,7 +5366,7 @@
         </p:nvCxnSpPr>
         <p:spPr>
           <a:xfrm flipV="1">
-            <a:off x="6782218" y="1621499"/>
+            <a:off x="6782218" y="1921946"/>
             <a:ext cx="462345" cy="53"/>
           </a:xfrm>
           <a:prstGeom prst="straightConnector1">
@@ -5439,7 +5399,7 @@
           <p:cNvPr id="70" name="Straight Arrow Connector 69">
             <a:extLst>
               <a:ext uri="{FF2B5EF4-FFF2-40B4-BE49-F238E27FC236}">
-                <a16:creationId xmlns:a16="http://schemas.microsoft.com/office/drawing/2014/main" id="{7E2D2A81-4C71-F480-350E-6BB69F0A2272}"/>
+                <a16:creationId xmlns:a16="http://schemas.microsoft.com/office/drawing/2014/main" id="{B615AA88-938C-141E-5BE9-53078DB692E1}"/>
               </a:ext>
             </a:extLst>
           </p:cNvPr>
@@ -5452,7 +5412,7 @@
         </p:nvCxnSpPr>
         <p:spPr>
           <a:xfrm>
-            <a:off x="6782218" y="2138959"/>
+            <a:off x="6782218" y="2439406"/>
             <a:ext cx="462346" cy="17318"/>
           </a:xfrm>
           <a:prstGeom prst="straightConnector1">
@@ -5485,7 +5445,7 @@
           <p:cNvPr id="72" name="Group 71">
             <a:extLst>
               <a:ext uri="{FF2B5EF4-FFF2-40B4-BE49-F238E27FC236}">
-                <a16:creationId xmlns:a16="http://schemas.microsoft.com/office/drawing/2014/main" id="{2C2EF312-DA0B-FD7B-BC2F-A25A802178EE}"/>
+                <a16:creationId xmlns:a16="http://schemas.microsoft.com/office/drawing/2014/main" id="{0D110603-8361-FB64-F447-25B848CB58D5}"/>
               </a:ext>
             </a:extLst>
           </p:cNvPr>
@@ -5494,10 +5454,10 @@
         </p:nvGrpSpPr>
         <p:grpSpPr>
           <a:xfrm>
-            <a:off x="5854075" y="817827"/>
-            <a:ext cx="1415691" cy="2223136"/>
-            <a:chOff x="2220380" y="1834641"/>
-            <a:chExt cx="1039907" cy="2692535"/>
+            <a:off x="5864928" y="1327985"/>
+            <a:ext cx="1415691" cy="1843088"/>
+            <a:chOff x="2228352" y="2088630"/>
+            <a:chExt cx="1039907" cy="2438545"/>
           </a:xfrm>
         </p:grpSpPr>
         <p:sp>
@@ -5505,7 +5465,7 @@
             <p:cNvPr id="73" name="TextBox 72">
               <a:extLst>
                 <a:ext uri="{FF2B5EF4-FFF2-40B4-BE49-F238E27FC236}">
-                  <a16:creationId xmlns:a16="http://schemas.microsoft.com/office/drawing/2014/main" id="{B6411EC0-34B6-EA5D-C97D-0451BA0E1B0C}"/>
+                  <a16:creationId xmlns:a16="http://schemas.microsoft.com/office/drawing/2014/main" id="{15D1D861-F0F4-3ECF-788E-51DDCCB29992}"/>
                 </a:ext>
               </a:extLst>
             </p:cNvPr>
@@ -5514,7 +5474,7 @@
           </p:nvSpPr>
           <p:spPr>
             <a:xfrm>
-              <a:off x="2220380" y="1898993"/>
+              <a:off x="2228352" y="2088630"/>
               <a:ext cx="1039907" cy="561860"/>
             </a:xfrm>
             <a:prstGeom prst="rect">
@@ -5553,7 +5513,7 @@
             <p:cNvPr id="74" name="Rectangle: Rounded Corners 73">
               <a:extLst>
                 <a:ext uri="{FF2B5EF4-FFF2-40B4-BE49-F238E27FC236}">
-                  <a16:creationId xmlns:a16="http://schemas.microsoft.com/office/drawing/2014/main" id="{91F61A00-2FF6-A00B-3A6F-A2BF8BF52B47}"/>
+                  <a16:creationId xmlns:a16="http://schemas.microsoft.com/office/drawing/2014/main" id="{1AD7DAC7-6F5A-219B-F344-E679C766A784}"/>
                 </a:ext>
               </a:extLst>
             </p:cNvPr>
@@ -5562,8 +5522,8 @@
           </p:nvSpPr>
           <p:spPr>
             <a:xfrm>
-              <a:off x="2362200" y="1834641"/>
-              <a:ext cx="776608" cy="2692535"/>
+              <a:off x="2398088" y="2091103"/>
+              <a:ext cx="654576" cy="2436072"/>
             </a:xfrm>
             <a:prstGeom prst="roundRect">
               <a:avLst/>
@@ -5610,7 +5570,7 @@
           <p:cNvPr id="83" name="Group 82">
             <a:extLst>
               <a:ext uri="{FF2B5EF4-FFF2-40B4-BE49-F238E27FC236}">
-                <a16:creationId xmlns:a16="http://schemas.microsoft.com/office/drawing/2014/main" id="{9ED7A7AE-73EF-44C2-83B8-B754D60D491D}"/>
+                <a16:creationId xmlns:a16="http://schemas.microsoft.com/office/drawing/2014/main" id="{929A2215-894A-EF09-850B-0F07FF4C9FEB}"/>
               </a:ext>
             </a:extLst>
           </p:cNvPr>
@@ -5619,10 +5579,10 @@
         </p:nvGrpSpPr>
         <p:grpSpPr>
           <a:xfrm>
-            <a:off x="200025" y="1307977"/>
-            <a:ext cx="3503048" cy="4185982"/>
-            <a:chOff x="392845" y="464697"/>
-            <a:chExt cx="5462280" cy="5913842"/>
+            <a:off x="200025" y="1855173"/>
+            <a:ext cx="3954152" cy="3638786"/>
+            <a:chOff x="392845" y="1237761"/>
+            <a:chExt cx="6165683" cy="5140778"/>
           </a:xfrm>
         </p:grpSpPr>
         <p:sp>
@@ -5630,7 +5590,7 @@
             <p:cNvPr id="84" name="Rectangle: Rounded Corners 83">
               <a:extLst>
                 <a:ext uri="{FF2B5EF4-FFF2-40B4-BE49-F238E27FC236}">
-                  <a16:creationId xmlns:a16="http://schemas.microsoft.com/office/drawing/2014/main" id="{5AF56833-5B3D-A46C-A264-201E1D209001}"/>
+                  <a16:creationId xmlns:a16="http://schemas.microsoft.com/office/drawing/2014/main" id="{124AAE86-1ADF-5371-081C-A721C693AF05}"/>
                 </a:ext>
               </a:extLst>
             </p:cNvPr>
@@ -5639,8 +5599,8 @@
           </p:nvSpPr>
           <p:spPr>
             <a:xfrm>
-              <a:off x="392845" y="479461"/>
-              <a:ext cx="5462280" cy="5899078"/>
+              <a:off x="392845" y="1237761"/>
+              <a:ext cx="5462280" cy="5140778"/>
             </a:xfrm>
             <a:prstGeom prst="roundRect">
               <a:avLst/>
@@ -5683,7 +5643,7 @@
             <p:cNvPr id="85" name="TextBox 84">
               <a:extLst>
                 <a:ext uri="{FF2B5EF4-FFF2-40B4-BE49-F238E27FC236}">
-                  <a16:creationId xmlns:a16="http://schemas.microsoft.com/office/drawing/2014/main" id="{6C6ED8EC-244D-DEFA-3A10-394B40CFAA33}"/>
+                  <a16:creationId xmlns:a16="http://schemas.microsoft.com/office/drawing/2014/main" id="{A78C6276-FC94-F902-96A7-9DE3B2952774}"/>
                 </a:ext>
               </a:extLst>
             </p:cNvPr>
@@ -5692,8 +5652,8 @@
           </p:nvSpPr>
           <p:spPr>
             <a:xfrm>
-              <a:off x="975028" y="464697"/>
-              <a:ext cx="4211049" cy="584775"/>
+              <a:off x="2347480" y="1387059"/>
+              <a:ext cx="4211048" cy="739191"/>
             </a:xfrm>
             <a:prstGeom prst="rect">
               <a:avLst/>
@@ -5708,7 +5668,7 @@
             <a:p>
               <a:pPr algn="ctr"/>
               <a:r>
-                <a:rPr lang="en-US" sz="3200" dirty="0">
+                <a:rPr lang="en-US" sz="2800" dirty="0">
                   <a:solidFill>
                     <a:srgbClr val="C00000"/>
                   </a:solidFill>
@@ -5724,7 +5684,7 @@
           <p:cNvPr id="86" name="Group 85">
             <a:extLst>
               <a:ext uri="{FF2B5EF4-FFF2-40B4-BE49-F238E27FC236}">
-                <a16:creationId xmlns:a16="http://schemas.microsoft.com/office/drawing/2014/main" id="{E727E48B-042B-3C77-F300-20467D5B946E}"/>
+                <a16:creationId xmlns:a16="http://schemas.microsoft.com/office/drawing/2014/main" id="{3DC0B56A-F038-A064-E3E0-5B4BD06F612D}"/>
               </a:ext>
             </a:extLst>
           </p:cNvPr>
@@ -5733,10 +5693,10 @@
         </p:nvGrpSpPr>
         <p:grpSpPr>
           <a:xfrm>
-            <a:off x="4063998" y="158804"/>
-            <a:ext cx="3679889" cy="3107739"/>
-            <a:chOff x="392845" y="464697"/>
-            <a:chExt cx="5462280" cy="5913842"/>
+            <a:off x="4063998" y="881319"/>
+            <a:ext cx="3679889" cy="2406467"/>
+            <a:chOff x="392845" y="1591020"/>
+            <a:chExt cx="5462280" cy="4579364"/>
           </a:xfrm>
         </p:grpSpPr>
         <p:sp>
@@ -5744,7 +5704,7 @@
             <p:cNvPr id="87" name="Rectangle: Rounded Corners 86">
               <a:extLst>
                 <a:ext uri="{FF2B5EF4-FFF2-40B4-BE49-F238E27FC236}">
-                  <a16:creationId xmlns:a16="http://schemas.microsoft.com/office/drawing/2014/main" id="{299A9339-EC08-5782-25AA-A498E99B62F3}"/>
+                  <a16:creationId xmlns:a16="http://schemas.microsoft.com/office/drawing/2014/main" id="{42014BCD-F78C-A8C7-34D9-982722D39E88}"/>
                 </a:ext>
               </a:extLst>
             </p:cNvPr>
@@ -5753,8 +5713,8 @@
           </p:nvSpPr>
           <p:spPr>
             <a:xfrm>
-              <a:off x="392845" y="479461"/>
-              <a:ext cx="5462280" cy="5899078"/>
+              <a:off x="392845" y="1630070"/>
+              <a:ext cx="5462280" cy="4540314"/>
             </a:xfrm>
             <a:prstGeom prst="roundRect">
               <a:avLst/>
@@ -5797,7 +5757,7 @@
             <p:cNvPr id="88" name="TextBox 87">
               <a:extLst>
                 <a:ext uri="{FF2B5EF4-FFF2-40B4-BE49-F238E27FC236}">
-                  <a16:creationId xmlns:a16="http://schemas.microsoft.com/office/drawing/2014/main" id="{1634C304-F6B0-B209-8889-DFB53F1A874A}"/>
+                  <a16:creationId xmlns:a16="http://schemas.microsoft.com/office/drawing/2014/main" id="{5A591048-4BAD-758B-EF59-90428EC5B8F1}"/>
                 </a:ext>
               </a:extLst>
             </p:cNvPr>
@@ -5806,8 +5766,8 @@
           </p:nvSpPr>
           <p:spPr>
             <a:xfrm>
-              <a:off x="975027" y="464697"/>
-              <a:ext cx="4211049" cy="1037749"/>
+              <a:off x="678596" y="1591020"/>
+              <a:ext cx="4211049" cy="995657"/>
             </a:xfrm>
             <a:prstGeom prst="rect">
               <a:avLst/>
@@ -5822,7 +5782,7 @@
             <a:p>
               <a:pPr algn="ctr"/>
               <a:r>
-                <a:rPr lang="en-US" sz="3200" dirty="0">
+                <a:rPr lang="en-US" sz="2800" dirty="0">
                   <a:solidFill>
                     <a:srgbClr val="C00000"/>
                   </a:solidFill>
@@ -5838,7 +5798,7 @@
           <p:cNvPr id="101" name="Rectangle 100">
             <a:extLst>
               <a:ext uri="{FF2B5EF4-FFF2-40B4-BE49-F238E27FC236}">
-                <a16:creationId xmlns:a16="http://schemas.microsoft.com/office/drawing/2014/main" id="{BFC40897-E61D-84E3-96C3-41198F427A3F}"/>
+                <a16:creationId xmlns:a16="http://schemas.microsoft.com/office/drawing/2014/main" id="{A72AA30B-49D0-CEA0-6A5B-F0961BC0CFA4}"/>
               </a:ext>
             </a:extLst>
           </p:cNvPr>
@@ -5893,7 +5853,7 @@
           <p:cNvPr id="102" name="Straight Arrow Connector 101">
             <a:extLst>
               <a:ext uri="{FF2B5EF4-FFF2-40B4-BE49-F238E27FC236}">
-                <a16:creationId xmlns:a16="http://schemas.microsoft.com/office/drawing/2014/main" id="{BAE4D07D-5F7D-6CD8-9D37-BA13A8848F77}"/>
+                <a16:creationId xmlns:a16="http://schemas.microsoft.com/office/drawing/2014/main" id="{35AEDA22-8C69-DD40-3722-6F1946473637}"/>
               </a:ext>
             </a:extLst>
           </p:cNvPr>
@@ -5939,7 +5899,7 @@
           <p:cNvPr id="103" name="Straight Arrow Connector 102">
             <a:extLst>
               <a:ext uri="{FF2B5EF4-FFF2-40B4-BE49-F238E27FC236}">
-                <a16:creationId xmlns:a16="http://schemas.microsoft.com/office/drawing/2014/main" id="{E56E9912-49ED-0545-3734-D5F719FA29CA}"/>
+                <a16:creationId xmlns:a16="http://schemas.microsoft.com/office/drawing/2014/main" id="{D23ABDAC-9409-C12B-C8BF-894957BDA39C}"/>
               </a:ext>
             </a:extLst>
           </p:cNvPr>
@@ -5985,7 +5945,7 @@
           <p:cNvPr id="104" name="Straight Arrow Connector 103">
             <a:extLst>
               <a:ext uri="{FF2B5EF4-FFF2-40B4-BE49-F238E27FC236}">
-                <a16:creationId xmlns:a16="http://schemas.microsoft.com/office/drawing/2014/main" id="{224A953C-BED0-6777-8C64-CB3F6D00465A}"/>
+                <a16:creationId xmlns:a16="http://schemas.microsoft.com/office/drawing/2014/main" id="{44B59060-6E28-B020-1B32-48952B419CA3}"/>
               </a:ext>
             </a:extLst>
           </p:cNvPr>
@@ -6031,7 +5991,7 @@
           <p:cNvPr id="105" name="Straight Arrow Connector 104">
             <a:extLst>
               <a:ext uri="{FF2B5EF4-FFF2-40B4-BE49-F238E27FC236}">
-                <a16:creationId xmlns:a16="http://schemas.microsoft.com/office/drawing/2014/main" id="{BD89D4E7-FFE3-BF80-F516-545DFDC64350}"/>
+                <a16:creationId xmlns:a16="http://schemas.microsoft.com/office/drawing/2014/main" id="{B071CFA4-83F7-43E0-97FD-5DAB5326DB24}"/>
               </a:ext>
             </a:extLst>
           </p:cNvPr>
@@ -6077,7 +6037,7 @@
           <p:cNvPr id="110" name="TextBox 109">
             <a:extLst>
               <a:ext uri="{FF2B5EF4-FFF2-40B4-BE49-F238E27FC236}">
-                <a16:creationId xmlns:a16="http://schemas.microsoft.com/office/drawing/2014/main" id="{27BBA57E-0E02-6507-B259-78DD2B084398}"/>
+                <a16:creationId xmlns:a16="http://schemas.microsoft.com/office/drawing/2014/main" id="{F5F43358-54D9-92F6-F047-C694239CF338}"/>
               </a:ext>
             </a:extLst>
           </p:cNvPr>
@@ -6134,7 +6094,7 @@
           <p:cNvPr id="127" name="Straight Arrow Connector 126">
             <a:extLst>
               <a:ext uri="{FF2B5EF4-FFF2-40B4-BE49-F238E27FC236}">
-                <a16:creationId xmlns:a16="http://schemas.microsoft.com/office/drawing/2014/main" id="{FBF30B28-392D-98E0-FE5D-F138DDBDF87F}"/>
+                <a16:creationId xmlns:a16="http://schemas.microsoft.com/office/drawing/2014/main" id="{C065F6FB-32A7-AABD-9E5F-02650E6BDC78}"/>
               </a:ext>
             </a:extLst>
           </p:cNvPr>
@@ -6180,7 +6140,7 @@
           <p:cNvPr id="130" name="Straight Arrow Connector 129">
             <a:extLst>
               <a:ext uri="{FF2B5EF4-FFF2-40B4-BE49-F238E27FC236}">
-                <a16:creationId xmlns:a16="http://schemas.microsoft.com/office/drawing/2014/main" id="{6200E53D-6261-3803-2C9D-030FC2602A27}"/>
+                <a16:creationId xmlns:a16="http://schemas.microsoft.com/office/drawing/2014/main" id="{415B9FAD-EBB0-18BD-3DD6-5898129E95FE}"/>
               </a:ext>
             </a:extLst>
           </p:cNvPr>
@@ -6226,7 +6186,7 @@
           <p:cNvPr id="133" name="Straight Arrow Connector 132">
             <a:extLst>
               <a:ext uri="{FF2B5EF4-FFF2-40B4-BE49-F238E27FC236}">
-                <a16:creationId xmlns:a16="http://schemas.microsoft.com/office/drawing/2014/main" id="{97503722-C706-D7BC-3138-7F4D17EB013E}"/>
+                <a16:creationId xmlns:a16="http://schemas.microsoft.com/office/drawing/2014/main" id="{B33D19E6-0D93-BE58-0725-6E1B2DA1B7F8}"/>
               </a:ext>
             </a:extLst>
           </p:cNvPr>
@@ -6272,7 +6232,7 @@
           <p:cNvPr id="139" name="Straight Arrow Connector 138">
             <a:extLst>
               <a:ext uri="{FF2B5EF4-FFF2-40B4-BE49-F238E27FC236}">
-                <a16:creationId xmlns:a16="http://schemas.microsoft.com/office/drawing/2014/main" id="{AC0C2C57-675E-5864-EE49-8E494448FFEE}"/>
+                <a16:creationId xmlns:a16="http://schemas.microsoft.com/office/drawing/2014/main" id="{AB6B162F-70AB-77D4-EC84-A4BB8E090453}"/>
               </a:ext>
             </a:extLst>
           </p:cNvPr>
@@ -6318,7 +6278,7 @@
           <p:cNvPr id="142" name="TextBox 141">
             <a:extLst>
               <a:ext uri="{FF2B5EF4-FFF2-40B4-BE49-F238E27FC236}">
-                <a16:creationId xmlns:a16="http://schemas.microsoft.com/office/drawing/2014/main" id="{A9F78E85-FB09-8152-2116-7711E79FDD2A}"/>
+                <a16:creationId xmlns:a16="http://schemas.microsoft.com/office/drawing/2014/main" id="{0702434A-9152-FCF3-ADF6-2B67E3329797}"/>
               </a:ext>
             </a:extLst>
           </p:cNvPr>
@@ -6375,7 +6335,7 @@
           <p:cNvPr id="159" name="Rectangle 158">
             <a:extLst>
               <a:ext uri="{FF2B5EF4-FFF2-40B4-BE49-F238E27FC236}">
-                <a16:creationId xmlns:a16="http://schemas.microsoft.com/office/drawing/2014/main" id="{35F06F40-8972-33D4-770B-17858F3D5712}"/>
+                <a16:creationId xmlns:a16="http://schemas.microsoft.com/office/drawing/2014/main" id="{35BEB095-A233-302C-ECE1-71EA69054970}"/>
               </a:ext>
             </a:extLst>
           </p:cNvPr>
@@ -6384,7 +6344,7 @@
         </p:nvSpPr>
         <p:spPr>
           <a:xfrm>
-            <a:off x="5487115" y="1427336"/>
+            <a:off x="5500178" y="1740848"/>
             <a:ext cx="379897" cy="446738"/>
           </a:xfrm>
           <a:prstGeom prst="rect">
@@ -6430,7 +6390,7 @@
           <p:cNvPr id="297" name="Group 296">
             <a:extLst>
               <a:ext uri="{FF2B5EF4-FFF2-40B4-BE49-F238E27FC236}">
-                <a16:creationId xmlns:a16="http://schemas.microsoft.com/office/drawing/2014/main" id="{9883C16D-6BF8-E09B-4308-1C74FE0A2912}"/>
+                <a16:creationId xmlns:a16="http://schemas.microsoft.com/office/drawing/2014/main" id="{00E35B7E-B5D9-A03B-79E4-15EDC5351C26}"/>
               </a:ext>
             </a:extLst>
           </p:cNvPr>
@@ -6439,10 +6399,10 @@
         </p:nvGrpSpPr>
         <p:grpSpPr>
           <a:xfrm>
-            <a:off x="3933310" y="787754"/>
-            <a:ext cx="1798886" cy="2610585"/>
-            <a:chOff x="3709031" y="1069564"/>
-            <a:chExt cx="1604716" cy="2328801"/>
+            <a:off x="3932850" y="1308212"/>
+            <a:ext cx="1798886" cy="2403640"/>
+            <a:chOff x="3696968" y="1254172"/>
+            <a:chExt cx="1604716" cy="2144193"/>
           </a:xfrm>
         </p:grpSpPr>
         <p:grpSp>
@@ -6450,7 +6410,7 @@
             <p:cNvPr id="71" name="Group 70">
               <a:extLst>
                 <a:ext uri="{FF2B5EF4-FFF2-40B4-BE49-F238E27FC236}">
-                  <a16:creationId xmlns:a16="http://schemas.microsoft.com/office/drawing/2014/main" id="{A8B4AF5B-C702-2964-31FA-A31222F9CE1B}"/>
+                  <a16:creationId xmlns:a16="http://schemas.microsoft.com/office/drawing/2014/main" id="{597985F9-2A4A-E8DE-2286-E59915E67D82}"/>
                 </a:ext>
               </a:extLst>
             </p:cNvPr>
@@ -6459,10 +6419,10 @@
           </p:nvGrpSpPr>
           <p:grpSpPr>
             <a:xfrm>
-              <a:off x="3709031" y="1069564"/>
-              <a:ext cx="1604716" cy="1983172"/>
-              <a:chOff x="2262979" y="1834640"/>
-              <a:chExt cx="1039907" cy="2692536"/>
+              <a:off x="3696968" y="1254172"/>
+              <a:ext cx="1604716" cy="1676084"/>
+              <a:chOff x="2255162" y="2085280"/>
+              <a:chExt cx="1039907" cy="2275605"/>
             </a:xfrm>
           </p:grpSpPr>
           <p:sp>
@@ -6470,7 +6430,7 @@
               <p:cNvPr id="75" name="TextBox 74">
                 <a:extLst>
                   <a:ext uri="{FF2B5EF4-FFF2-40B4-BE49-F238E27FC236}">
-                    <a16:creationId xmlns:a16="http://schemas.microsoft.com/office/drawing/2014/main" id="{2B5FEE42-D8A4-DC52-8F86-5B966014991B}"/>
+                    <a16:creationId xmlns:a16="http://schemas.microsoft.com/office/drawing/2014/main" id="{D478ACC4-8C15-81CD-B723-5DD6AC121BCD}"/>
                   </a:ext>
                 </a:extLst>
               </p:cNvPr>
@@ -6479,7 +6439,7 @@
             </p:nvSpPr>
             <p:spPr>
               <a:xfrm>
-                <a:off x="2262979" y="1865985"/>
+                <a:off x="2255162" y="2085280"/>
                 <a:ext cx="1039907" cy="1018370"/>
               </a:xfrm>
               <a:prstGeom prst="rect">
@@ -6516,7 +6476,7 @@
               <p:cNvPr id="76" name="Rectangle: Rounded Corners 75">
                 <a:extLst>
                   <a:ext uri="{FF2B5EF4-FFF2-40B4-BE49-F238E27FC236}">
-                    <a16:creationId xmlns:a16="http://schemas.microsoft.com/office/drawing/2014/main" id="{078D5051-8B17-45B8-39BA-A29BB3EB14E7}"/>
+                    <a16:creationId xmlns:a16="http://schemas.microsoft.com/office/drawing/2014/main" id="{2A50C941-ABA2-6A1D-09D3-BD99F3CBCE96}"/>
                   </a:ext>
                 </a:extLst>
               </p:cNvPr>
@@ -6525,8 +6485,8 @@
             </p:nvSpPr>
             <p:spPr>
               <a:xfrm>
-                <a:off x="2451960" y="1834640"/>
-                <a:ext cx="629931" cy="2692536"/>
+                <a:off x="2499223" y="2116030"/>
+                <a:ext cx="523728" cy="2244855"/>
               </a:xfrm>
               <a:prstGeom prst="roundRect">
                 <a:avLst/>
@@ -6573,7 +6533,7 @@
             <p:cNvPr id="179" name="TextBox 178">
               <a:extLst>
                 <a:ext uri="{FF2B5EF4-FFF2-40B4-BE49-F238E27FC236}">
-                  <a16:creationId xmlns:a16="http://schemas.microsoft.com/office/drawing/2014/main" id="{FA036818-1499-49A9-F202-1BB57CD85A21}"/>
+                  <a16:creationId xmlns:a16="http://schemas.microsoft.com/office/drawing/2014/main" id="{AF2CB6F0-0938-EA7C-B974-9ED0EF9468E5}"/>
                 </a:ext>
               </a:extLst>
             </p:cNvPr>
@@ -6631,7 +6591,7 @@
           <p:cNvPr id="180" name="Straight Arrow Connector 179">
             <a:extLst>
               <a:ext uri="{FF2B5EF4-FFF2-40B4-BE49-F238E27FC236}">
-                <a16:creationId xmlns:a16="http://schemas.microsoft.com/office/drawing/2014/main" id="{C071847C-DDD1-EE0C-13EF-7401E205E9D0}"/>
+                <a16:creationId xmlns:a16="http://schemas.microsoft.com/office/drawing/2014/main" id="{13755B2F-1BFC-F920-B4B7-1A6523B0A3E5}"/>
               </a:ext>
             </a:extLst>
           </p:cNvPr>
@@ -6644,8 +6604,8 @@
         </p:nvCxnSpPr>
         <p:spPr>
           <a:xfrm flipV="1">
-            <a:off x="5867012" y="1621552"/>
-            <a:ext cx="484215" cy="29153"/>
+            <a:off x="5880075" y="1921999"/>
+            <a:ext cx="471152" cy="42218"/>
           </a:xfrm>
           <a:prstGeom prst="straightConnector1">
             <a:avLst/>
@@ -6672,58 +6632,12 @@
           </a:fontRef>
         </p:style>
       </p:cxnSp>
-      <p:cxnSp>
-        <p:nvCxnSpPr>
-          <p:cNvPr id="183" name="Straight Arrow Connector 182">
-            <a:extLst>
-              <a:ext uri="{FF2B5EF4-FFF2-40B4-BE49-F238E27FC236}">
-                <a16:creationId xmlns:a16="http://schemas.microsoft.com/office/drawing/2014/main" id="{7A56FAAD-450E-913C-51EF-A7F68B593594}"/>
-              </a:ext>
-            </a:extLst>
-          </p:cNvPr>
-          <p:cNvCxnSpPr>
-            <a:cxnSpLocks/>
-            <a:stCxn id="159" idx="3"/>
-            <a:endCxn id="80" idx="2"/>
-          </p:cNvCxnSpPr>
-          <p:nvPr/>
-        </p:nvCxnSpPr>
-        <p:spPr>
-          <a:xfrm>
-            <a:off x="5867012" y="1650705"/>
-            <a:ext cx="484215" cy="488254"/>
-          </a:xfrm>
-          <a:prstGeom prst="straightConnector1">
-            <a:avLst/>
-          </a:prstGeom>
-          <a:ln w="12700">
-            <a:solidFill>
-              <a:srgbClr val="00B0F0"/>
-            </a:solidFill>
-            <a:tailEnd type="triangle"/>
-          </a:ln>
-        </p:spPr>
-        <p:style>
-          <a:lnRef idx="2">
-            <a:schemeClr val="accent1"/>
-          </a:lnRef>
-          <a:fillRef idx="0">
-            <a:schemeClr val="accent1"/>
-          </a:fillRef>
-          <a:effectRef idx="1">
-            <a:schemeClr val="accent1"/>
-          </a:effectRef>
-          <a:fontRef idx="minor">
-            <a:schemeClr val="tx1"/>
-          </a:fontRef>
-        </p:style>
-      </p:cxnSp>
       <p:sp>
         <p:nvSpPr>
           <p:cNvPr id="197" name="TextBox 196">
             <a:extLst>
               <a:ext uri="{FF2B5EF4-FFF2-40B4-BE49-F238E27FC236}">
-                <a16:creationId xmlns:a16="http://schemas.microsoft.com/office/drawing/2014/main" id="{BF8CACFF-429F-9C4B-209A-5493D574D71F}"/>
+                <a16:creationId xmlns:a16="http://schemas.microsoft.com/office/drawing/2014/main" id="{B0038837-6EA4-2907-317C-1CEF7CE27854}"/>
               </a:ext>
             </a:extLst>
           </p:cNvPr>
@@ -6732,7 +6646,7 @@
         </p:nvSpPr>
         <p:spPr>
           <a:xfrm>
-            <a:off x="5901984" y="2337095"/>
+            <a:off x="5901984" y="2637542"/>
             <a:ext cx="1319872" cy="1077218"/>
           </a:xfrm>
           <a:prstGeom prst="rect">
@@ -6775,845 +6689,12 @@
           </a:p>
         </p:txBody>
       </p:sp>
-      <p:sp>
-        <p:nvSpPr>
-          <p:cNvPr id="208" name="Rectangle 207">
-            <a:extLst>
-              <a:ext uri="{FF2B5EF4-FFF2-40B4-BE49-F238E27FC236}">
-                <a16:creationId xmlns:a16="http://schemas.microsoft.com/office/drawing/2014/main" id="{FD8C29B3-2684-AED2-C19B-4AB01FAF2F37}"/>
-              </a:ext>
-            </a:extLst>
-          </p:cNvPr>
-          <p:cNvSpPr/>
-          <p:nvPr/>
-        </p:nvSpPr>
-        <p:spPr>
-          <a:xfrm>
-            <a:off x="5485031" y="5348935"/>
-            <a:ext cx="379897" cy="405247"/>
-          </a:xfrm>
-          <a:prstGeom prst="rect">
-            <a:avLst/>
-          </a:prstGeom>
-          <a:solidFill>
-            <a:schemeClr val="accent1">
-              <a:lumMod val="60000"/>
-              <a:lumOff val="40000"/>
-            </a:schemeClr>
-          </a:solidFill>
-          <a:ln>
-            <a:noFill/>
-          </a:ln>
-        </p:spPr>
-        <p:style>
-          <a:lnRef idx="2">
-            <a:schemeClr val="accent1">
-              <a:shade val="15000"/>
-            </a:schemeClr>
-          </a:lnRef>
-          <a:fillRef idx="1">
-            <a:schemeClr val="accent1"/>
-          </a:fillRef>
-          <a:effectRef idx="0">
-            <a:schemeClr val="accent1"/>
-          </a:effectRef>
-          <a:fontRef idx="minor">
-            <a:schemeClr val="lt1"/>
-          </a:fontRef>
-        </p:style>
-        <p:txBody>
-          <a:bodyPr rtlCol="0" anchor="ctr"/>
-          <a:lstStyle/>
-          <a:p>
-            <a:pPr algn="ctr"/>
-            <a:endParaRPr lang="en-US" sz="3200"/>
-          </a:p>
-        </p:txBody>
-      </p:sp>
-      <p:grpSp>
-        <p:nvGrpSpPr>
-          <p:cNvPr id="209" name="Group 208">
-            <a:extLst>
-              <a:ext uri="{FF2B5EF4-FFF2-40B4-BE49-F238E27FC236}">
-                <a16:creationId xmlns:a16="http://schemas.microsoft.com/office/drawing/2014/main" id="{89717330-D7C8-84DB-2B90-7D69462C0BFF}"/>
-              </a:ext>
-            </a:extLst>
-          </p:cNvPr>
-          <p:cNvGrpSpPr/>
-          <p:nvPr/>
-        </p:nvGrpSpPr>
-        <p:grpSpPr>
-          <a:xfrm>
-            <a:off x="4597568" y="4826565"/>
-            <a:ext cx="433450" cy="960431"/>
-            <a:chOff x="2661401" y="2604643"/>
-            <a:chExt cx="285510" cy="632628"/>
-          </a:xfrm>
-        </p:grpSpPr>
-        <p:sp>
-          <p:nvSpPr>
-            <p:cNvPr id="210" name="Oval 209">
-              <a:extLst>
-                <a:ext uri="{FF2B5EF4-FFF2-40B4-BE49-F238E27FC236}">
-                  <a16:creationId xmlns:a16="http://schemas.microsoft.com/office/drawing/2014/main" id="{9DA78F99-EF97-2809-4FF1-686D2EBDCBE3}"/>
-                </a:ext>
-              </a:extLst>
-            </p:cNvPr>
-            <p:cNvSpPr/>
-            <p:nvPr/>
-          </p:nvSpPr>
-          <p:spPr>
-            <a:xfrm>
-              <a:off x="2661401" y="2604643"/>
-              <a:ext cx="283277" cy="283276"/>
-            </a:xfrm>
-            <a:prstGeom prst="ellipse">
-              <a:avLst/>
-            </a:prstGeom>
-            <a:solidFill>
-              <a:schemeClr val="accent2"/>
-            </a:solidFill>
-            <a:ln>
-              <a:noFill/>
-            </a:ln>
-          </p:spPr>
-          <p:style>
-            <a:lnRef idx="2">
-              <a:schemeClr val="accent1">
-                <a:shade val="15000"/>
-              </a:schemeClr>
-            </a:lnRef>
-            <a:fillRef idx="1">
-              <a:schemeClr val="accent1"/>
-            </a:fillRef>
-            <a:effectRef idx="0">
-              <a:schemeClr val="accent1"/>
-            </a:effectRef>
-            <a:fontRef idx="minor">
-              <a:schemeClr val="lt1"/>
-            </a:fontRef>
-          </p:style>
-          <p:txBody>
-            <a:bodyPr rtlCol="0" anchor="ctr"/>
-            <a:lstStyle/>
-            <a:p>
-              <a:pPr algn="ctr"/>
-              <a:endParaRPr lang="en-US" sz="3200" dirty="0"/>
-            </a:p>
-          </p:txBody>
-        </p:sp>
-        <p:sp>
-          <p:nvSpPr>
-            <p:cNvPr id="211" name="Oval 210">
-              <a:extLst>
-                <a:ext uri="{FF2B5EF4-FFF2-40B4-BE49-F238E27FC236}">
-                  <a16:creationId xmlns:a16="http://schemas.microsoft.com/office/drawing/2014/main" id="{F62BBDAC-05B8-DFF5-7561-48F602B964DF}"/>
-                </a:ext>
-              </a:extLst>
-            </p:cNvPr>
-            <p:cNvSpPr/>
-            <p:nvPr/>
-          </p:nvSpPr>
-          <p:spPr>
-            <a:xfrm>
-              <a:off x="2663634" y="2953995"/>
-              <a:ext cx="283277" cy="283276"/>
-            </a:xfrm>
-            <a:prstGeom prst="ellipse">
-              <a:avLst/>
-            </a:prstGeom>
-            <a:solidFill>
-              <a:schemeClr val="accent2"/>
-            </a:solidFill>
-            <a:ln>
-              <a:noFill/>
-            </a:ln>
-          </p:spPr>
-          <p:style>
-            <a:lnRef idx="2">
-              <a:schemeClr val="accent1">
-                <a:shade val="15000"/>
-              </a:schemeClr>
-            </a:lnRef>
-            <a:fillRef idx="1">
-              <a:schemeClr val="accent1"/>
-            </a:fillRef>
-            <a:effectRef idx="0">
-              <a:schemeClr val="accent1"/>
-            </a:effectRef>
-            <a:fontRef idx="minor">
-              <a:schemeClr val="lt1"/>
-            </a:fontRef>
-          </p:style>
-          <p:txBody>
-            <a:bodyPr rtlCol="0" anchor="ctr"/>
-            <a:lstStyle/>
-            <a:p>
-              <a:pPr algn="ctr"/>
-              <a:endParaRPr lang="en-US" sz="3200" dirty="0"/>
-            </a:p>
-          </p:txBody>
-        </p:sp>
-      </p:grpSp>
-      <p:cxnSp>
-        <p:nvCxnSpPr>
-          <p:cNvPr id="212" name="Straight Arrow Connector 211">
-            <a:extLst>
-              <a:ext uri="{FF2B5EF4-FFF2-40B4-BE49-F238E27FC236}">
-                <a16:creationId xmlns:a16="http://schemas.microsoft.com/office/drawing/2014/main" id="{C2CD2F17-AF5A-B506-06DF-DFEB6BA649E6}"/>
-              </a:ext>
-            </a:extLst>
-          </p:cNvPr>
-          <p:cNvCxnSpPr>
-            <a:cxnSpLocks/>
-            <a:stCxn id="210" idx="6"/>
-            <a:endCxn id="233" idx="1"/>
-          </p:cNvCxnSpPr>
-          <p:nvPr/>
-        </p:nvCxnSpPr>
-        <p:spPr>
-          <a:xfrm>
-            <a:off x="5027628" y="5041595"/>
-            <a:ext cx="457403" cy="36813"/>
-          </a:xfrm>
-          <a:prstGeom prst="straightConnector1">
-            <a:avLst/>
-          </a:prstGeom>
-          <a:ln w="12700">
-            <a:solidFill>
-              <a:srgbClr val="00B0F0"/>
-            </a:solidFill>
-            <a:tailEnd type="triangle"/>
-          </a:ln>
-        </p:spPr>
-        <p:style>
-          <a:lnRef idx="2">
-            <a:schemeClr val="accent1"/>
-          </a:lnRef>
-          <a:fillRef idx="0">
-            <a:schemeClr val="accent1"/>
-          </a:fillRef>
-          <a:effectRef idx="1">
-            <a:schemeClr val="accent1"/>
-          </a:effectRef>
-          <a:fontRef idx="minor">
-            <a:schemeClr val="tx1"/>
-          </a:fontRef>
-        </p:style>
-      </p:cxnSp>
-      <p:cxnSp>
-        <p:nvCxnSpPr>
-          <p:cNvPr id="213" name="Straight Arrow Connector 212">
-            <a:extLst>
-              <a:ext uri="{FF2B5EF4-FFF2-40B4-BE49-F238E27FC236}">
-                <a16:creationId xmlns:a16="http://schemas.microsoft.com/office/drawing/2014/main" id="{89D6CC16-B9A2-A595-026F-8D06CEDEF264}"/>
-              </a:ext>
-            </a:extLst>
-          </p:cNvPr>
-          <p:cNvCxnSpPr>
-            <a:cxnSpLocks/>
-            <a:stCxn id="211" idx="6"/>
-            <a:endCxn id="208" idx="1"/>
-          </p:cNvCxnSpPr>
-          <p:nvPr/>
-        </p:nvCxnSpPr>
-        <p:spPr>
-          <a:xfrm flipV="1">
-            <a:off x="5031018" y="5551559"/>
-            <a:ext cx="454013" cy="20408"/>
-          </a:xfrm>
-          <a:prstGeom prst="straightConnector1">
-            <a:avLst/>
-          </a:prstGeom>
-          <a:ln w="12700">
-            <a:solidFill>
-              <a:srgbClr val="00B0F0"/>
-            </a:solidFill>
-            <a:tailEnd type="triangle"/>
-          </a:ln>
-        </p:spPr>
-        <p:style>
-          <a:lnRef idx="2">
-            <a:schemeClr val="accent1"/>
-          </a:lnRef>
-          <a:fillRef idx="0">
-            <a:schemeClr val="accent1"/>
-          </a:fillRef>
-          <a:effectRef idx="1">
-            <a:schemeClr val="accent1"/>
-          </a:effectRef>
-          <a:fontRef idx="minor">
-            <a:schemeClr val="tx1"/>
-          </a:fontRef>
-        </p:style>
-      </p:cxnSp>
-      <p:grpSp>
-        <p:nvGrpSpPr>
-          <p:cNvPr id="214" name="Group 213">
-            <a:extLst>
-              <a:ext uri="{FF2B5EF4-FFF2-40B4-BE49-F238E27FC236}">
-                <a16:creationId xmlns:a16="http://schemas.microsoft.com/office/drawing/2014/main" id="{1ABA7B39-2519-3B57-B5D7-77F0CAD19038}"/>
-              </a:ext>
-            </a:extLst>
-          </p:cNvPr>
-          <p:cNvGrpSpPr/>
-          <p:nvPr/>
-        </p:nvGrpSpPr>
-        <p:grpSpPr>
-          <a:xfrm>
-            <a:off x="6349143" y="4833759"/>
-            <a:ext cx="430991" cy="948398"/>
-            <a:chOff x="6234952" y="1863964"/>
-            <a:chExt cx="443753" cy="976481"/>
-          </a:xfrm>
-          <a:solidFill>
-            <a:schemeClr val="accent2">
-              <a:lumMod val="50000"/>
-            </a:schemeClr>
-          </a:solidFill>
-        </p:grpSpPr>
-        <p:sp>
-          <p:nvSpPr>
-            <p:cNvPr id="215" name="Oval 214">
-              <a:extLst>
-                <a:ext uri="{FF2B5EF4-FFF2-40B4-BE49-F238E27FC236}">
-                  <a16:creationId xmlns:a16="http://schemas.microsoft.com/office/drawing/2014/main" id="{80A3056C-529B-7FDB-AD13-52CFF9854D94}"/>
-                </a:ext>
-              </a:extLst>
-            </p:cNvPr>
-            <p:cNvSpPr/>
-            <p:nvPr/>
-          </p:nvSpPr>
-          <p:spPr>
-            <a:xfrm>
-              <a:off x="6234952" y="1863964"/>
-              <a:ext cx="443753" cy="443753"/>
-            </a:xfrm>
-            <a:prstGeom prst="ellipse">
-              <a:avLst/>
-            </a:prstGeom>
-            <a:grpFill/>
-            <a:ln>
-              <a:noFill/>
-            </a:ln>
-          </p:spPr>
-          <p:style>
-            <a:lnRef idx="2">
-              <a:schemeClr val="accent1">
-                <a:shade val="15000"/>
-              </a:schemeClr>
-            </a:lnRef>
-            <a:fillRef idx="1">
-              <a:schemeClr val="accent1"/>
-            </a:fillRef>
-            <a:effectRef idx="0">
-              <a:schemeClr val="accent1"/>
-            </a:effectRef>
-            <a:fontRef idx="minor">
-              <a:schemeClr val="lt1"/>
-            </a:fontRef>
-          </p:style>
-          <p:txBody>
-            <a:bodyPr rtlCol="0" anchor="ctr"/>
-            <a:lstStyle/>
-            <a:p>
-              <a:pPr algn="ctr"/>
-              <a:endParaRPr lang="en-US" sz="3200" dirty="0"/>
-            </a:p>
-          </p:txBody>
-        </p:sp>
-        <p:sp>
-          <p:nvSpPr>
-            <p:cNvPr id="216" name="Oval 215">
-              <a:extLst>
-                <a:ext uri="{FF2B5EF4-FFF2-40B4-BE49-F238E27FC236}">
-                  <a16:creationId xmlns:a16="http://schemas.microsoft.com/office/drawing/2014/main" id="{A976C51D-D3A4-DFC5-944C-8DD14EB52A55}"/>
-                </a:ext>
-              </a:extLst>
-            </p:cNvPr>
-            <p:cNvSpPr/>
-            <p:nvPr/>
-          </p:nvSpPr>
-          <p:spPr>
-            <a:xfrm>
-              <a:off x="6234952" y="2396692"/>
-              <a:ext cx="443753" cy="443753"/>
-            </a:xfrm>
-            <a:prstGeom prst="ellipse">
-              <a:avLst/>
-            </a:prstGeom>
-            <a:grpFill/>
-            <a:ln>
-              <a:noFill/>
-            </a:ln>
-          </p:spPr>
-          <p:style>
-            <a:lnRef idx="2">
-              <a:schemeClr val="accent1">
-                <a:shade val="15000"/>
-              </a:schemeClr>
-            </a:lnRef>
-            <a:fillRef idx="1">
-              <a:schemeClr val="accent1"/>
-            </a:fillRef>
-            <a:effectRef idx="0">
-              <a:schemeClr val="accent1"/>
-            </a:effectRef>
-            <a:fontRef idx="minor">
-              <a:schemeClr val="lt1"/>
-            </a:fontRef>
-          </p:style>
-          <p:txBody>
-            <a:bodyPr rtlCol="0" anchor="ctr"/>
-            <a:lstStyle/>
-            <a:p>
-              <a:pPr algn="ctr"/>
-              <a:endParaRPr lang="en-US" sz="3200" dirty="0"/>
-            </a:p>
-          </p:txBody>
-        </p:sp>
-      </p:grpSp>
-      <p:cxnSp>
-        <p:nvCxnSpPr>
-          <p:cNvPr id="217" name="Straight Arrow Connector 216">
-            <a:extLst>
-              <a:ext uri="{FF2B5EF4-FFF2-40B4-BE49-F238E27FC236}">
-                <a16:creationId xmlns:a16="http://schemas.microsoft.com/office/drawing/2014/main" id="{83933C4D-FF0C-7903-A0F5-80C17A75199F}"/>
-              </a:ext>
-            </a:extLst>
-          </p:cNvPr>
-          <p:cNvCxnSpPr>
-            <a:cxnSpLocks/>
-            <a:stCxn id="208" idx="3"/>
-            <a:endCxn id="215" idx="2"/>
-          </p:cNvCxnSpPr>
-          <p:nvPr/>
-        </p:nvCxnSpPr>
-        <p:spPr>
-          <a:xfrm flipV="1">
-            <a:off x="5864928" y="5049255"/>
-            <a:ext cx="484215" cy="502304"/>
-          </a:xfrm>
-          <a:prstGeom prst="straightConnector1">
-            <a:avLst/>
-          </a:prstGeom>
-          <a:ln w="12700">
-            <a:solidFill>
-              <a:srgbClr val="00B0F0"/>
-            </a:solidFill>
-            <a:tailEnd type="triangle"/>
-          </a:ln>
-        </p:spPr>
-        <p:style>
-          <a:lnRef idx="2">
-            <a:schemeClr val="accent1"/>
-          </a:lnRef>
-          <a:fillRef idx="0">
-            <a:schemeClr val="accent1"/>
-          </a:fillRef>
-          <a:effectRef idx="1">
-            <a:schemeClr val="accent1"/>
-          </a:effectRef>
-          <a:fontRef idx="minor">
-            <a:schemeClr val="tx1"/>
-          </a:fontRef>
-        </p:style>
-      </p:cxnSp>
-      <p:cxnSp>
-        <p:nvCxnSpPr>
-          <p:cNvPr id="218" name="Straight Arrow Connector 217">
-            <a:extLst>
-              <a:ext uri="{FF2B5EF4-FFF2-40B4-BE49-F238E27FC236}">
-                <a16:creationId xmlns:a16="http://schemas.microsoft.com/office/drawing/2014/main" id="{BCA62431-57D8-B142-2BDB-8E78D8A7CF06}"/>
-              </a:ext>
-            </a:extLst>
-          </p:cNvPr>
-          <p:cNvCxnSpPr>
-            <a:cxnSpLocks/>
-            <a:stCxn id="208" idx="3"/>
-            <a:endCxn id="216" idx="2"/>
-          </p:cNvCxnSpPr>
-          <p:nvPr/>
-        </p:nvCxnSpPr>
-        <p:spPr>
-          <a:xfrm>
-            <a:off x="5864928" y="5551559"/>
-            <a:ext cx="484215" cy="15103"/>
-          </a:xfrm>
-          <a:prstGeom prst="straightConnector1">
-            <a:avLst/>
-          </a:prstGeom>
-          <a:ln w="12700">
-            <a:solidFill>
-              <a:srgbClr val="00B0F0"/>
-            </a:solidFill>
-            <a:tailEnd type="triangle"/>
-          </a:ln>
-        </p:spPr>
-        <p:style>
-          <a:lnRef idx="2">
-            <a:schemeClr val="accent1"/>
-          </a:lnRef>
-          <a:fillRef idx="0">
-            <a:schemeClr val="accent1"/>
-          </a:fillRef>
-          <a:effectRef idx="1">
-            <a:schemeClr val="accent1"/>
-          </a:effectRef>
-          <a:fontRef idx="minor">
-            <a:schemeClr val="tx1"/>
-          </a:fontRef>
-        </p:style>
-      </p:cxnSp>
-      <p:grpSp>
-        <p:nvGrpSpPr>
-          <p:cNvPr id="219" name="Group 218">
-            <a:extLst>
-              <a:ext uri="{FF2B5EF4-FFF2-40B4-BE49-F238E27FC236}">
-                <a16:creationId xmlns:a16="http://schemas.microsoft.com/office/drawing/2014/main" id="{76840257-246D-03BC-10BC-ED4CE820D8EF}"/>
-              </a:ext>
-            </a:extLst>
-          </p:cNvPr>
-          <p:cNvGrpSpPr/>
-          <p:nvPr/>
-        </p:nvGrpSpPr>
-        <p:grpSpPr>
-          <a:xfrm>
-            <a:off x="7242479" y="4851706"/>
-            <a:ext cx="334694" cy="914743"/>
-            <a:chOff x="6724841" y="1876216"/>
-            <a:chExt cx="363072" cy="992303"/>
-          </a:xfrm>
-          <a:solidFill>
-            <a:schemeClr val="accent1">
-              <a:lumMod val="60000"/>
-              <a:lumOff val="40000"/>
-            </a:schemeClr>
-          </a:solidFill>
-        </p:grpSpPr>
-        <p:sp>
-          <p:nvSpPr>
-            <p:cNvPr id="220" name="Rectangle 219">
-              <a:extLst>
-                <a:ext uri="{FF2B5EF4-FFF2-40B4-BE49-F238E27FC236}">
-                  <a16:creationId xmlns:a16="http://schemas.microsoft.com/office/drawing/2014/main" id="{16261101-8943-4B3D-D4BF-E4840F573F5E}"/>
-                </a:ext>
-              </a:extLst>
-            </p:cNvPr>
-            <p:cNvSpPr/>
-            <p:nvPr/>
-          </p:nvSpPr>
-          <p:spPr>
-            <a:xfrm>
-              <a:off x="6724841" y="1876216"/>
-              <a:ext cx="363071" cy="428482"/>
-            </a:xfrm>
-            <a:prstGeom prst="rect">
-              <a:avLst/>
-            </a:prstGeom>
-            <a:grpFill/>
-            <a:ln>
-              <a:noFill/>
-            </a:ln>
-          </p:spPr>
-          <p:style>
-            <a:lnRef idx="2">
-              <a:schemeClr val="accent1">
-                <a:shade val="15000"/>
-              </a:schemeClr>
-            </a:lnRef>
-            <a:fillRef idx="1">
-              <a:schemeClr val="accent1"/>
-            </a:fillRef>
-            <a:effectRef idx="0">
-              <a:schemeClr val="accent1"/>
-            </a:effectRef>
-            <a:fontRef idx="minor">
-              <a:schemeClr val="lt1"/>
-            </a:fontRef>
-          </p:style>
-          <p:txBody>
-            <a:bodyPr rtlCol="0" anchor="ctr"/>
-            <a:lstStyle/>
-            <a:p>
-              <a:pPr algn="ctr"/>
-              <a:endParaRPr lang="en-US" sz="3200"/>
-            </a:p>
-          </p:txBody>
-        </p:sp>
-        <p:sp>
-          <p:nvSpPr>
-            <p:cNvPr id="221" name="Rectangle 220">
-              <a:extLst>
-                <a:ext uri="{FF2B5EF4-FFF2-40B4-BE49-F238E27FC236}">
-                  <a16:creationId xmlns:a16="http://schemas.microsoft.com/office/drawing/2014/main" id="{8748DD5B-431A-9891-307A-0B19480CAFAF}"/>
-                </a:ext>
-              </a:extLst>
-            </p:cNvPr>
-            <p:cNvSpPr/>
-            <p:nvPr/>
-          </p:nvSpPr>
-          <p:spPr>
-            <a:xfrm>
-              <a:off x="6724842" y="2472638"/>
-              <a:ext cx="363071" cy="395881"/>
-            </a:xfrm>
-            <a:prstGeom prst="rect">
-              <a:avLst/>
-            </a:prstGeom>
-            <a:grpFill/>
-            <a:ln>
-              <a:noFill/>
-            </a:ln>
-          </p:spPr>
-          <p:style>
-            <a:lnRef idx="2">
-              <a:schemeClr val="accent1">
-                <a:shade val="15000"/>
-              </a:schemeClr>
-            </a:lnRef>
-            <a:fillRef idx="1">
-              <a:schemeClr val="accent1"/>
-            </a:fillRef>
-            <a:effectRef idx="0">
-              <a:schemeClr val="accent1"/>
-            </a:effectRef>
-            <a:fontRef idx="minor">
-              <a:schemeClr val="lt1"/>
-            </a:fontRef>
-          </p:style>
-          <p:txBody>
-            <a:bodyPr rtlCol="0" anchor="ctr"/>
-            <a:lstStyle/>
-            <a:p>
-              <a:pPr algn="ctr"/>
-              <a:endParaRPr lang="en-US" sz="3200"/>
-            </a:p>
-          </p:txBody>
-        </p:sp>
-      </p:grpSp>
-      <p:cxnSp>
-        <p:nvCxnSpPr>
-          <p:cNvPr id="222" name="Straight Arrow Connector 221">
-            <a:extLst>
-              <a:ext uri="{FF2B5EF4-FFF2-40B4-BE49-F238E27FC236}">
-                <a16:creationId xmlns:a16="http://schemas.microsoft.com/office/drawing/2014/main" id="{5D8BDD5F-54B1-897A-5DFF-4F4158DC7FE3}"/>
-              </a:ext>
-            </a:extLst>
-          </p:cNvPr>
-          <p:cNvCxnSpPr>
-            <a:cxnSpLocks/>
-            <a:stCxn id="215" idx="6"/>
-            <a:endCxn id="220" idx="1"/>
-          </p:cNvCxnSpPr>
-          <p:nvPr/>
-        </p:nvCxnSpPr>
-        <p:spPr>
-          <a:xfrm flipV="1">
-            <a:off x="6780134" y="5049202"/>
-            <a:ext cx="462345" cy="53"/>
-          </a:xfrm>
-          <a:prstGeom prst="straightConnector1">
-            <a:avLst/>
-          </a:prstGeom>
-          <a:ln w="12700">
-            <a:solidFill>
-              <a:srgbClr val="00B0F0"/>
-            </a:solidFill>
-            <a:tailEnd type="triangle"/>
-          </a:ln>
-        </p:spPr>
-        <p:style>
-          <a:lnRef idx="2">
-            <a:schemeClr val="accent1"/>
-          </a:lnRef>
-          <a:fillRef idx="0">
-            <a:schemeClr val="accent1"/>
-          </a:fillRef>
-          <a:effectRef idx="1">
-            <a:schemeClr val="accent1"/>
-          </a:effectRef>
-          <a:fontRef idx="minor">
-            <a:schemeClr val="tx1"/>
-          </a:fontRef>
-        </p:style>
-      </p:cxnSp>
-      <p:cxnSp>
-        <p:nvCxnSpPr>
-          <p:cNvPr id="223" name="Straight Arrow Connector 222">
-            <a:extLst>
-              <a:ext uri="{FF2B5EF4-FFF2-40B4-BE49-F238E27FC236}">
-                <a16:creationId xmlns:a16="http://schemas.microsoft.com/office/drawing/2014/main" id="{4A452743-3B42-40F5-B808-6EE04B5992BB}"/>
-              </a:ext>
-            </a:extLst>
-          </p:cNvPr>
-          <p:cNvCxnSpPr>
-            <a:cxnSpLocks/>
-            <a:stCxn id="216" idx="6"/>
-            <a:endCxn id="221" idx="1"/>
-          </p:cNvCxnSpPr>
-          <p:nvPr/>
-        </p:nvCxnSpPr>
-        <p:spPr>
-          <a:xfrm>
-            <a:off x="6780134" y="5566662"/>
-            <a:ext cx="462346" cy="17318"/>
-          </a:xfrm>
-          <a:prstGeom prst="straightConnector1">
-            <a:avLst/>
-          </a:prstGeom>
-          <a:ln w="12700">
-            <a:solidFill>
-              <a:srgbClr val="00B0F0"/>
-            </a:solidFill>
-            <a:tailEnd type="triangle"/>
-          </a:ln>
-        </p:spPr>
-        <p:style>
-          <a:lnRef idx="2">
-            <a:schemeClr val="accent1"/>
-          </a:lnRef>
-          <a:fillRef idx="0">
-            <a:schemeClr val="accent1"/>
-          </a:fillRef>
-          <a:effectRef idx="1">
-            <a:schemeClr val="accent1"/>
-          </a:effectRef>
-          <a:fontRef idx="minor">
-            <a:schemeClr val="tx1"/>
-          </a:fontRef>
-        </p:style>
-      </p:cxnSp>
-      <p:grpSp>
-        <p:nvGrpSpPr>
-          <p:cNvPr id="227" name="Group 226">
-            <a:extLst>
-              <a:ext uri="{FF2B5EF4-FFF2-40B4-BE49-F238E27FC236}">
-                <a16:creationId xmlns:a16="http://schemas.microsoft.com/office/drawing/2014/main" id="{45C27416-00FF-4829-82B6-69DD465EF016}"/>
-              </a:ext>
-            </a:extLst>
-          </p:cNvPr>
-          <p:cNvGrpSpPr/>
-          <p:nvPr/>
-        </p:nvGrpSpPr>
-        <p:grpSpPr>
-          <a:xfrm>
-            <a:off x="5851991" y="4245530"/>
-            <a:ext cx="1415691" cy="2223136"/>
-            <a:chOff x="2220380" y="1834641"/>
-            <a:chExt cx="1039907" cy="2692535"/>
-          </a:xfrm>
-        </p:grpSpPr>
-        <p:sp>
-          <p:nvSpPr>
-            <p:cNvPr id="228" name="TextBox 227">
-              <a:extLst>
-                <a:ext uri="{FF2B5EF4-FFF2-40B4-BE49-F238E27FC236}">
-                  <a16:creationId xmlns:a16="http://schemas.microsoft.com/office/drawing/2014/main" id="{28007F57-7C56-17AA-2DB7-6118E4AA51F8}"/>
-                </a:ext>
-              </a:extLst>
-            </p:cNvPr>
-            <p:cNvSpPr txBox="1"/>
-            <p:nvPr/>
-          </p:nvSpPr>
-          <p:spPr>
-            <a:xfrm>
-              <a:off x="2220380" y="1898993"/>
-              <a:ext cx="1039907" cy="459652"/>
-            </a:xfrm>
-            <a:prstGeom prst="rect">
-              <a:avLst/>
-            </a:prstGeom>
-            <a:noFill/>
-            <a:ln>
-              <a:noFill/>
-            </a:ln>
-          </p:spPr>
-          <p:txBody>
-            <a:bodyPr wrap="square" rtlCol="0">
-              <a:spAutoFit/>
-            </a:bodyPr>
-            <a:lstStyle/>
-            <a:p>
-              <a:pPr algn="ctr"/>
-              <a:r>
-                <a:rPr lang="en-US" sz="1600" b="1" dirty="0">
-                  <a:solidFill>
-                    <a:schemeClr val="accent2">
-                      <a:lumMod val="50000"/>
-                    </a:schemeClr>
-                  </a:solidFill>
-                </a:rPr>
-                <a:t>mutation</a:t>
-              </a:r>
-            </a:p>
-          </p:txBody>
-        </p:sp>
-        <p:sp>
-          <p:nvSpPr>
-            <p:cNvPr id="229" name="Rectangle: Rounded Corners 228">
-              <a:extLst>
-                <a:ext uri="{FF2B5EF4-FFF2-40B4-BE49-F238E27FC236}">
-                  <a16:creationId xmlns:a16="http://schemas.microsoft.com/office/drawing/2014/main" id="{AB69112F-9C0F-DEB1-9CD1-2860A6C9A9D2}"/>
-                </a:ext>
-              </a:extLst>
-            </p:cNvPr>
-            <p:cNvSpPr/>
-            <p:nvPr/>
-          </p:nvSpPr>
-          <p:spPr>
-            <a:xfrm>
-              <a:off x="2362200" y="1834641"/>
-              <a:ext cx="776608" cy="2692535"/>
-            </a:xfrm>
-            <a:prstGeom prst="roundRect">
-              <a:avLst/>
-            </a:prstGeom>
-            <a:noFill/>
-            <a:ln>
-              <a:solidFill>
-                <a:schemeClr val="accent2">
-                  <a:lumMod val="50000"/>
-                </a:schemeClr>
-              </a:solidFill>
-            </a:ln>
-          </p:spPr>
-          <p:style>
-            <a:lnRef idx="2">
-              <a:schemeClr val="accent1">
-                <a:shade val="15000"/>
-              </a:schemeClr>
-            </a:lnRef>
-            <a:fillRef idx="1">
-              <a:schemeClr val="accent1"/>
-            </a:fillRef>
-            <a:effectRef idx="0">
-              <a:schemeClr val="accent1"/>
-            </a:effectRef>
-            <a:fontRef idx="minor">
-              <a:schemeClr val="lt1"/>
-            </a:fontRef>
-          </p:style>
-          <p:txBody>
-            <a:bodyPr rtlCol="0" anchor="ctr"/>
-            <a:lstStyle/>
-            <a:p>
-              <a:pPr algn="ctr"/>
-              <a:endParaRPr lang="en-US" sz="3200">
-                <a:solidFill>
-                  <a:schemeClr val="accent3"/>
-                </a:solidFill>
-              </a:endParaRPr>
-            </a:p>
-          </p:txBody>
-        </p:sp>
-      </p:grpSp>
       <p:grpSp>
         <p:nvGrpSpPr>
           <p:cNvPr id="230" name="Group 229">
             <a:extLst>
               <a:ext uri="{FF2B5EF4-FFF2-40B4-BE49-F238E27FC236}">
-                <a16:creationId xmlns:a16="http://schemas.microsoft.com/office/drawing/2014/main" id="{4938174C-C240-86DC-06AE-F3BE74F0D541}"/>
+                <a16:creationId xmlns:a16="http://schemas.microsoft.com/office/drawing/2014/main" id="{8F61AA1F-7BA9-198A-4F36-0CFD935CF466}"/>
               </a:ext>
             </a:extLst>
           </p:cNvPr>
@@ -7623,9 +6704,9 @@
         <p:grpSpPr>
           <a:xfrm>
             <a:off x="4063998" y="3586508"/>
-            <a:ext cx="3739964" cy="3089244"/>
-            <a:chOff x="392845" y="464697"/>
-            <a:chExt cx="5462280" cy="5913842"/>
+            <a:ext cx="3739964" cy="2265318"/>
+            <a:chOff x="392845" y="464698"/>
+            <a:chExt cx="5462280" cy="5913841"/>
           </a:xfrm>
         </p:grpSpPr>
         <p:sp>
@@ -7633,7 +6714,7 @@
             <p:cNvPr id="231" name="Rectangle: Rounded Corners 230">
               <a:extLst>
                 <a:ext uri="{FF2B5EF4-FFF2-40B4-BE49-F238E27FC236}">
-                  <a16:creationId xmlns:a16="http://schemas.microsoft.com/office/drawing/2014/main" id="{4467E11B-65B2-E93E-E246-C54949734B7F}"/>
+                  <a16:creationId xmlns:a16="http://schemas.microsoft.com/office/drawing/2014/main" id="{F1F6D404-B4D6-B792-A6F1-92F3B247CDE8}"/>
                 </a:ext>
               </a:extLst>
             </p:cNvPr>
@@ -7686,7 +6767,7 @@
             <p:cNvPr id="232" name="TextBox 231">
               <a:extLst>
                 <a:ext uri="{FF2B5EF4-FFF2-40B4-BE49-F238E27FC236}">
-                  <a16:creationId xmlns:a16="http://schemas.microsoft.com/office/drawing/2014/main" id="{9E00B1AB-1703-C9EB-3991-7DB3FE8E18C5}"/>
+                  <a16:creationId xmlns:a16="http://schemas.microsoft.com/office/drawing/2014/main" id="{09C5798B-C853-93F5-7869-297F253ED585}"/>
                 </a:ext>
               </a:extLst>
             </p:cNvPr>
@@ -7695,8 +6776,8 @@
           </p:nvSpPr>
           <p:spPr>
             <a:xfrm>
-              <a:off x="975027" y="464697"/>
-              <a:ext cx="4211049" cy="1224321"/>
+              <a:off x="975027" y="464698"/>
+              <a:ext cx="4211049" cy="1001617"/>
             </a:xfrm>
             <a:prstGeom prst="rect">
               <a:avLst/>
@@ -7711,7 +6792,7 @@
             <a:p>
               <a:pPr algn="ctr"/>
               <a:r>
-                <a:rPr lang="en-US" sz="3200" dirty="0">
+                <a:rPr lang="en-US" sz="2800" dirty="0">
                   <a:solidFill>
                     <a:srgbClr val="C00000"/>
                   </a:solidFill>
@@ -7724,10 +6805,10 @@
       </p:grpSp>
       <p:sp>
         <p:nvSpPr>
-          <p:cNvPr id="233" name="Rectangle 232">
-            <a:extLst>
-              <a:ext uri="{FF2B5EF4-FFF2-40B4-BE49-F238E27FC236}">
-                <a16:creationId xmlns:a16="http://schemas.microsoft.com/office/drawing/2014/main" id="{20069571-C34A-85C5-25B7-93C5CCC8A38A}"/>
+          <p:cNvPr id="238" name="Rectangle 237">
+            <a:extLst>
+              <a:ext uri="{FF2B5EF4-FFF2-40B4-BE49-F238E27FC236}">
+                <a16:creationId xmlns:a16="http://schemas.microsoft.com/office/drawing/2014/main" id="{4C790107-7CBB-7701-7EAC-85BC80C30186}"/>
               </a:ext>
             </a:extLst>
           </p:cNvPr>
@@ -7736,8 +6817,8 @@
         </p:nvSpPr>
         <p:spPr>
           <a:xfrm>
-            <a:off x="5485031" y="4855039"/>
-            <a:ext cx="379897" cy="446738"/>
+            <a:off x="9649190" y="2169429"/>
+            <a:ext cx="379897" cy="405247"/>
           </a:xfrm>
           <a:prstGeom prst="rect">
             <a:avLst/>
@@ -7779,10 +6860,10 @@
       </p:sp>
       <p:grpSp>
         <p:nvGrpSpPr>
-          <p:cNvPr id="296" name="Group 295">
-            <a:extLst>
-              <a:ext uri="{FF2B5EF4-FFF2-40B4-BE49-F238E27FC236}">
-                <a16:creationId xmlns:a16="http://schemas.microsoft.com/office/drawing/2014/main" id="{78C3B275-B2AB-5CAA-3630-91750D99E06B}"/>
+          <p:cNvPr id="239" name="Group 238">
+            <a:extLst>
+              <a:ext uri="{FF2B5EF4-FFF2-40B4-BE49-F238E27FC236}">
+                <a16:creationId xmlns:a16="http://schemas.microsoft.com/office/drawing/2014/main" id="{EDD0377F-1F88-DD52-22D8-9C6B2CE85AD4}"/>
               </a:ext>
             </a:extLst>
           </p:cNvPr>
@@ -7791,422 +6872,7 @@
         </p:nvGrpSpPr>
         <p:grpSpPr>
           <a:xfrm>
-            <a:off x="3950031" y="4180818"/>
-            <a:ext cx="1798886" cy="2628152"/>
-            <a:chOff x="3675907" y="4123230"/>
-            <a:chExt cx="1604716" cy="2344472"/>
-          </a:xfrm>
-        </p:grpSpPr>
-        <p:grpSp>
-          <p:nvGrpSpPr>
-            <p:cNvPr id="224" name="Group 223">
-              <a:extLst>
-                <a:ext uri="{FF2B5EF4-FFF2-40B4-BE49-F238E27FC236}">
-                  <a16:creationId xmlns:a16="http://schemas.microsoft.com/office/drawing/2014/main" id="{94298524-929D-BE08-AFDD-C09553489B4D}"/>
-                </a:ext>
-              </a:extLst>
-            </p:cNvPr>
-            <p:cNvGrpSpPr/>
-            <p:nvPr/>
-          </p:nvGrpSpPr>
-          <p:grpSpPr>
-            <a:xfrm>
-              <a:off x="3675907" y="4123230"/>
-              <a:ext cx="1604716" cy="1983172"/>
-              <a:chOff x="2262979" y="1834640"/>
-              <a:chExt cx="1039907" cy="2692536"/>
-            </a:xfrm>
-          </p:grpSpPr>
-          <p:sp>
-            <p:nvSpPr>
-              <p:cNvPr id="225" name="TextBox 224">
-                <a:extLst>
-                  <a:ext uri="{FF2B5EF4-FFF2-40B4-BE49-F238E27FC236}">
-                    <a16:creationId xmlns:a16="http://schemas.microsoft.com/office/drawing/2014/main" id="{12C60CF1-4D75-EAAC-5B86-BCD221700D90}"/>
-                  </a:ext>
-                </a:extLst>
-              </p:cNvPr>
-              <p:cNvSpPr txBox="1"/>
-              <p:nvPr/>
-            </p:nvSpPr>
-            <p:spPr>
-              <a:xfrm>
-                <a:off x="2262979" y="1865985"/>
-                <a:ext cx="1039907" cy="1018370"/>
-              </a:xfrm>
-              <a:prstGeom prst="rect">
-                <a:avLst/>
-              </a:prstGeom>
-              <a:noFill/>
-              <a:ln>
-                <a:noFill/>
-              </a:ln>
-            </p:spPr>
-            <p:txBody>
-              <a:bodyPr wrap="square" rtlCol="0">
-                <a:spAutoFit/>
-              </a:bodyPr>
-              <a:lstStyle/>
-              <a:p>
-                <a:pPr algn="ctr"/>
-                <a:r>
-                  <a:rPr lang="en-US" sz="2000" b="1" dirty="0">
-                    <a:solidFill>
-                      <a:schemeClr val="accent2"/>
-                    </a:solidFill>
-                  </a:rPr>
-                  <a:t>merge</a:t>
-                </a:r>
-              </a:p>
-              <a:p>
-                <a:endParaRPr lang="en-US" sz="3200" dirty="0"/>
-              </a:p>
-            </p:txBody>
-          </p:sp>
-          <p:sp>
-            <p:nvSpPr>
-              <p:cNvPr id="226" name="Rectangle: Rounded Corners 225">
-                <a:extLst>
-                  <a:ext uri="{FF2B5EF4-FFF2-40B4-BE49-F238E27FC236}">
-                    <a16:creationId xmlns:a16="http://schemas.microsoft.com/office/drawing/2014/main" id="{03C4A992-650F-D8D2-E749-37D598DBF946}"/>
-                  </a:ext>
-                </a:extLst>
-              </p:cNvPr>
-              <p:cNvSpPr/>
-              <p:nvPr/>
-            </p:nvSpPr>
-            <p:spPr>
-              <a:xfrm>
-                <a:off x="2451960" y="1834640"/>
-                <a:ext cx="629931" cy="2692536"/>
-              </a:xfrm>
-              <a:prstGeom prst="roundRect">
-                <a:avLst/>
-              </a:prstGeom>
-              <a:noFill/>
-              <a:ln>
-                <a:solidFill>
-                  <a:schemeClr val="accent2"/>
-                </a:solidFill>
-              </a:ln>
-            </p:spPr>
-            <p:style>
-              <a:lnRef idx="2">
-                <a:schemeClr val="accent1">
-                  <a:shade val="15000"/>
-                </a:schemeClr>
-              </a:lnRef>
-              <a:fillRef idx="1">
-                <a:schemeClr val="accent1"/>
-              </a:fillRef>
-              <a:effectRef idx="0">
-                <a:schemeClr val="accent1"/>
-              </a:effectRef>
-              <a:fontRef idx="minor">
-                <a:schemeClr val="lt1"/>
-              </a:fontRef>
-            </p:style>
-            <p:txBody>
-              <a:bodyPr rtlCol="0" anchor="ctr"/>
-              <a:lstStyle/>
-              <a:p>
-                <a:pPr algn="ctr"/>
-                <a:endParaRPr lang="en-US" sz="3200">
-                  <a:solidFill>
-                    <a:schemeClr val="accent3"/>
-                  </a:solidFill>
-                </a:endParaRPr>
-              </a:p>
-            </p:txBody>
-          </p:sp>
-        </p:grpSp>
-        <p:sp>
-          <p:nvSpPr>
-            <p:cNvPr id="234" name="TextBox 233">
-              <a:extLst>
-                <a:ext uri="{FF2B5EF4-FFF2-40B4-BE49-F238E27FC236}">
-                  <a16:creationId xmlns:a16="http://schemas.microsoft.com/office/drawing/2014/main" id="{06EEE399-F149-F9A0-9F62-9725B390FCB3}"/>
-                </a:ext>
-              </a:extLst>
-            </p:cNvPr>
-            <p:cNvSpPr txBox="1"/>
-            <p:nvPr/>
-          </p:nvSpPr>
-          <p:spPr>
-            <a:xfrm>
-              <a:off x="3864861" y="5506758"/>
-              <a:ext cx="1177406" cy="960944"/>
-            </a:xfrm>
-            <a:prstGeom prst="rect">
-              <a:avLst/>
-            </a:prstGeom>
-            <a:noFill/>
-            <a:ln>
-              <a:noFill/>
-            </a:ln>
-          </p:spPr>
-          <p:txBody>
-            <a:bodyPr wrap="square" rtlCol="0">
-              <a:spAutoFit/>
-            </a:bodyPr>
-            <a:lstStyle/>
-            <a:p>
-              <a:pPr algn="ctr"/>
-              <a:r>
-                <a:rPr lang="en-US" sz="1600" b="1" dirty="0">
-                  <a:solidFill>
-                    <a:schemeClr val="accent2"/>
-                  </a:solidFill>
-                </a:rPr>
-                <a:t>…</a:t>
-              </a:r>
-            </a:p>
-            <a:p>
-              <a:pPr algn="ctr"/>
-              <a:r>
-                <a:rPr lang="en-US" sz="1600" b="1" dirty="0">
-                  <a:solidFill>
-                    <a:schemeClr val="accent2"/>
-                  </a:solidFill>
-                </a:rPr>
-                <a:t>(10 tasks)</a:t>
-              </a:r>
-            </a:p>
-            <a:p>
-              <a:endParaRPr lang="en-US" sz="3200" dirty="0"/>
-            </a:p>
-          </p:txBody>
-        </p:sp>
-      </p:grpSp>
-      <p:cxnSp>
-        <p:nvCxnSpPr>
-          <p:cNvPr id="235" name="Straight Arrow Connector 234">
-            <a:extLst>
-              <a:ext uri="{FF2B5EF4-FFF2-40B4-BE49-F238E27FC236}">
-                <a16:creationId xmlns:a16="http://schemas.microsoft.com/office/drawing/2014/main" id="{7C44D8E4-C497-CBFC-F286-F654869E346E}"/>
-              </a:ext>
-            </a:extLst>
-          </p:cNvPr>
-          <p:cNvCxnSpPr>
-            <a:cxnSpLocks/>
-            <a:stCxn id="233" idx="3"/>
-            <a:endCxn id="215" idx="2"/>
-          </p:cNvCxnSpPr>
-          <p:nvPr/>
-        </p:nvCxnSpPr>
-        <p:spPr>
-          <a:xfrm flipV="1">
-            <a:off x="5864928" y="5049255"/>
-            <a:ext cx="484215" cy="29153"/>
-          </a:xfrm>
-          <a:prstGeom prst="straightConnector1">
-            <a:avLst/>
-          </a:prstGeom>
-          <a:ln w="12700">
-            <a:solidFill>
-              <a:srgbClr val="00B0F0"/>
-            </a:solidFill>
-            <a:tailEnd type="triangle"/>
-          </a:ln>
-        </p:spPr>
-        <p:style>
-          <a:lnRef idx="2">
-            <a:schemeClr val="accent1"/>
-          </a:lnRef>
-          <a:fillRef idx="0">
-            <a:schemeClr val="accent1"/>
-          </a:fillRef>
-          <a:effectRef idx="1">
-            <a:schemeClr val="accent1"/>
-          </a:effectRef>
-          <a:fontRef idx="minor">
-            <a:schemeClr val="tx1"/>
-          </a:fontRef>
-        </p:style>
-      </p:cxnSp>
-      <p:cxnSp>
-        <p:nvCxnSpPr>
-          <p:cNvPr id="236" name="Straight Arrow Connector 235">
-            <a:extLst>
-              <a:ext uri="{FF2B5EF4-FFF2-40B4-BE49-F238E27FC236}">
-                <a16:creationId xmlns:a16="http://schemas.microsoft.com/office/drawing/2014/main" id="{DE9A5B8C-0595-2470-D1DE-C95584D6F5FB}"/>
-              </a:ext>
-            </a:extLst>
-          </p:cNvPr>
-          <p:cNvCxnSpPr>
-            <a:cxnSpLocks/>
-            <a:stCxn id="233" idx="3"/>
-            <a:endCxn id="216" idx="2"/>
-          </p:cNvCxnSpPr>
-          <p:nvPr/>
-        </p:nvCxnSpPr>
-        <p:spPr>
-          <a:xfrm>
-            <a:off x="5864928" y="5078408"/>
-            <a:ext cx="484215" cy="488254"/>
-          </a:xfrm>
-          <a:prstGeom prst="straightConnector1">
-            <a:avLst/>
-          </a:prstGeom>
-          <a:ln w="12700">
-            <a:solidFill>
-              <a:srgbClr val="00B0F0"/>
-            </a:solidFill>
-            <a:tailEnd type="triangle"/>
-          </a:ln>
-        </p:spPr>
-        <p:style>
-          <a:lnRef idx="2">
-            <a:schemeClr val="accent1"/>
-          </a:lnRef>
-          <a:fillRef idx="0">
-            <a:schemeClr val="accent1"/>
-          </a:fillRef>
-          <a:effectRef idx="1">
-            <a:schemeClr val="accent1"/>
-          </a:effectRef>
-          <a:fontRef idx="minor">
-            <a:schemeClr val="tx1"/>
-          </a:fontRef>
-        </p:style>
-      </p:cxnSp>
-      <p:sp>
-        <p:nvSpPr>
-          <p:cNvPr id="237" name="TextBox 236">
-            <a:extLst>
-              <a:ext uri="{FF2B5EF4-FFF2-40B4-BE49-F238E27FC236}">
-                <a16:creationId xmlns:a16="http://schemas.microsoft.com/office/drawing/2014/main" id="{7AF585E6-1C9A-C561-2BA4-626BDBDB9FCC}"/>
-              </a:ext>
-            </a:extLst>
-          </p:cNvPr>
-          <p:cNvSpPr txBox="1"/>
-          <p:nvPr/>
-        </p:nvSpPr>
-        <p:spPr>
-          <a:xfrm>
-            <a:off x="5899664" y="5712053"/>
-            <a:ext cx="1319872" cy="1077218"/>
-          </a:xfrm>
-          <a:prstGeom prst="rect">
-            <a:avLst/>
-          </a:prstGeom>
-          <a:noFill/>
-          <a:ln>
-            <a:noFill/>
-          </a:ln>
-        </p:spPr>
-        <p:txBody>
-          <a:bodyPr wrap="square" rtlCol="0">
-            <a:spAutoFit/>
-          </a:bodyPr>
-          <a:lstStyle/>
-          <a:p>
-            <a:pPr algn="ctr"/>
-            <a:r>
-              <a:rPr lang="en-US" sz="1600" b="1" dirty="0">
-                <a:solidFill>
-                  <a:schemeClr val="accent2">
-                    <a:lumMod val="50000"/>
-                  </a:schemeClr>
-                </a:solidFill>
-              </a:rPr>
-              <a:t>…</a:t>
-            </a:r>
-          </a:p>
-          <a:p>
-            <a:pPr algn="ctr"/>
-            <a:r>
-              <a:rPr lang="en-US" sz="1600" b="1" dirty="0">
-                <a:solidFill>
-                  <a:schemeClr val="accent2">
-                    <a:lumMod val="50000"/>
-                  </a:schemeClr>
-                </a:solidFill>
-              </a:rPr>
-              <a:t>(10 tasks)</a:t>
-            </a:r>
-          </a:p>
-          <a:p>
-            <a:endParaRPr lang="en-US" sz="3200" dirty="0">
-              <a:solidFill>
-                <a:schemeClr val="accent2">
-                  <a:lumMod val="50000"/>
-                </a:schemeClr>
-              </a:solidFill>
-            </a:endParaRPr>
-          </a:p>
-        </p:txBody>
-      </p:sp>
-      <p:sp>
-        <p:nvSpPr>
-          <p:cNvPr id="238" name="Rectangle 237">
-            <a:extLst>
-              <a:ext uri="{FF2B5EF4-FFF2-40B4-BE49-F238E27FC236}">
-                <a16:creationId xmlns:a16="http://schemas.microsoft.com/office/drawing/2014/main" id="{4ECC667F-97F0-F2DC-DD42-54CD2C54B1CF}"/>
-              </a:ext>
-            </a:extLst>
-          </p:cNvPr>
-          <p:cNvSpPr/>
-          <p:nvPr/>
-        </p:nvSpPr>
-        <p:spPr>
-          <a:xfrm>
-            <a:off x="9649190" y="1921232"/>
-            <a:ext cx="379897" cy="405247"/>
-          </a:xfrm>
-          <a:prstGeom prst="rect">
-            <a:avLst/>
-          </a:prstGeom>
-          <a:solidFill>
-            <a:schemeClr val="accent1">
-              <a:lumMod val="60000"/>
-              <a:lumOff val="40000"/>
-            </a:schemeClr>
-          </a:solidFill>
-          <a:ln>
-            <a:noFill/>
-          </a:ln>
-        </p:spPr>
-        <p:style>
-          <a:lnRef idx="2">
-            <a:schemeClr val="accent1">
-              <a:shade val="15000"/>
-            </a:schemeClr>
-          </a:lnRef>
-          <a:fillRef idx="1">
-            <a:schemeClr val="accent1"/>
-          </a:fillRef>
-          <a:effectRef idx="0">
-            <a:schemeClr val="accent1"/>
-          </a:effectRef>
-          <a:fontRef idx="minor">
-            <a:schemeClr val="lt1"/>
-          </a:fontRef>
-        </p:style>
-        <p:txBody>
-          <a:bodyPr rtlCol="0" anchor="ctr"/>
-          <a:lstStyle/>
-          <a:p>
-            <a:pPr algn="ctr"/>
-            <a:endParaRPr lang="en-US" sz="3200"/>
-          </a:p>
-        </p:txBody>
-      </p:sp>
-      <p:grpSp>
-        <p:nvGrpSpPr>
-          <p:cNvPr id="239" name="Group 238">
-            <a:extLst>
-              <a:ext uri="{FF2B5EF4-FFF2-40B4-BE49-F238E27FC236}">
-                <a16:creationId xmlns:a16="http://schemas.microsoft.com/office/drawing/2014/main" id="{66E87D15-8634-92C7-C007-6F75FDEFD2E4}"/>
-              </a:ext>
-            </a:extLst>
-          </p:cNvPr>
-          <p:cNvGrpSpPr/>
-          <p:nvPr/>
-        </p:nvGrpSpPr>
-        <p:grpSpPr>
-          <a:xfrm>
-            <a:off x="8761727" y="1398862"/>
+            <a:off x="8761727" y="1738500"/>
             <a:ext cx="433450" cy="960431"/>
             <a:chOff x="2661401" y="2604643"/>
             <a:chExt cx="285510" cy="632628"/>
@@ -8222,7 +6888,7 @@
             <p:cNvPr id="240" name="Oval 239">
               <a:extLst>
                 <a:ext uri="{FF2B5EF4-FFF2-40B4-BE49-F238E27FC236}">
-                  <a16:creationId xmlns:a16="http://schemas.microsoft.com/office/drawing/2014/main" id="{D7780F8B-59E1-ED80-630E-AE6720D13515}"/>
+                  <a16:creationId xmlns:a16="http://schemas.microsoft.com/office/drawing/2014/main" id="{8E8AE3C0-40EC-1566-DECC-072DF19ECF7D}"/>
                 </a:ext>
               </a:extLst>
             </p:cNvPr>
@@ -8272,7 +6938,7 @@
             <p:cNvPr id="241" name="Oval 240">
               <a:extLst>
                 <a:ext uri="{FF2B5EF4-FFF2-40B4-BE49-F238E27FC236}">
-                  <a16:creationId xmlns:a16="http://schemas.microsoft.com/office/drawing/2014/main" id="{EA5AB752-D157-BFB5-BBA3-FEFEA5A13EF8}"/>
+                  <a16:creationId xmlns:a16="http://schemas.microsoft.com/office/drawing/2014/main" id="{BC2B2055-0C3E-74F4-C7B9-AFADAA887D90}"/>
                 </a:ext>
               </a:extLst>
             </p:cNvPr>
@@ -8323,7 +6989,7 @@
           <p:cNvPr id="242" name="Straight Arrow Connector 241">
             <a:extLst>
               <a:ext uri="{FF2B5EF4-FFF2-40B4-BE49-F238E27FC236}">
-                <a16:creationId xmlns:a16="http://schemas.microsoft.com/office/drawing/2014/main" id="{B7B4BBC0-D13B-E935-3171-A140225E6982}"/>
+                <a16:creationId xmlns:a16="http://schemas.microsoft.com/office/drawing/2014/main" id="{F89DCD05-30EB-8B61-441D-152F7405FDF8}"/>
               </a:ext>
             </a:extLst>
           </p:cNvPr>
@@ -8335,9 +7001,9 @@
           <p:nvPr/>
         </p:nvCxnSpPr>
         <p:spPr>
-          <a:xfrm>
-            <a:off x="9191787" y="1613892"/>
-            <a:ext cx="457403" cy="36813"/>
+          <a:xfrm flipV="1">
+            <a:off x="9191787" y="1898902"/>
+            <a:ext cx="457403" cy="54628"/>
           </a:xfrm>
           <a:prstGeom prst="straightConnector1">
             <a:avLst/>
@@ -8369,7 +7035,7 @@
           <p:cNvPr id="243" name="Straight Arrow Connector 242">
             <a:extLst>
               <a:ext uri="{FF2B5EF4-FFF2-40B4-BE49-F238E27FC236}">
-                <a16:creationId xmlns:a16="http://schemas.microsoft.com/office/drawing/2014/main" id="{9F11EEDB-B063-D4AD-C3B8-D0C2CAA720A6}"/>
+                <a16:creationId xmlns:a16="http://schemas.microsoft.com/office/drawing/2014/main" id="{1C75EBA1-7B3A-2505-6CAA-C39E4ABB9FC2}"/>
               </a:ext>
             </a:extLst>
           </p:cNvPr>
@@ -8382,8 +7048,8 @@
         </p:nvCxnSpPr>
         <p:spPr>
           <a:xfrm flipV="1">
-            <a:off x="9195177" y="2123856"/>
-            <a:ext cx="454013" cy="20408"/>
+            <a:off x="9195177" y="2372053"/>
+            <a:ext cx="454013" cy="111849"/>
           </a:xfrm>
           <a:prstGeom prst="straightConnector1">
             <a:avLst/>
@@ -8415,7 +7081,7 @@
           <p:cNvPr id="244" name="Group 243">
             <a:extLst>
               <a:ext uri="{FF2B5EF4-FFF2-40B4-BE49-F238E27FC236}">
-                <a16:creationId xmlns:a16="http://schemas.microsoft.com/office/drawing/2014/main" id="{55A43BA4-B2F2-AA36-680A-6CF8491157C3}"/>
+                <a16:creationId xmlns:a16="http://schemas.microsoft.com/office/drawing/2014/main" id="{1A182587-18E0-ABB9-8CBC-11053AA1FD6F}"/>
               </a:ext>
             </a:extLst>
           </p:cNvPr>
@@ -8424,7 +7090,7 @@
         </p:nvGrpSpPr>
         <p:grpSpPr>
           <a:xfrm>
-            <a:off x="10513302" y="1406056"/>
+            <a:off x="10513302" y="1732631"/>
             <a:ext cx="430991" cy="948398"/>
             <a:chOff x="6234952" y="1863964"/>
             <a:chExt cx="443753" cy="976481"/>
@@ -8435,7 +7101,7 @@
             <p:cNvPr id="245" name="Oval 244">
               <a:extLst>
                 <a:ext uri="{FF2B5EF4-FFF2-40B4-BE49-F238E27FC236}">
-                  <a16:creationId xmlns:a16="http://schemas.microsoft.com/office/drawing/2014/main" id="{BF432217-F8B4-19FE-551E-D33F0A46256D}"/>
+                  <a16:creationId xmlns:a16="http://schemas.microsoft.com/office/drawing/2014/main" id="{0084EE65-E46E-6DFF-34C2-DB35432DA5B9}"/>
                 </a:ext>
               </a:extLst>
             </p:cNvPr>
@@ -8487,7 +7153,7 @@
             <p:cNvPr id="246" name="Oval 245">
               <a:extLst>
                 <a:ext uri="{FF2B5EF4-FFF2-40B4-BE49-F238E27FC236}">
-                  <a16:creationId xmlns:a16="http://schemas.microsoft.com/office/drawing/2014/main" id="{BD24F8EC-3944-4946-80F0-ECA48F3CECA6}"/>
+                  <a16:creationId xmlns:a16="http://schemas.microsoft.com/office/drawing/2014/main" id="{3688D911-EB95-9148-3DB1-5B5C330C5C34}"/>
                 </a:ext>
               </a:extLst>
             </p:cNvPr>
@@ -8537,24 +7203,24 @@
       </p:grpSp>
       <p:cxnSp>
         <p:nvCxnSpPr>
-          <p:cNvPr id="247" name="Straight Arrow Connector 246">
-            <a:extLst>
-              <a:ext uri="{FF2B5EF4-FFF2-40B4-BE49-F238E27FC236}">
-                <a16:creationId xmlns:a16="http://schemas.microsoft.com/office/drawing/2014/main" id="{E34A5124-E187-E624-904B-9D6C0F9410BC}"/>
+          <p:cNvPr id="248" name="Straight Arrow Connector 247">
+            <a:extLst>
+              <a:ext uri="{FF2B5EF4-FFF2-40B4-BE49-F238E27FC236}">
+                <a16:creationId xmlns:a16="http://schemas.microsoft.com/office/drawing/2014/main" id="{54950AAE-C0A9-2F3F-63D4-7B30BD4A1E2D}"/>
               </a:ext>
             </a:extLst>
           </p:cNvPr>
           <p:cNvCxnSpPr>
             <a:cxnSpLocks/>
             <a:stCxn id="238" idx="3"/>
-            <a:endCxn id="245" idx="2"/>
+            <a:endCxn id="246" idx="2"/>
           </p:cNvCxnSpPr>
           <p:nvPr/>
         </p:nvCxnSpPr>
         <p:spPr>
-          <a:xfrm flipV="1">
-            <a:off x="10029087" y="1621552"/>
-            <a:ext cx="484215" cy="502304"/>
+          <a:xfrm>
+            <a:off x="10029087" y="2372053"/>
+            <a:ext cx="484215" cy="93481"/>
           </a:xfrm>
           <a:prstGeom prst="straightConnector1">
             <a:avLst/>
@@ -8581,58 +7247,12 @@
           </a:fontRef>
         </p:style>
       </p:cxnSp>
-      <p:cxnSp>
-        <p:nvCxnSpPr>
-          <p:cNvPr id="248" name="Straight Arrow Connector 247">
-            <a:extLst>
-              <a:ext uri="{FF2B5EF4-FFF2-40B4-BE49-F238E27FC236}">
-                <a16:creationId xmlns:a16="http://schemas.microsoft.com/office/drawing/2014/main" id="{E7CA49C4-FE64-F2DA-931C-3C2089E388C1}"/>
-              </a:ext>
-            </a:extLst>
-          </p:cNvPr>
-          <p:cNvCxnSpPr>
-            <a:cxnSpLocks/>
-            <a:stCxn id="238" idx="3"/>
-            <a:endCxn id="246" idx="2"/>
-          </p:cNvCxnSpPr>
-          <p:nvPr/>
-        </p:nvCxnSpPr>
-        <p:spPr>
-          <a:xfrm>
-            <a:off x="10029087" y="2123856"/>
-            <a:ext cx="484215" cy="15103"/>
-          </a:xfrm>
-          <a:prstGeom prst="straightConnector1">
-            <a:avLst/>
-          </a:prstGeom>
-          <a:ln w="12700">
-            <a:solidFill>
-              <a:srgbClr val="00B0F0"/>
-            </a:solidFill>
-            <a:tailEnd type="triangle"/>
-          </a:ln>
-        </p:spPr>
-        <p:style>
-          <a:lnRef idx="2">
-            <a:schemeClr val="accent1"/>
-          </a:lnRef>
-          <a:fillRef idx="0">
-            <a:schemeClr val="accent1"/>
-          </a:fillRef>
-          <a:effectRef idx="1">
-            <a:schemeClr val="accent1"/>
-          </a:effectRef>
-          <a:fontRef idx="minor">
-            <a:schemeClr val="tx1"/>
-          </a:fontRef>
-        </p:style>
-      </p:cxnSp>
       <p:grpSp>
         <p:nvGrpSpPr>
           <p:cNvPr id="249" name="Group 248">
             <a:extLst>
               <a:ext uri="{FF2B5EF4-FFF2-40B4-BE49-F238E27FC236}">
-                <a16:creationId xmlns:a16="http://schemas.microsoft.com/office/drawing/2014/main" id="{23CD5EFC-BC05-329D-FC6E-878C4FB9729A}"/>
+                <a16:creationId xmlns:a16="http://schemas.microsoft.com/office/drawing/2014/main" id="{283C7D2F-205A-E670-E443-05F49385B167}"/>
               </a:ext>
             </a:extLst>
           </p:cNvPr>
@@ -8641,7 +7261,7 @@
         </p:nvGrpSpPr>
         <p:grpSpPr>
           <a:xfrm>
-            <a:off x="11406638" y="1424003"/>
+            <a:off x="11404554" y="1740848"/>
             <a:ext cx="334694" cy="914743"/>
             <a:chOff x="6724841" y="1876216"/>
             <a:chExt cx="363072" cy="992303"/>
@@ -8658,7 +7278,7 @@
             <p:cNvPr id="250" name="Rectangle 249">
               <a:extLst>
                 <a:ext uri="{FF2B5EF4-FFF2-40B4-BE49-F238E27FC236}">
-                  <a16:creationId xmlns:a16="http://schemas.microsoft.com/office/drawing/2014/main" id="{43849B11-C822-CD60-FF91-65D84357F71C}"/>
+                  <a16:creationId xmlns:a16="http://schemas.microsoft.com/office/drawing/2014/main" id="{D8F793B2-51DB-25ED-FE52-8284916F120F}"/>
                 </a:ext>
               </a:extLst>
             </p:cNvPr>
@@ -8708,7 +7328,7 @@
             <p:cNvPr id="251" name="Rectangle 250">
               <a:extLst>
                 <a:ext uri="{FF2B5EF4-FFF2-40B4-BE49-F238E27FC236}">
-                  <a16:creationId xmlns:a16="http://schemas.microsoft.com/office/drawing/2014/main" id="{BBE97ACC-6733-32FA-B22B-D5762BFD381E}"/>
+                  <a16:creationId xmlns:a16="http://schemas.microsoft.com/office/drawing/2014/main" id="{43FB95AC-7469-6FF1-8AB6-BD0A6E1F3E05}"/>
                 </a:ext>
               </a:extLst>
             </p:cNvPr>
@@ -8759,20 +7379,19 @@
           <p:cNvPr id="252" name="Straight Arrow Connector 251">
             <a:extLst>
               <a:ext uri="{FF2B5EF4-FFF2-40B4-BE49-F238E27FC236}">
-                <a16:creationId xmlns:a16="http://schemas.microsoft.com/office/drawing/2014/main" id="{CAA90AFB-63FA-102C-CFC3-8DDD3F986AD1}"/>
+                <a16:creationId xmlns:a16="http://schemas.microsoft.com/office/drawing/2014/main" id="{F2F6300A-BB62-79E5-A72C-12199118B57A}"/>
               </a:ext>
             </a:extLst>
           </p:cNvPr>
           <p:cNvCxnSpPr>
             <a:cxnSpLocks/>
             <a:stCxn id="245" idx="6"/>
-            <a:endCxn id="250" idx="1"/>
           </p:cNvCxnSpPr>
           <p:nvPr/>
         </p:nvCxnSpPr>
         <p:spPr>
           <a:xfrm flipV="1">
-            <a:off x="10944293" y="1621499"/>
+            <a:off x="10944293" y="1948074"/>
             <a:ext cx="462345" cy="53"/>
           </a:xfrm>
           <a:prstGeom prst="straightConnector1">
@@ -8805,20 +7424,19 @@
           <p:cNvPr id="253" name="Straight Arrow Connector 252">
             <a:extLst>
               <a:ext uri="{FF2B5EF4-FFF2-40B4-BE49-F238E27FC236}">
-                <a16:creationId xmlns:a16="http://schemas.microsoft.com/office/drawing/2014/main" id="{6EE6C900-1D63-7DD3-245B-003CDC4FD401}"/>
+                <a16:creationId xmlns:a16="http://schemas.microsoft.com/office/drawing/2014/main" id="{36EEF8C2-5664-B91F-526E-34C3EBF62C6D}"/>
               </a:ext>
             </a:extLst>
           </p:cNvPr>
           <p:cNvCxnSpPr>
             <a:cxnSpLocks/>
             <a:stCxn id="246" idx="6"/>
-            <a:endCxn id="251" idx="1"/>
           </p:cNvCxnSpPr>
           <p:nvPr/>
         </p:nvCxnSpPr>
         <p:spPr>
           <a:xfrm>
-            <a:off x="10944293" y="2138959"/>
+            <a:off x="10944293" y="2465534"/>
             <a:ext cx="462346" cy="17318"/>
           </a:xfrm>
           <a:prstGeom prst="straightConnector1">
@@ -8851,7 +7469,7 @@
           <p:cNvPr id="254" name="Group 253">
             <a:extLst>
               <a:ext uri="{FF2B5EF4-FFF2-40B4-BE49-F238E27FC236}">
-                <a16:creationId xmlns:a16="http://schemas.microsoft.com/office/drawing/2014/main" id="{BD6CF666-460D-80A1-23E6-BD3C6C53949E}"/>
+                <a16:creationId xmlns:a16="http://schemas.microsoft.com/office/drawing/2014/main" id="{A08FD173-D2C9-B021-FCE2-C9DE7F8FD083}"/>
               </a:ext>
             </a:extLst>
           </p:cNvPr>
@@ -8860,10 +7478,10 @@
         </p:nvGrpSpPr>
         <p:grpSpPr>
           <a:xfrm>
-            <a:off x="8047742" y="817828"/>
-            <a:ext cx="1798886" cy="2223135"/>
-            <a:chOff x="2224526" y="1834640"/>
-            <a:chExt cx="1039907" cy="2692536"/>
+            <a:off x="8102453" y="1415551"/>
+            <a:ext cx="1798886" cy="1768124"/>
+            <a:chOff x="2256153" y="2147218"/>
+            <a:chExt cx="1039907" cy="2141453"/>
           </a:xfrm>
         </p:grpSpPr>
         <p:sp>
@@ -8871,7 +7489,7 @@
             <p:cNvPr id="255" name="TextBox 254">
               <a:extLst>
                 <a:ext uri="{FF2B5EF4-FFF2-40B4-BE49-F238E27FC236}">
-                  <a16:creationId xmlns:a16="http://schemas.microsoft.com/office/drawing/2014/main" id="{0DC28197-3C5E-9AFD-97BF-180A714C0EED}"/>
+                  <a16:creationId xmlns:a16="http://schemas.microsoft.com/office/drawing/2014/main" id="{A6140B13-7BFA-623D-CDD2-158F2DEAF5FB}"/>
                 </a:ext>
               </a:extLst>
             </p:cNvPr>
@@ -8880,7 +7498,7 @@
           </p:nvSpPr>
           <p:spPr>
             <a:xfrm>
-              <a:off x="2224526" y="1877056"/>
+              <a:off x="2256153" y="2147218"/>
               <a:ext cx="1039907" cy="1211810"/>
             </a:xfrm>
             <a:prstGeom prst="rect">
@@ -8919,7 +7537,7 @@
             <p:cNvPr id="256" name="Rectangle: Rounded Corners 255">
               <a:extLst>
                 <a:ext uri="{FF2B5EF4-FFF2-40B4-BE49-F238E27FC236}">
-                  <a16:creationId xmlns:a16="http://schemas.microsoft.com/office/drawing/2014/main" id="{09E24B5A-E7B4-7C08-5334-720262845828}"/>
+                  <a16:creationId xmlns:a16="http://schemas.microsoft.com/office/drawing/2014/main" id="{2C7C0B9D-38A6-327B-7AD6-2EB20AF53F6F}"/>
                 </a:ext>
               </a:extLst>
             </p:cNvPr>
@@ -8928,8 +7546,8 @@
           </p:nvSpPr>
           <p:spPr>
             <a:xfrm>
-              <a:off x="2451960" y="1834640"/>
-              <a:ext cx="629931" cy="2692536"/>
+              <a:off x="2502783" y="2185700"/>
+              <a:ext cx="549828" cy="2102971"/>
             </a:xfrm>
             <a:prstGeom prst="roundRect">
               <a:avLst/>
@@ -8978,7 +7596,7 @@
           <p:cNvPr id="257" name="Group 256">
             <a:extLst>
               <a:ext uri="{FF2B5EF4-FFF2-40B4-BE49-F238E27FC236}">
-                <a16:creationId xmlns:a16="http://schemas.microsoft.com/office/drawing/2014/main" id="{33F4A55E-6557-824F-EAF6-C8DEBFA9D624}"/>
+                <a16:creationId xmlns:a16="http://schemas.microsoft.com/office/drawing/2014/main" id="{F61E713A-5E45-88AD-C187-F476207D5399}"/>
               </a:ext>
             </a:extLst>
           </p:cNvPr>
@@ -8987,10 +7605,10 @@
         </p:nvGrpSpPr>
         <p:grpSpPr>
           <a:xfrm>
-            <a:off x="10016150" y="817827"/>
-            <a:ext cx="1415691" cy="2223136"/>
-            <a:chOff x="2220380" y="1834641"/>
-            <a:chExt cx="1039907" cy="2692535"/>
+            <a:off x="10015913" y="1400863"/>
+            <a:ext cx="1415691" cy="1767381"/>
+            <a:chOff x="2220206" y="2175838"/>
+            <a:chExt cx="1039907" cy="2351338"/>
           </a:xfrm>
         </p:grpSpPr>
         <p:sp>
@@ -8998,7 +7616,7 @@
             <p:cNvPr id="258" name="TextBox 257">
               <a:extLst>
                 <a:ext uri="{FF2B5EF4-FFF2-40B4-BE49-F238E27FC236}">
-                  <a16:creationId xmlns:a16="http://schemas.microsoft.com/office/drawing/2014/main" id="{A06CC293-09A0-1DF4-F3FF-61C6A0DAD69F}"/>
+                  <a16:creationId xmlns:a16="http://schemas.microsoft.com/office/drawing/2014/main" id="{DCD99CBE-D14E-0E40-8474-66041A9347EC}"/>
                 </a:ext>
               </a:extLst>
             </p:cNvPr>
@@ -9007,8 +7625,8 @@
           </p:nvSpPr>
           <p:spPr>
             <a:xfrm>
-              <a:off x="2220380" y="1898993"/>
-              <a:ext cx="1039907" cy="561860"/>
+              <a:off x="2220206" y="2175838"/>
+              <a:ext cx="1039907" cy="561859"/>
             </a:xfrm>
             <a:prstGeom prst="rect">
               <a:avLst/>
@@ -9046,7 +7664,7 @@
             <p:cNvPr id="259" name="Rectangle: Rounded Corners 258">
               <a:extLst>
                 <a:ext uri="{FF2B5EF4-FFF2-40B4-BE49-F238E27FC236}">
-                  <a16:creationId xmlns:a16="http://schemas.microsoft.com/office/drawing/2014/main" id="{7B1DC1E3-E8D0-98F7-7A46-9575D2CF0752}"/>
+                  <a16:creationId xmlns:a16="http://schemas.microsoft.com/office/drawing/2014/main" id="{AC79E309-BEC3-4634-58B6-12F481776FC3}"/>
                 </a:ext>
               </a:extLst>
             </p:cNvPr>
@@ -9055,8 +7673,8 @@
           </p:nvSpPr>
           <p:spPr>
             <a:xfrm>
-              <a:off x="2362200" y="1834641"/>
-              <a:ext cx="776608" cy="2692535"/>
+              <a:off x="2378686" y="2240789"/>
+              <a:ext cx="736317" cy="2286387"/>
             </a:xfrm>
             <a:prstGeom prst="roundRect">
               <a:avLst/>
@@ -9103,7 +7721,7 @@
           <p:cNvPr id="260" name="Group 259">
             <a:extLst>
               <a:ext uri="{FF2B5EF4-FFF2-40B4-BE49-F238E27FC236}">
-                <a16:creationId xmlns:a16="http://schemas.microsoft.com/office/drawing/2014/main" id="{AC7477CD-6121-DDD4-E187-8D8AC10CAACF}"/>
+                <a16:creationId xmlns:a16="http://schemas.microsoft.com/office/drawing/2014/main" id="{2E6D87CC-1352-B424-5438-A88F95C6FB5B}"/>
               </a:ext>
             </a:extLst>
           </p:cNvPr>
@@ -9112,10 +7730,10 @@
         </p:nvGrpSpPr>
         <p:grpSpPr>
           <a:xfrm>
-            <a:off x="8187807" y="158805"/>
-            <a:ext cx="3802304" cy="3099980"/>
-            <a:chOff x="392845" y="464697"/>
-            <a:chExt cx="5462280" cy="5913842"/>
+            <a:off x="8187807" y="896997"/>
+            <a:ext cx="3802304" cy="2361788"/>
+            <a:chOff x="392845" y="1872948"/>
+            <a:chExt cx="5462280" cy="4505591"/>
           </a:xfrm>
         </p:grpSpPr>
         <p:sp>
@@ -9123,7 +7741,7 @@
             <p:cNvPr id="261" name="Rectangle: Rounded Corners 260">
               <a:extLst>
                 <a:ext uri="{FF2B5EF4-FFF2-40B4-BE49-F238E27FC236}">
-                  <a16:creationId xmlns:a16="http://schemas.microsoft.com/office/drawing/2014/main" id="{0864C7C4-8784-2973-08A0-AD4A7065D44F}"/>
+                  <a16:creationId xmlns:a16="http://schemas.microsoft.com/office/drawing/2014/main" id="{1239C3A3-2EDB-1015-6DFF-A8D3DE6A0C11}"/>
                 </a:ext>
               </a:extLst>
             </p:cNvPr>
@@ -9132,8 +7750,8 @@
           </p:nvSpPr>
           <p:spPr>
             <a:xfrm>
-              <a:off x="392845" y="479461"/>
-              <a:ext cx="5462280" cy="5899078"/>
+              <a:off x="392845" y="1872948"/>
+              <a:ext cx="5462280" cy="4505591"/>
             </a:xfrm>
             <a:prstGeom prst="roundRect">
               <a:avLst/>
@@ -9176,7 +7794,7 @@
             <p:cNvPr id="262" name="TextBox 261">
               <a:extLst>
                 <a:ext uri="{FF2B5EF4-FFF2-40B4-BE49-F238E27FC236}">
-                  <a16:creationId xmlns:a16="http://schemas.microsoft.com/office/drawing/2014/main" id="{9B31C11F-1FF3-4045-4423-F88A4D4EA68E}"/>
+                  <a16:creationId xmlns:a16="http://schemas.microsoft.com/office/drawing/2014/main" id="{E34B64BF-B4FA-177F-91ED-0EE059DA9FCB}"/>
                 </a:ext>
               </a:extLst>
             </p:cNvPr>
@@ -9185,8 +7803,8 @@
           </p:nvSpPr>
           <p:spPr>
             <a:xfrm>
-              <a:off x="975027" y="464697"/>
-              <a:ext cx="4211049" cy="1224321"/>
+              <a:off x="765592" y="1975684"/>
+              <a:ext cx="4211050" cy="998149"/>
             </a:xfrm>
             <a:prstGeom prst="rect">
               <a:avLst/>
@@ -9201,7 +7819,7 @@
             <a:p>
               <a:pPr algn="ctr"/>
               <a:r>
-                <a:rPr lang="en-US" sz="3200" dirty="0">
+                <a:rPr lang="en-US" sz="2800" dirty="0">
                   <a:solidFill>
                     <a:srgbClr val="C00000"/>
                   </a:solidFill>
@@ -9217,7 +7835,7 @@
           <p:cNvPr id="263" name="Rectangle 262">
             <a:extLst>
               <a:ext uri="{FF2B5EF4-FFF2-40B4-BE49-F238E27FC236}">
-                <a16:creationId xmlns:a16="http://schemas.microsoft.com/office/drawing/2014/main" id="{7FE66CA3-9A71-5B62-FAC4-A704B3AD06FA}"/>
+                <a16:creationId xmlns:a16="http://schemas.microsoft.com/office/drawing/2014/main" id="{A9C40943-F3AB-D1BD-9A62-6A04759F5B1B}"/>
               </a:ext>
             </a:extLst>
           </p:cNvPr>
@@ -9226,7 +7844,7 @@
         </p:nvSpPr>
         <p:spPr>
           <a:xfrm>
-            <a:off x="9649190" y="1427336"/>
+            <a:off x="9649190" y="1675533"/>
             <a:ext cx="379897" cy="446738"/>
           </a:xfrm>
           <a:prstGeom prst="rect">
@@ -9272,7 +7890,7 @@
           <p:cNvPr id="264" name="TextBox 263">
             <a:extLst>
               <a:ext uri="{FF2B5EF4-FFF2-40B4-BE49-F238E27FC236}">
-                <a16:creationId xmlns:a16="http://schemas.microsoft.com/office/drawing/2014/main" id="{94268415-5AC3-BA6D-F5AA-5CD22ECC1556}"/>
+                <a16:creationId xmlns:a16="http://schemas.microsoft.com/office/drawing/2014/main" id="{9CD6F603-B603-B79E-B1EF-C5E563603F7C}"/>
               </a:ext>
             </a:extLst>
           </p:cNvPr>
@@ -9281,7 +7899,7 @@
         </p:nvSpPr>
         <p:spPr>
           <a:xfrm>
-            <a:off x="8341959" y="2291563"/>
+            <a:off x="8341959" y="2631201"/>
             <a:ext cx="1319872" cy="1077218"/>
           </a:xfrm>
           <a:prstGeom prst="rect">
@@ -9333,7 +7951,7 @@
           <p:cNvPr id="265" name="Straight Arrow Connector 264">
             <a:extLst>
               <a:ext uri="{FF2B5EF4-FFF2-40B4-BE49-F238E27FC236}">
-                <a16:creationId xmlns:a16="http://schemas.microsoft.com/office/drawing/2014/main" id="{EFA36925-0636-4499-5384-03EFD6B6ACC1}"/>
+                <a16:creationId xmlns:a16="http://schemas.microsoft.com/office/drawing/2014/main" id="{0DB27FAF-11E9-B686-FCF9-BCCD5F327122}"/>
               </a:ext>
             </a:extLst>
           </p:cNvPr>
@@ -9345,9 +7963,9 @@
           <p:nvPr/>
         </p:nvCxnSpPr>
         <p:spPr>
-          <a:xfrm flipV="1">
-            <a:off x="10029087" y="1621552"/>
-            <a:ext cx="484215" cy="29153"/>
+          <a:xfrm>
+            <a:off x="10029087" y="1898902"/>
+            <a:ext cx="484215" cy="49225"/>
           </a:xfrm>
           <a:prstGeom prst="straightConnector1">
             <a:avLst/>
@@ -9374,58 +7992,12 @@
           </a:fontRef>
         </p:style>
       </p:cxnSp>
-      <p:cxnSp>
-        <p:nvCxnSpPr>
-          <p:cNvPr id="266" name="Straight Arrow Connector 265">
-            <a:extLst>
-              <a:ext uri="{FF2B5EF4-FFF2-40B4-BE49-F238E27FC236}">
-                <a16:creationId xmlns:a16="http://schemas.microsoft.com/office/drawing/2014/main" id="{FA2C4612-D824-C57F-7D11-3F01D9E2429E}"/>
-              </a:ext>
-            </a:extLst>
-          </p:cNvPr>
-          <p:cNvCxnSpPr>
-            <a:cxnSpLocks/>
-            <a:stCxn id="263" idx="3"/>
-            <a:endCxn id="246" idx="2"/>
-          </p:cNvCxnSpPr>
-          <p:nvPr/>
-        </p:nvCxnSpPr>
-        <p:spPr>
-          <a:xfrm>
-            <a:off x="10029087" y="1650705"/>
-            <a:ext cx="484215" cy="488254"/>
-          </a:xfrm>
-          <a:prstGeom prst="straightConnector1">
-            <a:avLst/>
-          </a:prstGeom>
-          <a:ln w="12700">
-            <a:solidFill>
-              <a:srgbClr val="00B0F0"/>
-            </a:solidFill>
-            <a:tailEnd type="triangle"/>
-          </a:ln>
-        </p:spPr>
-        <p:style>
-          <a:lnRef idx="2">
-            <a:schemeClr val="accent1"/>
-          </a:lnRef>
-          <a:fillRef idx="0">
-            <a:schemeClr val="accent1"/>
-          </a:fillRef>
-          <a:effectRef idx="1">
-            <a:schemeClr val="accent1"/>
-          </a:effectRef>
-          <a:fontRef idx="minor">
-            <a:schemeClr val="tx1"/>
-          </a:fontRef>
-        </p:style>
-      </p:cxnSp>
       <p:sp>
         <p:nvSpPr>
           <p:cNvPr id="267" name="TextBox 266">
             <a:extLst>
               <a:ext uri="{FF2B5EF4-FFF2-40B4-BE49-F238E27FC236}">
-                <a16:creationId xmlns:a16="http://schemas.microsoft.com/office/drawing/2014/main" id="{C6232B44-01DC-43A3-C7DC-868E7833415B}"/>
+                <a16:creationId xmlns:a16="http://schemas.microsoft.com/office/drawing/2014/main" id="{3A3FCA7E-6B2C-1B8A-54DE-4917834EB5E5}"/>
               </a:ext>
             </a:extLst>
           </p:cNvPr>
@@ -9434,7 +8006,7 @@
         </p:nvSpPr>
         <p:spPr>
           <a:xfrm>
-            <a:off x="10063823" y="2284350"/>
+            <a:off x="10063823" y="2610925"/>
             <a:ext cx="1319872" cy="1077218"/>
           </a:xfrm>
           <a:prstGeom prst="rect">
@@ -9482,7 +8054,7 @@
           <p:cNvPr id="268" name="Rectangle 267">
             <a:extLst>
               <a:ext uri="{FF2B5EF4-FFF2-40B4-BE49-F238E27FC236}">
-                <a16:creationId xmlns:a16="http://schemas.microsoft.com/office/drawing/2014/main" id="{E17D8313-9E73-F3A5-0251-C31A66F4C22F}"/>
+                <a16:creationId xmlns:a16="http://schemas.microsoft.com/office/drawing/2014/main" id="{4E1D8E7C-8970-917A-F3F7-A437C2621FAF}"/>
               </a:ext>
             </a:extLst>
           </p:cNvPr>
@@ -9491,7 +8063,7 @@
         </p:nvSpPr>
         <p:spPr>
           <a:xfrm>
-            <a:off x="9647106" y="5348935"/>
+            <a:off x="9649190" y="4777221"/>
             <a:ext cx="379897" cy="405247"/>
           </a:xfrm>
           <a:prstGeom prst="rect">
@@ -9534,10 +8106,10 @@
       </p:sp>
       <p:grpSp>
         <p:nvGrpSpPr>
-          <p:cNvPr id="269" name="Group 268">
-            <a:extLst>
-              <a:ext uri="{FF2B5EF4-FFF2-40B4-BE49-F238E27FC236}">
-                <a16:creationId xmlns:a16="http://schemas.microsoft.com/office/drawing/2014/main" id="{030ACA4F-093D-86EC-5E75-478F18A4977C}"/>
+          <p:cNvPr id="274" name="Group 273">
+            <a:extLst>
+              <a:ext uri="{FF2B5EF4-FFF2-40B4-BE49-F238E27FC236}">
+                <a16:creationId xmlns:a16="http://schemas.microsoft.com/office/drawing/2014/main" id="{E40E0A40-AA57-0F29-490E-6CC7EE2C5ED4}"/>
               </a:ext>
             </a:extLst>
           </p:cNvPr>
@@ -9546,225 +8118,7 @@
         </p:nvGrpSpPr>
         <p:grpSpPr>
           <a:xfrm>
-            <a:off x="8759643" y="4826565"/>
-            <a:ext cx="433450" cy="960431"/>
-            <a:chOff x="2661401" y="2604643"/>
-            <a:chExt cx="285510" cy="632628"/>
-          </a:xfrm>
-          <a:solidFill>
-            <a:schemeClr val="bg2">
-              <a:lumMod val="50000"/>
-            </a:schemeClr>
-          </a:solidFill>
-        </p:grpSpPr>
-        <p:sp>
-          <p:nvSpPr>
-            <p:cNvPr id="270" name="Oval 269">
-              <a:extLst>
-                <a:ext uri="{FF2B5EF4-FFF2-40B4-BE49-F238E27FC236}">
-                  <a16:creationId xmlns:a16="http://schemas.microsoft.com/office/drawing/2014/main" id="{D3F30A68-D47A-24C1-9F85-C50DA7B7BC89}"/>
-                </a:ext>
-              </a:extLst>
-            </p:cNvPr>
-            <p:cNvSpPr/>
-            <p:nvPr/>
-          </p:nvSpPr>
-          <p:spPr>
-            <a:xfrm>
-              <a:off x="2661401" y="2604643"/>
-              <a:ext cx="283277" cy="283276"/>
-            </a:xfrm>
-            <a:prstGeom prst="ellipse">
-              <a:avLst/>
-            </a:prstGeom>
-            <a:grpFill/>
-            <a:ln>
-              <a:noFill/>
-            </a:ln>
-          </p:spPr>
-          <p:style>
-            <a:lnRef idx="2">
-              <a:schemeClr val="accent1">
-                <a:shade val="15000"/>
-              </a:schemeClr>
-            </a:lnRef>
-            <a:fillRef idx="1">
-              <a:schemeClr val="accent1"/>
-            </a:fillRef>
-            <a:effectRef idx="0">
-              <a:schemeClr val="accent1"/>
-            </a:effectRef>
-            <a:fontRef idx="minor">
-              <a:schemeClr val="lt1"/>
-            </a:fontRef>
-          </p:style>
-          <p:txBody>
-            <a:bodyPr rtlCol="0" anchor="ctr"/>
-            <a:lstStyle/>
-            <a:p>
-              <a:pPr algn="ctr"/>
-              <a:endParaRPr lang="en-US" sz="3200" dirty="0"/>
-            </a:p>
-          </p:txBody>
-        </p:sp>
-        <p:sp>
-          <p:nvSpPr>
-            <p:cNvPr id="271" name="Oval 270">
-              <a:extLst>
-                <a:ext uri="{FF2B5EF4-FFF2-40B4-BE49-F238E27FC236}">
-                  <a16:creationId xmlns:a16="http://schemas.microsoft.com/office/drawing/2014/main" id="{14E27915-B4F7-273C-F47D-BEA76D5F6376}"/>
-                </a:ext>
-              </a:extLst>
-            </p:cNvPr>
-            <p:cNvSpPr/>
-            <p:nvPr/>
-          </p:nvSpPr>
-          <p:spPr>
-            <a:xfrm>
-              <a:off x="2663634" y="2953995"/>
-              <a:ext cx="283277" cy="283276"/>
-            </a:xfrm>
-            <a:prstGeom prst="ellipse">
-              <a:avLst/>
-            </a:prstGeom>
-            <a:grpFill/>
-            <a:ln>
-              <a:noFill/>
-            </a:ln>
-          </p:spPr>
-          <p:style>
-            <a:lnRef idx="2">
-              <a:schemeClr val="accent1">
-                <a:shade val="15000"/>
-              </a:schemeClr>
-            </a:lnRef>
-            <a:fillRef idx="1">
-              <a:schemeClr val="accent1"/>
-            </a:fillRef>
-            <a:effectRef idx="0">
-              <a:schemeClr val="accent1"/>
-            </a:effectRef>
-            <a:fontRef idx="minor">
-              <a:schemeClr val="lt1"/>
-            </a:fontRef>
-          </p:style>
-          <p:txBody>
-            <a:bodyPr rtlCol="0" anchor="ctr"/>
-            <a:lstStyle/>
-            <a:p>
-              <a:pPr algn="ctr"/>
-              <a:endParaRPr lang="en-US" sz="3200" dirty="0"/>
-            </a:p>
-          </p:txBody>
-        </p:sp>
-      </p:grpSp>
-      <p:cxnSp>
-        <p:nvCxnSpPr>
-          <p:cNvPr id="272" name="Straight Arrow Connector 271">
-            <a:extLst>
-              <a:ext uri="{FF2B5EF4-FFF2-40B4-BE49-F238E27FC236}">
-                <a16:creationId xmlns:a16="http://schemas.microsoft.com/office/drawing/2014/main" id="{C324969C-6987-E68E-83FB-B44B80337405}"/>
-              </a:ext>
-            </a:extLst>
-          </p:cNvPr>
-          <p:cNvCxnSpPr>
-            <a:cxnSpLocks/>
-            <a:stCxn id="270" idx="6"/>
-            <a:endCxn id="293" idx="1"/>
-          </p:cNvCxnSpPr>
-          <p:nvPr/>
-        </p:nvCxnSpPr>
-        <p:spPr>
-          <a:xfrm>
-            <a:off x="9189703" y="5041595"/>
-            <a:ext cx="457403" cy="36813"/>
-          </a:xfrm>
-          <a:prstGeom prst="straightConnector1">
-            <a:avLst/>
-          </a:prstGeom>
-          <a:ln w="12700">
-            <a:solidFill>
-              <a:srgbClr val="00B0F0"/>
-            </a:solidFill>
-            <a:tailEnd type="triangle"/>
-          </a:ln>
-        </p:spPr>
-        <p:style>
-          <a:lnRef idx="2">
-            <a:schemeClr val="accent1"/>
-          </a:lnRef>
-          <a:fillRef idx="0">
-            <a:schemeClr val="accent1"/>
-          </a:fillRef>
-          <a:effectRef idx="1">
-            <a:schemeClr val="accent1"/>
-          </a:effectRef>
-          <a:fontRef idx="minor">
-            <a:schemeClr val="tx1"/>
-          </a:fontRef>
-        </p:style>
-      </p:cxnSp>
-      <p:cxnSp>
-        <p:nvCxnSpPr>
-          <p:cNvPr id="273" name="Straight Arrow Connector 272">
-            <a:extLst>
-              <a:ext uri="{FF2B5EF4-FFF2-40B4-BE49-F238E27FC236}">
-                <a16:creationId xmlns:a16="http://schemas.microsoft.com/office/drawing/2014/main" id="{7320C9F0-9A64-6813-147C-5B6162B64E9A}"/>
-              </a:ext>
-            </a:extLst>
-          </p:cNvPr>
-          <p:cNvCxnSpPr>
-            <a:cxnSpLocks/>
-            <a:stCxn id="271" idx="6"/>
-            <a:endCxn id="268" idx="1"/>
-          </p:cNvCxnSpPr>
-          <p:nvPr/>
-        </p:nvCxnSpPr>
-        <p:spPr>
-          <a:xfrm flipV="1">
-            <a:off x="9193093" y="5551559"/>
-            <a:ext cx="454013" cy="20408"/>
-          </a:xfrm>
-          <a:prstGeom prst="straightConnector1">
-            <a:avLst/>
-          </a:prstGeom>
-          <a:ln w="12700">
-            <a:solidFill>
-              <a:srgbClr val="00B0F0"/>
-            </a:solidFill>
-            <a:tailEnd type="triangle"/>
-          </a:ln>
-        </p:spPr>
-        <p:style>
-          <a:lnRef idx="2">
-            <a:schemeClr val="accent1"/>
-          </a:lnRef>
-          <a:fillRef idx="0">
-            <a:schemeClr val="accent1"/>
-          </a:fillRef>
-          <a:effectRef idx="1">
-            <a:schemeClr val="accent1"/>
-          </a:effectRef>
-          <a:fontRef idx="minor">
-            <a:schemeClr val="tx1"/>
-          </a:fontRef>
-        </p:style>
-      </p:cxnSp>
-      <p:grpSp>
-        <p:nvGrpSpPr>
-          <p:cNvPr id="274" name="Group 273">
-            <a:extLst>
-              <a:ext uri="{FF2B5EF4-FFF2-40B4-BE49-F238E27FC236}">
-                <a16:creationId xmlns:a16="http://schemas.microsoft.com/office/drawing/2014/main" id="{F05BBD97-B446-1F88-0D63-E1F5AD46BE78}"/>
-              </a:ext>
-            </a:extLst>
-          </p:cNvPr>
-          <p:cNvGrpSpPr/>
-          <p:nvPr/>
-        </p:nvGrpSpPr>
-        <p:grpSpPr>
-          <a:xfrm>
-            <a:off x="10511218" y="4833759"/>
+            <a:off x="10511020" y="4319365"/>
             <a:ext cx="430991" cy="948398"/>
             <a:chOff x="6234952" y="1863964"/>
             <a:chExt cx="443753" cy="976481"/>
@@ -9780,7 +8134,7 @@
             <p:cNvPr id="275" name="Oval 274">
               <a:extLst>
                 <a:ext uri="{FF2B5EF4-FFF2-40B4-BE49-F238E27FC236}">
-                  <a16:creationId xmlns:a16="http://schemas.microsoft.com/office/drawing/2014/main" id="{B0990CEF-EE91-3C34-BF37-E3F6E82D7C72}"/>
+                  <a16:creationId xmlns:a16="http://schemas.microsoft.com/office/drawing/2014/main" id="{C1708E09-5BBC-7CA7-7467-9A3FE21ACBF4}"/>
                 </a:ext>
               </a:extLst>
             </p:cNvPr>
@@ -9830,7 +8184,7 @@
             <p:cNvPr id="276" name="Oval 275">
               <a:extLst>
                 <a:ext uri="{FF2B5EF4-FFF2-40B4-BE49-F238E27FC236}">
-                  <a16:creationId xmlns:a16="http://schemas.microsoft.com/office/drawing/2014/main" id="{46E3A81D-E2EC-BCEE-0EC0-444E3B968FC4}"/>
+                  <a16:creationId xmlns:a16="http://schemas.microsoft.com/office/drawing/2014/main" id="{5EADE9BE-156B-2D12-4063-8062B1F82051}"/>
                 </a:ext>
               </a:extLst>
             </p:cNvPr>
@@ -9878,24 +8232,24 @@
       </p:grpSp>
       <p:cxnSp>
         <p:nvCxnSpPr>
-          <p:cNvPr id="277" name="Straight Arrow Connector 276">
-            <a:extLst>
-              <a:ext uri="{FF2B5EF4-FFF2-40B4-BE49-F238E27FC236}">
-                <a16:creationId xmlns:a16="http://schemas.microsoft.com/office/drawing/2014/main" id="{8D0FD9A0-A2E3-879B-35D0-C2FC7E4BCF03}"/>
+          <p:cNvPr id="278" name="Straight Arrow Connector 277">
+            <a:extLst>
+              <a:ext uri="{FF2B5EF4-FFF2-40B4-BE49-F238E27FC236}">
+                <a16:creationId xmlns:a16="http://schemas.microsoft.com/office/drawing/2014/main" id="{B5800F7D-6BDF-C41F-1E70-F2F8D3959DD8}"/>
               </a:ext>
             </a:extLst>
           </p:cNvPr>
           <p:cNvCxnSpPr>
             <a:cxnSpLocks/>
             <a:stCxn id="268" idx="3"/>
-            <a:endCxn id="275" idx="2"/>
+            <a:endCxn id="276" idx="2"/>
           </p:cNvCxnSpPr>
           <p:nvPr/>
         </p:nvCxnSpPr>
         <p:spPr>
-          <a:xfrm flipV="1">
-            <a:off x="10027003" y="5049255"/>
-            <a:ext cx="484215" cy="502304"/>
+          <a:xfrm>
+            <a:off x="10029087" y="4979845"/>
+            <a:ext cx="481933" cy="72423"/>
           </a:xfrm>
           <a:prstGeom prst="straightConnector1">
             <a:avLst/>
@@ -9922,58 +8276,12 @@
           </a:fontRef>
         </p:style>
       </p:cxnSp>
-      <p:cxnSp>
-        <p:nvCxnSpPr>
-          <p:cNvPr id="278" name="Straight Arrow Connector 277">
-            <a:extLst>
-              <a:ext uri="{FF2B5EF4-FFF2-40B4-BE49-F238E27FC236}">
-                <a16:creationId xmlns:a16="http://schemas.microsoft.com/office/drawing/2014/main" id="{8BA111D2-C0F4-5A33-A56C-6AE041EE1226}"/>
-              </a:ext>
-            </a:extLst>
-          </p:cNvPr>
-          <p:cNvCxnSpPr>
-            <a:cxnSpLocks/>
-            <a:stCxn id="268" idx="3"/>
-            <a:endCxn id="276" idx="2"/>
-          </p:cNvCxnSpPr>
-          <p:nvPr/>
-        </p:nvCxnSpPr>
-        <p:spPr>
-          <a:xfrm>
-            <a:off x="10027003" y="5551559"/>
-            <a:ext cx="484215" cy="15103"/>
-          </a:xfrm>
-          <a:prstGeom prst="straightConnector1">
-            <a:avLst/>
-          </a:prstGeom>
-          <a:ln w="12700">
-            <a:solidFill>
-              <a:srgbClr val="00B0F0"/>
-            </a:solidFill>
-            <a:tailEnd type="triangle"/>
-          </a:ln>
-        </p:spPr>
-        <p:style>
-          <a:lnRef idx="2">
-            <a:schemeClr val="accent1"/>
-          </a:lnRef>
-          <a:fillRef idx="0">
-            <a:schemeClr val="accent1"/>
-          </a:fillRef>
-          <a:effectRef idx="1">
-            <a:schemeClr val="accent1"/>
-          </a:effectRef>
-          <a:fontRef idx="minor">
-            <a:schemeClr val="tx1"/>
-          </a:fontRef>
-        </p:style>
-      </p:cxnSp>
       <p:grpSp>
         <p:nvGrpSpPr>
           <p:cNvPr id="279" name="Group 278">
             <a:extLst>
               <a:ext uri="{FF2B5EF4-FFF2-40B4-BE49-F238E27FC236}">
-                <a16:creationId xmlns:a16="http://schemas.microsoft.com/office/drawing/2014/main" id="{06269279-54CD-AFE5-C023-6D4B04F4EF8E}"/>
+                <a16:creationId xmlns:a16="http://schemas.microsoft.com/office/drawing/2014/main" id="{38C17634-7BDE-6197-1F87-EEA38234870C}"/>
               </a:ext>
             </a:extLst>
           </p:cNvPr>
@@ -9982,7 +8290,7 @@
         </p:nvGrpSpPr>
         <p:grpSpPr>
           <a:xfrm>
-            <a:off x="11404554" y="4851706"/>
+            <a:off x="11383695" y="4319849"/>
             <a:ext cx="334694" cy="914743"/>
             <a:chOff x="6724841" y="1876216"/>
             <a:chExt cx="363072" cy="992303"/>
@@ -9999,7 +8307,7 @@
             <p:cNvPr id="280" name="Rectangle 279">
               <a:extLst>
                 <a:ext uri="{FF2B5EF4-FFF2-40B4-BE49-F238E27FC236}">
-                  <a16:creationId xmlns:a16="http://schemas.microsoft.com/office/drawing/2014/main" id="{8FC6CC21-9483-D480-F799-AE2D70489291}"/>
+                  <a16:creationId xmlns:a16="http://schemas.microsoft.com/office/drawing/2014/main" id="{7F0FD5B1-0831-FCEC-C4DE-DFF31871D8A6}"/>
                 </a:ext>
               </a:extLst>
             </p:cNvPr>
@@ -10049,7 +8357,7 @@
             <p:cNvPr id="281" name="Rectangle 280">
               <a:extLst>
                 <a:ext uri="{FF2B5EF4-FFF2-40B4-BE49-F238E27FC236}">
-                  <a16:creationId xmlns:a16="http://schemas.microsoft.com/office/drawing/2014/main" id="{A28CC34F-0B33-1AF1-AF5D-E236E7CB690E}"/>
+                  <a16:creationId xmlns:a16="http://schemas.microsoft.com/office/drawing/2014/main" id="{B9460B86-14C4-AC46-8604-1BD2F708FB56}"/>
                 </a:ext>
               </a:extLst>
             </p:cNvPr>
@@ -10100,7 +8408,7 @@
           <p:cNvPr id="282" name="Straight Arrow Connector 281">
             <a:extLst>
               <a:ext uri="{FF2B5EF4-FFF2-40B4-BE49-F238E27FC236}">
-                <a16:creationId xmlns:a16="http://schemas.microsoft.com/office/drawing/2014/main" id="{CEBB4F5D-8FAD-3505-40B9-321DA44972E6}"/>
+                <a16:creationId xmlns:a16="http://schemas.microsoft.com/office/drawing/2014/main" id="{E2F22D0C-770A-A9FB-81DF-62849BE8D126}"/>
               </a:ext>
             </a:extLst>
           </p:cNvPr>
@@ -10113,8 +8421,8 @@
         </p:nvCxnSpPr>
         <p:spPr>
           <a:xfrm flipV="1">
-            <a:off x="10942209" y="5049202"/>
-            <a:ext cx="462345" cy="53"/>
+            <a:off x="10942011" y="4517345"/>
+            <a:ext cx="441684" cy="17516"/>
           </a:xfrm>
           <a:prstGeom prst="straightConnector1">
             <a:avLst/>
@@ -10146,7 +8454,7 @@
           <p:cNvPr id="283" name="Straight Arrow Connector 282">
             <a:extLst>
               <a:ext uri="{FF2B5EF4-FFF2-40B4-BE49-F238E27FC236}">
-                <a16:creationId xmlns:a16="http://schemas.microsoft.com/office/drawing/2014/main" id="{03B9DAA9-F04F-5B14-1F37-E77A6D3428DC}"/>
+                <a16:creationId xmlns:a16="http://schemas.microsoft.com/office/drawing/2014/main" id="{FEF9942B-8AD0-3AA4-10D0-8A2EC4F07E1B}"/>
               </a:ext>
             </a:extLst>
           </p:cNvPr>
@@ -10158,9 +8466,9 @@
           <p:nvPr/>
         </p:nvCxnSpPr>
         <p:spPr>
-          <a:xfrm>
-            <a:off x="10942209" y="5566662"/>
-            <a:ext cx="462346" cy="17318"/>
+          <a:xfrm flipV="1">
+            <a:off x="10942011" y="5052123"/>
+            <a:ext cx="441685" cy="145"/>
           </a:xfrm>
           <a:prstGeom prst="straightConnector1">
             <a:avLst/>
@@ -10189,10 +8497,10 @@
       </p:cxnSp>
       <p:grpSp>
         <p:nvGrpSpPr>
-          <p:cNvPr id="284" name="Group 283">
-            <a:extLst>
-              <a:ext uri="{FF2B5EF4-FFF2-40B4-BE49-F238E27FC236}">
-                <a16:creationId xmlns:a16="http://schemas.microsoft.com/office/drawing/2014/main" id="{276CA260-62E8-F9B2-AECD-4988CABEF669}"/>
+          <p:cNvPr id="287" name="Group 286">
+            <a:extLst>
+              <a:ext uri="{FF2B5EF4-FFF2-40B4-BE49-F238E27FC236}">
+                <a16:creationId xmlns:a16="http://schemas.microsoft.com/office/drawing/2014/main" id="{88667D6C-6DFD-5EA6-6BFC-688307AD4550}"/>
               </a:ext>
             </a:extLst>
           </p:cNvPr>
@@ -10201,18 +8509,18 @@
         </p:nvGrpSpPr>
         <p:grpSpPr>
           <a:xfrm>
-            <a:off x="8056690" y="4245531"/>
-            <a:ext cx="1798886" cy="2223135"/>
-            <a:chOff x="2231675" y="1834640"/>
-            <a:chExt cx="1039907" cy="2692536"/>
+            <a:off x="10028377" y="4001741"/>
+            <a:ext cx="1415691" cy="1762721"/>
+            <a:chOff x="2230892" y="1539378"/>
+            <a:chExt cx="1039907" cy="2134907"/>
           </a:xfrm>
         </p:grpSpPr>
         <p:sp>
           <p:nvSpPr>
-            <p:cNvPr id="285" name="TextBox 284">
+            <p:cNvPr id="288" name="TextBox 287">
               <a:extLst>
                 <a:ext uri="{FF2B5EF4-FFF2-40B4-BE49-F238E27FC236}">
-                  <a16:creationId xmlns:a16="http://schemas.microsoft.com/office/drawing/2014/main" id="{1A9253EC-D581-D502-C6D8-9C3FF1FF11D8}"/>
+                  <a16:creationId xmlns:a16="http://schemas.microsoft.com/office/drawing/2014/main" id="{95090E90-4A6B-1E50-BED7-11B39ADA4434}"/>
                 </a:ext>
               </a:extLst>
             </p:cNvPr>
@@ -10221,134 +8529,7 @@
           </p:nvSpPr>
           <p:spPr>
             <a:xfrm>
-              <a:off x="2231675" y="1866337"/>
-              <a:ext cx="1039907" cy="1211810"/>
-            </a:xfrm>
-            <a:prstGeom prst="rect">
-              <a:avLst/>
-            </a:prstGeom>
-            <a:noFill/>
-            <a:ln>
-              <a:noFill/>
-            </a:ln>
-          </p:spPr>
-          <p:txBody>
-            <a:bodyPr wrap="square" rtlCol="0">
-              <a:spAutoFit/>
-            </a:bodyPr>
-            <a:lstStyle/>
-            <a:p>
-              <a:pPr algn="ctr"/>
-              <a:r>
-                <a:rPr lang="en-US" sz="2000" b="1" dirty="0">
-                  <a:solidFill>
-                    <a:schemeClr val="bg2">
-                      <a:lumMod val="50000"/>
-                    </a:schemeClr>
-                  </a:solidFill>
-                </a:rPr>
-                <a:t>sift</a:t>
-              </a:r>
-            </a:p>
-            <a:p>
-              <a:endParaRPr lang="en-US" sz="3200" dirty="0"/>
-            </a:p>
-          </p:txBody>
-        </p:sp>
-        <p:sp>
-          <p:nvSpPr>
-            <p:cNvPr id="286" name="Rectangle: Rounded Corners 285">
-              <a:extLst>
-                <a:ext uri="{FF2B5EF4-FFF2-40B4-BE49-F238E27FC236}">
-                  <a16:creationId xmlns:a16="http://schemas.microsoft.com/office/drawing/2014/main" id="{C93E58F1-0D51-D0E1-BBEC-9B9258DE686F}"/>
-                </a:ext>
-              </a:extLst>
-            </p:cNvPr>
-            <p:cNvSpPr/>
-            <p:nvPr/>
-          </p:nvSpPr>
-          <p:spPr>
-            <a:xfrm>
-              <a:off x="2451960" y="1834640"/>
-              <a:ext cx="629931" cy="2692536"/>
-            </a:xfrm>
-            <a:prstGeom prst="roundRect">
-              <a:avLst/>
-            </a:prstGeom>
-            <a:noFill/>
-            <a:ln>
-              <a:solidFill>
-                <a:schemeClr val="bg2">
-                  <a:lumMod val="50000"/>
-                </a:schemeClr>
-              </a:solidFill>
-            </a:ln>
-          </p:spPr>
-          <p:style>
-            <a:lnRef idx="2">
-              <a:schemeClr val="accent1">
-                <a:shade val="15000"/>
-              </a:schemeClr>
-            </a:lnRef>
-            <a:fillRef idx="1">
-              <a:schemeClr val="accent1"/>
-            </a:fillRef>
-            <a:effectRef idx="0">
-              <a:schemeClr val="accent1"/>
-            </a:effectRef>
-            <a:fontRef idx="minor">
-              <a:schemeClr val="lt1"/>
-            </a:fontRef>
-          </p:style>
-          <p:txBody>
-            <a:bodyPr rtlCol="0" anchor="ctr"/>
-            <a:lstStyle/>
-            <a:p>
-              <a:pPr algn="ctr"/>
-              <a:endParaRPr lang="en-US" sz="3200">
-                <a:solidFill>
-                  <a:schemeClr val="accent3"/>
-                </a:solidFill>
-              </a:endParaRPr>
-            </a:p>
-          </p:txBody>
-        </p:sp>
-      </p:grpSp>
-      <p:grpSp>
-        <p:nvGrpSpPr>
-          <p:cNvPr id="287" name="Group 286">
-            <a:extLst>
-              <a:ext uri="{FF2B5EF4-FFF2-40B4-BE49-F238E27FC236}">
-                <a16:creationId xmlns:a16="http://schemas.microsoft.com/office/drawing/2014/main" id="{16209541-17D7-A22B-1C64-808878D82B6B}"/>
-              </a:ext>
-            </a:extLst>
-          </p:cNvPr>
-          <p:cNvGrpSpPr/>
-          <p:nvPr/>
-        </p:nvGrpSpPr>
-        <p:grpSpPr>
-          <a:xfrm>
-            <a:off x="10014066" y="4245530"/>
-            <a:ext cx="1415691" cy="2223136"/>
-            <a:chOff x="2220380" y="1834641"/>
-            <a:chExt cx="1039907" cy="2692535"/>
-          </a:xfrm>
-        </p:grpSpPr>
-        <p:sp>
-          <p:nvSpPr>
-            <p:cNvPr id="288" name="TextBox 287">
-              <a:extLst>
-                <a:ext uri="{FF2B5EF4-FFF2-40B4-BE49-F238E27FC236}">
-                  <a16:creationId xmlns:a16="http://schemas.microsoft.com/office/drawing/2014/main" id="{4CD4B65E-4125-22C2-945C-3CAEB5FC3195}"/>
-                </a:ext>
-              </a:extLst>
-            </p:cNvPr>
-            <p:cNvSpPr txBox="1"/>
-            <p:nvPr/>
-          </p:nvSpPr>
-          <p:spPr>
-            <a:xfrm>
-              <a:off x="2220380" y="1898993"/>
+              <a:off x="2230892" y="1539378"/>
               <a:ext cx="1039907" cy="459652"/>
             </a:xfrm>
             <a:prstGeom prst="rect">
@@ -10384,7 +8565,7 @@
             <p:cNvPr id="289" name="Rectangle: Rounded Corners 288">
               <a:extLst>
                 <a:ext uri="{FF2B5EF4-FFF2-40B4-BE49-F238E27FC236}">
-                  <a16:creationId xmlns:a16="http://schemas.microsoft.com/office/drawing/2014/main" id="{6C6B005C-4F68-1C84-5269-35BC87BECD82}"/>
+                  <a16:creationId xmlns:a16="http://schemas.microsoft.com/office/drawing/2014/main" id="{F7D5D80D-4EB6-D3F1-FA20-F425BC7A3187}"/>
                 </a:ext>
               </a:extLst>
             </p:cNvPr>
@@ -10393,8 +8574,8 @@
           </p:nvSpPr>
           <p:spPr>
             <a:xfrm>
-              <a:off x="2362200" y="1834641"/>
-              <a:ext cx="776608" cy="2692535"/>
+              <a:off x="2362200" y="1597894"/>
+              <a:ext cx="776608" cy="2076391"/>
             </a:xfrm>
             <a:prstGeom prst="roundRect">
               <a:avLst/>
@@ -10443,7 +8624,7 @@
           <p:cNvPr id="290" name="Group 289">
             <a:extLst>
               <a:ext uri="{FF2B5EF4-FFF2-40B4-BE49-F238E27FC236}">
-                <a16:creationId xmlns:a16="http://schemas.microsoft.com/office/drawing/2014/main" id="{15A35C4B-82CF-D49B-B515-AC06AF886DB8}"/>
+                <a16:creationId xmlns:a16="http://schemas.microsoft.com/office/drawing/2014/main" id="{A9B7A548-B8A7-75A4-122A-2D72CE82B616}"/>
               </a:ext>
             </a:extLst>
           </p:cNvPr>
@@ -10452,8 +8633,8 @@
         </p:nvGrpSpPr>
         <p:grpSpPr>
           <a:xfrm>
-            <a:off x="8195626" y="3586507"/>
-            <a:ext cx="3796349" cy="3081533"/>
+            <a:off x="8195626" y="3586508"/>
+            <a:ext cx="3796349" cy="2268374"/>
             <a:chOff x="392845" y="464697"/>
             <a:chExt cx="5462280" cy="5913842"/>
           </a:xfrm>
@@ -10463,7 +8644,7 @@
             <p:cNvPr id="291" name="Rectangle: Rounded Corners 290">
               <a:extLst>
                 <a:ext uri="{FF2B5EF4-FFF2-40B4-BE49-F238E27FC236}">
-                  <a16:creationId xmlns:a16="http://schemas.microsoft.com/office/drawing/2014/main" id="{92CB3AF8-68C5-ED38-AD3D-B1C21521CA7F}"/>
+                  <a16:creationId xmlns:a16="http://schemas.microsoft.com/office/drawing/2014/main" id="{97545D78-A172-63B1-68F6-D2310FBF14B1}"/>
                 </a:ext>
               </a:extLst>
             </p:cNvPr>
@@ -10516,7 +8697,7 @@
             <p:cNvPr id="292" name="TextBox 291">
               <a:extLst>
                 <a:ext uri="{FF2B5EF4-FFF2-40B4-BE49-F238E27FC236}">
-                  <a16:creationId xmlns:a16="http://schemas.microsoft.com/office/drawing/2014/main" id="{E4492C32-4391-1C20-9DEE-3EA3E9A14D50}"/>
+                  <a16:creationId xmlns:a16="http://schemas.microsoft.com/office/drawing/2014/main" id="{ED1F5E2D-1C50-5A19-3925-7DA0B742C7BC}"/>
                 </a:ext>
               </a:extLst>
             </p:cNvPr>
@@ -10525,8 +8706,8 @@
           </p:nvSpPr>
           <p:spPr>
             <a:xfrm>
-              <a:off x="975027" y="464697"/>
-              <a:ext cx="4211049" cy="1224321"/>
+              <a:off x="975026" y="464697"/>
+              <a:ext cx="4211049" cy="1004124"/>
             </a:xfrm>
             <a:prstGeom prst="rect">
               <a:avLst/>
@@ -10541,7 +8722,7 @@
             <a:p>
               <a:pPr algn="ctr"/>
               <a:r>
-                <a:rPr lang="en-US" sz="3200" dirty="0">
+                <a:rPr lang="en-US" sz="2800" dirty="0">
                   <a:solidFill>
                     <a:srgbClr val="C00000"/>
                   </a:solidFill>
@@ -10557,7 +8738,7 @@
           <p:cNvPr id="293" name="Rectangle 292">
             <a:extLst>
               <a:ext uri="{FF2B5EF4-FFF2-40B4-BE49-F238E27FC236}">
-                <a16:creationId xmlns:a16="http://schemas.microsoft.com/office/drawing/2014/main" id="{DD7B51ED-63A1-354D-C748-BF8E92390FB1}"/>
+                <a16:creationId xmlns:a16="http://schemas.microsoft.com/office/drawing/2014/main" id="{E3F376EF-AFB1-E01B-4D6E-3D4531E3B0B6}"/>
               </a:ext>
             </a:extLst>
           </p:cNvPr>
@@ -10566,7 +8747,7 @@
         </p:nvSpPr>
         <p:spPr>
           <a:xfrm>
-            <a:off x="9647106" y="4855039"/>
+            <a:off x="9649190" y="4283325"/>
             <a:ext cx="379897" cy="446738"/>
           </a:xfrm>
           <a:prstGeom prst="rect">
@@ -10612,7 +8793,7 @@
           <p:cNvPr id="294" name="Straight Arrow Connector 293">
             <a:extLst>
               <a:ext uri="{FF2B5EF4-FFF2-40B4-BE49-F238E27FC236}">
-                <a16:creationId xmlns:a16="http://schemas.microsoft.com/office/drawing/2014/main" id="{DF2434D7-CC66-A1FA-73A0-C5978D0B40F6}"/>
+                <a16:creationId xmlns:a16="http://schemas.microsoft.com/office/drawing/2014/main" id="{2B3D1361-399F-4295-AC10-1CE6E1109DB8}"/>
               </a:ext>
             </a:extLst>
           </p:cNvPr>
@@ -10624,9 +8805,9 @@
           <p:nvPr/>
         </p:nvCxnSpPr>
         <p:spPr>
-          <a:xfrm flipV="1">
-            <a:off x="10027003" y="5049255"/>
-            <a:ext cx="484215" cy="29153"/>
+          <a:xfrm>
+            <a:off x="10029087" y="4506694"/>
+            <a:ext cx="481933" cy="28167"/>
           </a:xfrm>
           <a:prstGeom prst="straightConnector1">
             <a:avLst/>
@@ -10653,58 +8834,12 @@
           </a:fontRef>
         </p:style>
       </p:cxnSp>
-      <p:cxnSp>
-        <p:nvCxnSpPr>
-          <p:cNvPr id="295" name="Straight Arrow Connector 294">
-            <a:extLst>
-              <a:ext uri="{FF2B5EF4-FFF2-40B4-BE49-F238E27FC236}">
-                <a16:creationId xmlns:a16="http://schemas.microsoft.com/office/drawing/2014/main" id="{43E0B1FF-C1D5-5BC5-623D-A23840DE7EF3}"/>
-              </a:ext>
-            </a:extLst>
-          </p:cNvPr>
-          <p:cNvCxnSpPr>
-            <a:cxnSpLocks/>
-            <a:stCxn id="293" idx="3"/>
-            <a:endCxn id="276" idx="2"/>
-          </p:cNvCxnSpPr>
-          <p:nvPr/>
-        </p:nvCxnSpPr>
-        <p:spPr>
-          <a:xfrm>
-            <a:off x="10027003" y="5078408"/>
-            <a:ext cx="484215" cy="488254"/>
-          </a:xfrm>
-          <a:prstGeom prst="straightConnector1">
-            <a:avLst/>
-          </a:prstGeom>
-          <a:ln w="12700">
-            <a:solidFill>
-              <a:srgbClr val="00B0F0"/>
-            </a:solidFill>
-            <a:tailEnd type="triangle"/>
-          </a:ln>
-        </p:spPr>
-        <p:style>
-          <a:lnRef idx="2">
-            <a:schemeClr val="accent1"/>
-          </a:lnRef>
-          <a:fillRef idx="0">
-            <a:schemeClr val="accent1"/>
-          </a:fillRef>
-          <a:effectRef idx="1">
-            <a:schemeClr val="accent1"/>
-          </a:effectRef>
-          <a:fontRef idx="minor">
-            <a:schemeClr val="tx1"/>
-          </a:fontRef>
-        </p:style>
-      </p:cxnSp>
       <p:sp>
         <p:nvSpPr>
-          <p:cNvPr id="298" name="TextBox 297">
-            <a:extLst>
-              <a:ext uri="{FF2B5EF4-FFF2-40B4-BE49-F238E27FC236}">
-                <a16:creationId xmlns:a16="http://schemas.microsoft.com/office/drawing/2014/main" id="{FF981A67-3471-710A-160C-F4B537DA71AE}"/>
+          <p:cNvPr id="299" name="TextBox 298">
+            <a:extLst>
+              <a:ext uri="{FF2B5EF4-FFF2-40B4-BE49-F238E27FC236}">
+                <a16:creationId xmlns:a16="http://schemas.microsoft.com/office/drawing/2014/main" id="{C727BC79-7A31-8A68-C3DE-5A1BAD1EC5B1}"/>
               </a:ext>
             </a:extLst>
           </p:cNvPr>
@@ -10713,7 +8848,7 @@
         </p:nvSpPr>
         <p:spPr>
           <a:xfrm>
-            <a:off x="8298300" y="5714683"/>
+            <a:off x="10084682" y="5170029"/>
             <a:ext cx="1319872" cy="1077218"/>
           </a:xfrm>
           <a:prstGeom prst="rect">
@@ -10734,7 +8869,7 @@
             <a:r>
               <a:rPr lang="en-US" sz="1600" b="1" dirty="0">
                 <a:solidFill>
-                  <a:schemeClr val="bg2">
+                  <a:schemeClr val="accent2">
                     <a:lumMod val="50000"/>
                   </a:schemeClr>
                 </a:solidFill>
@@ -10747,7 +8882,7 @@
             <a:r>
               <a:rPr lang="en-US" sz="1600" b="1" dirty="0">
                 <a:solidFill>
-                  <a:schemeClr val="bg2">
+                  <a:schemeClr val="accent2">
                     <a:lumMod val="50000"/>
                   </a:schemeClr>
                 </a:solidFill>
@@ -10760,12 +8895,355 @@
           </a:p>
         </p:txBody>
       </p:sp>
+      <p:grpSp>
+        <p:nvGrpSpPr>
+          <p:cNvPr id="14" name="Group 13">
+            <a:extLst>
+              <a:ext uri="{FF2B5EF4-FFF2-40B4-BE49-F238E27FC236}">
+                <a16:creationId xmlns:a16="http://schemas.microsoft.com/office/drawing/2014/main" id="{14C84F6B-60F9-1F42-84B3-D6FAD43C6BE5}"/>
+              </a:ext>
+            </a:extLst>
+          </p:cNvPr>
+          <p:cNvGrpSpPr/>
+          <p:nvPr/>
+        </p:nvGrpSpPr>
+        <p:grpSpPr>
+          <a:xfrm>
+            <a:off x="8769945" y="4327940"/>
+            <a:ext cx="433450" cy="960431"/>
+            <a:chOff x="2661401" y="2604643"/>
+            <a:chExt cx="285510" cy="632628"/>
+          </a:xfrm>
+          <a:solidFill>
+            <a:schemeClr val="bg2">
+              <a:lumMod val="50000"/>
+            </a:schemeClr>
+          </a:solidFill>
+        </p:grpSpPr>
+        <p:sp>
+          <p:nvSpPr>
+            <p:cNvPr id="15" name="Oval 14">
+              <a:extLst>
+                <a:ext uri="{FF2B5EF4-FFF2-40B4-BE49-F238E27FC236}">
+                  <a16:creationId xmlns:a16="http://schemas.microsoft.com/office/drawing/2014/main" id="{3E8318E5-3F9D-E975-A171-9EC2CFF9F903}"/>
+                </a:ext>
+              </a:extLst>
+            </p:cNvPr>
+            <p:cNvSpPr/>
+            <p:nvPr/>
+          </p:nvSpPr>
+          <p:spPr>
+            <a:xfrm>
+              <a:off x="2661401" y="2604643"/>
+              <a:ext cx="283277" cy="283276"/>
+            </a:xfrm>
+            <a:prstGeom prst="ellipse">
+              <a:avLst/>
+            </a:prstGeom>
+            <a:grpFill/>
+            <a:ln>
+              <a:noFill/>
+            </a:ln>
+          </p:spPr>
+          <p:style>
+            <a:lnRef idx="2">
+              <a:schemeClr val="accent1">
+                <a:shade val="15000"/>
+              </a:schemeClr>
+            </a:lnRef>
+            <a:fillRef idx="1">
+              <a:schemeClr val="accent1"/>
+            </a:fillRef>
+            <a:effectRef idx="0">
+              <a:schemeClr val="accent1"/>
+            </a:effectRef>
+            <a:fontRef idx="minor">
+              <a:schemeClr val="lt1"/>
+            </a:fontRef>
+          </p:style>
+          <p:txBody>
+            <a:bodyPr rtlCol="0" anchor="ctr"/>
+            <a:lstStyle/>
+            <a:p>
+              <a:pPr algn="ctr"/>
+              <a:endParaRPr lang="en-US" sz="3200" dirty="0"/>
+            </a:p>
+          </p:txBody>
+        </p:sp>
+        <p:sp>
+          <p:nvSpPr>
+            <p:cNvPr id="16" name="Oval 15">
+              <a:extLst>
+                <a:ext uri="{FF2B5EF4-FFF2-40B4-BE49-F238E27FC236}">
+                  <a16:creationId xmlns:a16="http://schemas.microsoft.com/office/drawing/2014/main" id="{FB3FE111-5C5A-52E8-D401-FD55B8AA8169}"/>
+                </a:ext>
+              </a:extLst>
+            </p:cNvPr>
+            <p:cNvSpPr/>
+            <p:nvPr/>
+          </p:nvSpPr>
+          <p:spPr>
+            <a:xfrm>
+              <a:off x="2663634" y="2953995"/>
+              <a:ext cx="283277" cy="283276"/>
+            </a:xfrm>
+            <a:prstGeom prst="ellipse">
+              <a:avLst/>
+            </a:prstGeom>
+            <a:grpFill/>
+            <a:ln>
+              <a:noFill/>
+            </a:ln>
+          </p:spPr>
+          <p:style>
+            <a:lnRef idx="2">
+              <a:schemeClr val="accent1">
+                <a:shade val="15000"/>
+              </a:schemeClr>
+            </a:lnRef>
+            <a:fillRef idx="1">
+              <a:schemeClr val="accent1"/>
+            </a:fillRef>
+            <a:effectRef idx="0">
+              <a:schemeClr val="accent1"/>
+            </a:effectRef>
+            <a:fontRef idx="minor">
+              <a:schemeClr val="lt1"/>
+            </a:fontRef>
+          </p:style>
+          <p:txBody>
+            <a:bodyPr rtlCol="0" anchor="ctr"/>
+            <a:lstStyle/>
+            <a:p>
+              <a:pPr algn="ctr"/>
+              <a:endParaRPr lang="en-US" sz="3200" dirty="0"/>
+            </a:p>
+          </p:txBody>
+        </p:sp>
+      </p:grpSp>
+      <p:cxnSp>
+        <p:nvCxnSpPr>
+          <p:cNvPr id="17" name="Straight Arrow Connector 16">
+            <a:extLst>
+              <a:ext uri="{FF2B5EF4-FFF2-40B4-BE49-F238E27FC236}">
+                <a16:creationId xmlns:a16="http://schemas.microsoft.com/office/drawing/2014/main" id="{6458AB15-5772-B680-C0B8-F46301979ED2}"/>
+              </a:ext>
+            </a:extLst>
+          </p:cNvPr>
+          <p:cNvCxnSpPr>
+            <a:cxnSpLocks/>
+            <a:stCxn id="15" idx="6"/>
+          </p:cNvCxnSpPr>
+          <p:nvPr/>
+        </p:nvCxnSpPr>
+        <p:spPr>
+          <a:xfrm flipV="1">
+            <a:off x="9200005" y="4488342"/>
+            <a:ext cx="457403" cy="54628"/>
+          </a:xfrm>
+          <a:prstGeom prst="straightConnector1">
+            <a:avLst/>
+          </a:prstGeom>
+          <a:ln w="12700">
+            <a:solidFill>
+              <a:srgbClr val="00B0F0"/>
+            </a:solidFill>
+            <a:tailEnd type="triangle"/>
+          </a:ln>
+        </p:spPr>
+        <p:style>
+          <a:lnRef idx="2">
+            <a:schemeClr val="accent1"/>
+          </a:lnRef>
+          <a:fillRef idx="0">
+            <a:schemeClr val="accent1"/>
+          </a:fillRef>
+          <a:effectRef idx="1">
+            <a:schemeClr val="accent1"/>
+          </a:effectRef>
+          <a:fontRef idx="minor">
+            <a:schemeClr val="tx1"/>
+          </a:fontRef>
+        </p:style>
+      </p:cxnSp>
+      <p:cxnSp>
+        <p:nvCxnSpPr>
+          <p:cNvPr id="18" name="Straight Arrow Connector 17">
+            <a:extLst>
+              <a:ext uri="{FF2B5EF4-FFF2-40B4-BE49-F238E27FC236}">
+                <a16:creationId xmlns:a16="http://schemas.microsoft.com/office/drawing/2014/main" id="{C96C2BC5-9245-6A96-5555-B01008AA5652}"/>
+              </a:ext>
+            </a:extLst>
+          </p:cNvPr>
+          <p:cNvCxnSpPr>
+            <a:cxnSpLocks/>
+            <a:stCxn id="16" idx="6"/>
+          </p:cNvCxnSpPr>
+          <p:nvPr/>
+        </p:nvCxnSpPr>
+        <p:spPr>
+          <a:xfrm flipV="1">
+            <a:off x="9203395" y="4961493"/>
+            <a:ext cx="454013" cy="111849"/>
+          </a:xfrm>
+          <a:prstGeom prst="straightConnector1">
+            <a:avLst/>
+          </a:prstGeom>
+          <a:ln w="12700">
+            <a:solidFill>
+              <a:srgbClr val="00B0F0"/>
+            </a:solidFill>
+            <a:tailEnd type="triangle"/>
+          </a:ln>
+        </p:spPr>
+        <p:style>
+          <a:lnRef idx="2">
+            <a:schemeClr val="accent1"/>
+          </a:lnRef>
+          <a:fillRef idx="0">
+            <a:schemeClr val="accent1"/>
+          </a:fillRef>
+          <a:effectRef idx="1">
+            <a:schemeClr val="accent1"/>
+          </a:effectRef>
+          <a:fontRef idx="minor">
+            <a:schemeClr val="tx1"/>
+          </a:fontRef>
+        </p:style>
+      </p:cxnSp>
+      <p:grpSp>
+        <p:nvGrpSpPr>
+          <p:cNvPr id="19" name="Group 18">
+            <a:extLst>
+              <a:ext uri="{FF2B5EF4-FFF2-40B4-BE49-F238E27FC236}">
+                <a16:creationId xmlns:a16="http://schemas.microsoft.com/office/drawing/2014/main" id="{1A2FE8DB-172F-0E05-12D5-3CC58EA3015D}"/>
+              </a:ext>
+            </a:extLst>
+          </p:cNvPr>
+          <p:cNvGrpSpPr/>
+          <p:nvPr/>
+        </p:nvGrpSpPr>
+        <p:grpSpPr>
+          <a:xfrm>
+            <a:off x="8095215" y="4004752"/>
+            <a:ext cx="1798886" cy="1768363"/>
+            <a:chOff x="2247218" y="2146929"/>
+            <a:chExt cx="1039907" cy="2141742"/>
+          </a:xfrm>
+        </p:grpSpPr>
+        <p:sp>
+          <p:nvSpPr>
+            <p:cNvPr id="20" name="TextBox 19">
+              <a:extLst>
+                <a:ext uri="{FF2B5EF4-FFF2-40B4-BE49-F238E27FC236}">
+                  <a16:creationId xmlns:a16="http://schemas.microsoft.com/office/drawing/2014/main" id="{CE7CB436-9932-37BB-B151-579C49385E9C}"/>
+                </a:ext>
+              </a:extLst>
+            </p:cNvPr>
+            <p:cNvSpPr txBox="1"/>
+            <p:nvPr/>
+          </p:nvSpPr>
+          <p:spPr>
+            <a:xfrm>
+              <a:off x="2247218" y="2146929"/>
+              <a:ext cx="1039907" cy="1211810"/>
+            </a:xfrm>
+            <a:prstGeom prst="rect">
+              <a:avLst/>
+            </a:prstGeom>
+            <a:noFill/>
+            <a:ln>
+              <a:noFill/>
+            </a:ln>
+          </p:spPr>
+          <p:txBody>
+            <a:bodyPr wrap="square" rtlCol="0">
+              <a:spAutoFit/>
+            </a:bodyPr>
+            <a:lstStyle/>
+            <a:p>
+              <a:pPr algn="ctr"/>
+              <a:r>
+                <a:rPr lang="en-US" sz="2000" b="1" dirty="0">
+                  <a:solidFill>
+                    <a:schemeClr val="bg2">
+                      <a:lumMod val="50000"/>
+                    </a:schemeClr>
+                  </a:solidFill>
+                </a:rPr>
+                <a:t>sift</a:t>
+              </a:r>
+            </a:p>
+            <a:p>
+              <a:endParaRPr lang="en-US" sz="3200" dirty="0"/>
+            </a:p>
+          </p:txBody>
+        </p:sp>
+        <p:sp>
+          <p:nvSpPr>
+            <p:cNvPr id="21" name="Rectangle: Rounded Corners 20">
+              <a:extLst>
+                <a:ext uri="{FF2B5EF4-FFF2-40B4-BE49-F238E27FC236}">
+                  <a16:creationId xmlns:a16="http://schemas.microsoft.com/office/drawing/2014/main" id="{3793CCCD-993A-2CFD-1320-B81D8464B380}"/>
+                </a:ext>
+              </a:extLst>
+            </p:cNvPr>
+            <p:cNvSpPr/>
+            <p:nvPr/>
+          </p:nvSpPr>
+          <p:spPr>
+            <a:xfrm>
+              <a:off x="2502783" y="2185700"/>
+              <a:ext cx="549828" cy="2102971"/>
+            </a:xfrm>
+            <a:prstGeom prst="roundRect">
+              <a:avLst/>
+            </a:prstGeom>
+            <a:noFill/>
+            <a:ln>
+              <a:solidFill>
+                <a:schemeClr val="bg2">
+                  <a:lumMod val="50000"/>
+                </a:schemeClr>
+              </a:solidFill>
+            </a:ln>
+          </p:spPr>
+          <p:style>
+            <a:lnRef idx="2">
+              <a:schemeClr val="accent1">
+                <a:shade val="15000"/>
+              </a:schemeClr>
+            </a:lnRef>
+            <a:fillRef idx="1">
+              <a:schemeClr val="accent1"/>
+            </a:fillRef>
+            <a:effectRef idx="0">
+              <a:schemeClr val="accent1"/>
+            </a:effectRef>
+            <a:fontRef idx="minor">
+              <a:schemeClr val="lt1"/>
+            </a:fontRef>
+          </p:style>
+          <p:txBody>
+            <a:bodyPr rtlCol="0" anchor="ctr"/>
+            <a:lstStyle/>
+            <a:p>
+              <a:pPr algn="ctr"/>
+              <a:endParaRPr lang="en-US" sz="3200">
+                <a:solidFill>
+                  <a:schemeClr val="accent3"/>
+                </a:solidFill>
+              </a:endParaRPr>
+            </a:p>
+          </p:txBody>
+        </p:sp>
+      </p:grpSp>
       <p:sp>
         <p:nvSpPr>
-          <p:cNvPr id="299" name="TextBox 298">
-            <a:extLst>
-              <a:ext uri="{FF2B5EF4-FFF2-40B4-BE49-F238E27FC236}">
-                <a16:creationId xmlns:a16="http://schemas.microsoft.com/office/drawing/2014/main" id="{B278D3BC-044B-7E95-6882-F2BFECDA7BFE}"/>
+          <p:cNvPr id="22" name="TextBox 21">
+            <a:extLst>
+              <a:ext uri="{FF2B5EF4-FFF2-40B4-BE49-F238E27FC236}">
+                <a16:creationId xmlns:a16="http://schemas.microsoft.com/office/drawing/2014/main" id="{43DBDA1F-80B3-3684-4ACA-C574CA174DEA}"/>
               </a:ext>
             </a:extLst>
           </p:cNvPr>
@@ -10774,7 +9252,7 @@
         </p:nvSpPr>
         <p:spPr>
           <a:xfrm>
-            <a:off x="10076286" y="5732646"/>
+            <a:off x="8350177" y="5220641"/>
             <a:ext cx="1319872" cy="1077218"/>
           </a:xfrm>
           <a:prstGeom prst="rect">
@@ -10795,6 +9273,1156 @@
             <a:r>
               <a:rPr lang="en-US" sz="1600" b="1" dirty="0">
                 <a:solidFill>
+                  <a:schemeClr val="bg2">
+                    <a:lumMod val="50000"/>
+                  </a:schemeClr>
+                </a:solidFill>
+              </a:rPr>
+              <a:t>…</a:t>
+            </a:r>
+          </a:p>
+          <a:p>
+            <a:pPr algn="ctr"/>
+            <a:r>
+              <a:rPr lang="en-US" sz="1600" b="1" dirty="0">
+                <a:solidFill>
+                  <a:schemeClr val="bg2">
+                    <a:lumMod val="50000"/>
+                  </a:schemeClr>
+                </a:solidFill>
+              </a:rPr>
+              <a:t>(10 tasks)</a:t>
+            </a:r>
+          </a:p>
+          <a:p>
+            <a:endParaRPr lang="en-US" sz="3200" dirty="0"/>
+          </a:p>
+        </p:txBody>
+      </p:sp>
+      <p:sp>
+        <p:nvSpPr>
+          <p:cNvPr id="25" name="Rectangle 24">
+            <a:extLst>
+              <a:ext uri="{FF2B5EF4-FFF2-40B4-BE49-F238E27FC236}">
+                <a16:creationId xmlns:a16="http://schemas.microsoft.com/office/drawing/2014/main" id="{38623026-5BEB-8ED7-D9EF-28D53F85159F}"/>
+              </a:ext>
+            </a:extLst>
+          </p:cNvPr>
+          <p:cNvSpPr/>
+          <p:nvPr/>
+        </p:nvSpPr>
+        <p:spPr>
+          <a:xfrm>
+            <a:off x="5380063" y="4894703"/>
+            <a:ext cx="379897" cy="405247"/>
+          </a:xfrm>
+          <a:prstGeom prst="rect">
+            <a:avLst/>
+          </a:prstGeom>
+          <a:solidFill>
+            <a:schemeClr val="accent1">
+              <a:lumMod val="60000"/>
+              <a:lumOff val="40000"/>
+            </a:schemeClr>
+          </a:solidFill>
+          <a:ln>
+            <a:noFill/>
+          </a:ln>
+        </p:spPr>
+        <p:style>
+          <a:lnRef idx="2">
+            <a:schemeClr val="accent1">
+              <a:shade val="15000"/>
+            </a:schemeClr>
+          </a:lnRef>
+          <a:fillRef idx="1">
+            <a:schemeClr val="accent1"/>
+          </a:fillRef>
+          <a:effectRef idx="0">
+            <a:schemeClr val="accent1"/>
+          </a:effectRef>
+          <a:fontRef idx="minor">
+            <a:schemeClr val="lt1"/>
+          </a:fontRef>
+        </p:style>
+        <p:txBody>
+          <a:bodyPr rtlCol="0" anchor="ctr"/>
+          <a:lstStyle/>
+          <a:p>
+            <a:pPr algn="ctr"/>
+            <a:endParaRPr lang="en-US" sz="3200"/>
+          </a:p>
+        </p:txBody>
+      </p:sp>
+      <p:grpSp>
+        <p:nvGrpSpPr>
+          <p:cNvPr id="26" name="Group 25">
+            <a:extLst>
+              <a:ext uri="{FF2B5EF4-FFF2-40B4-BE49-F238E27FC236}">
+                <a16:creationId xmlns:a16="http://schemas.microsoft.com/office/drawing/2014/main" id="{1DD3BBB9-33B5-8CB3-E69A-F61198800866}"/>
+              </a:ext>
+            </a:extLst>
+          </p:cNvPr>
+          <p:cNvGrpSpPr/>
+          <p:nvPr/>
+        </p:nvGrpSpPr>
+        <p:grpSpPr>
+          <a:xfrm>
+            <a:off x="4492600" y="4269336"/>
+            <a:ext cx="433450" cy="960431"/>
+            <a:chOff x="2661401" y="2604643"/>
+            <a:chExt cx="285510" cy="632628"/>
+          </a:xfrm>
+        </p:grpSpPr>
+        <p:sp>
+          <p:nvSpPr>
+            <p:cNvPr id="27" name="Oval 26">
+              <a:extLst>
+                <a:ext uri="{FF2B5EF4-FFF2-40B4-BE49-F238E27FC236}">
+                  <a16:creationId xmlns:a16="http://schemas.microsoft.com/office/drawing/2014/main" id="{D253A790-01D8-9B63-955E-F817DADB056D}"/>
+                </a:ext>
+              </a:extLst>
+            </p:cNvPr>
+            <p:cNvSpPr/>
+            <p:nvPr/>
+          </p:nvSpPr>
+          <p:spPr>
+            <a:xfrm>
+              <a:off x="2661401" y="2604643"/>
+              <a:ext cx="283277" cy="283276"/>
+            </a:xfrm>
+            <a:prstGeom prst="ellipse">
+              <a:avLst/>
+            </a:prstGeom>
+            <a:solidFill>
+              <a:schemeClr val="accent2"/>
+            </a:solidFill>
+            <a:ln>
+              <a:noFill/>
+            </a:ln>
+          </p:spPr>
+          <p:style>
+            <a:lnRef idx="2">
+              <a:schemeClr val="accent1">
+                <a:shade val="15000"/>
+              </a:schemeClr>
+            </a:lnRef>
+            <a:fillRef idx="1">
+              <a:schemeClr val="accent1"/>
+            </a:fillRef>
+            <a:effectRef idx="0">
+              <a:schemeClr val="accent1"/>
+            </a:effectRef>
+            <a:fontRef idx="minor">
+              <a:schemeClr val="lt1"/>
+            </a:fontRef>
+          </p:style>
+          <p:txBody>
+            <a:bodyPr rtlCol="0" anchor="ctr"/>
+            <a:lstStyle/>
+            <a:p>
+              <a:pPr algn="ctr"/>
+              <a:endParaRPr lang="en-US" sz="3200" dirty="0"/>
+            </a:p>
+          </p:txBody>
+        </p:sp>
+        <p:sp>
+          <p:nvSpPr>
+            <p:cNvPr id="60" name="Oval 59">
+              <a:extLst>
+                <a:ext uri="{FF2B5EF4-FFF2-40B4-BE49-F238E27FC236}">
+                  <a16:creationId xmlns:a16="http://schemas.microsoft.com/office/drawing/2014/main" id="{32876589-8BC5-3415-4CA2-6949A17ED580}"/>
+                </a:ext>
+              </a:extLst>
+            </p:cNvPr>
+            <p:cNvSpPr/>
+            <p:nvPr/>
+          </p:nvSpPr>
+          <p:spPr>
+            <a:xfrm>
+              <a:off x="2663634" y="2953995"/>
+              <a:ext cx="283277" cy="283276"/>
+            </a:xfrm>
+            <a:prstGeom prst="ellipse">
+              <a:avLst/>
+            </a:prstGeom>
+            <a:solidFill>
+              <a:schemeClr val="accent2"/>
+            </a:solidFill>
+            <a:ln>
+              <a:noFill/>
+            </a:ln>
+          </p:spPr>
+          <p:style>
+            <a:lnRef idx="2">
+              <a:schemeClr val="accent1">
+                <a:shade val="15000"/>
+              </a:schemeClr>
+            </a:lnRef>
+            <a:fillRef idx="1">
+              <a:schemeClr val="accent1"/>
+            </a:fillRef>
+            <a:effectRef idx="0">
+              <a:schemeClr val="accent1"/>
+            </a:effectRef>
+            <a:fontRef idx="minor">
+              <a:schemeClr val="lt1"/>
+            </a:fontRef>
+          </p:style>
+          <p:txBody>
+            <a:bodyPr rtlCol="0" anchor="ctr"/>
+            <a:lstStyle/>
+            <a:p>
+              <a:pPr algn="ctr"/>
+              <a:endParaRPr lang="en-US" sz="3200" dirty="0"/>
+            </a:p>
+          </p:txBody>
+        </p:sp>
+      </p:grpSp>
+      <p:cxnSp>
+        <p:nvCxnSpPr>
+          <p:cNvPr id="89" name="Straight Arrow Connector 88">
+            <a:extLst>
+              <a:ext uri="{FF2B5EF4-FFF2-40B4-BE49-F238E27FC236}">
+                <a16:creationId xmlns:a16="http://schemas.microsoft.com/office/drawing/2014/main" id="{D114D4F6-312F-48B4-402A-BBBD194E495F}"/>
+              </a:ext>
+            </a:extLst>
+          </p:cNvPr>
+          <p:cNvCxnSpPr>
+            <a:cxnSpLocks/>
+            <a:stCxn id="27" idx="6"/>
+            <a:endCxn id="91" idx="1"/>
+          </p:cNvCxnSpPr>
+          <p:nvPr/>
+        </p:nvCxnSpPr>
+        <p:spPr>
+          <a:xfrm>
+            <a:off x="4922660" y="4484366"/>
+            <a:ext cx="457403" cy="139810"/>
+          </a:xfrm>
+          <a:prstGeom prst="straightConnector1">
+            <a:avLst/>
+          </a:prstGeom>
+          <a:ln w="12700">
+            <a:solidFill>
+              <a:srgbClr val="00B0F0"/>
+            </a:solidFill>
+            <a:tailEnd type="triangle"/>
+          </a:ln>
+        </p:spPr>
+        <p:style>
+          <a:lnRef idx="2">
+            <a:schemeClr val="accent1"/>
+          </a:lnRef>
+          <a:fillRef idx="0">
+            <a:schemeClr val="accent1"/>
+          </a:fillRef>
+          <a:effectRef idx="1">
+            <a:schemeClr val="accent1"/>
+          </a:effectRef>
+          <a:fontRef idx="minor">
+            <a:schemeClr val="tx1"/>
+          </a:fontRef>
+        </p:style>
+      </p:cxnSp>
+      <p:cxnSp>
+        <p:nvCxnSpPr>
+          <p:cNvPr id="90" name="Straight Arrow Connector 89">
+            <a:extLst>
+              <a:ext uri="{FF2B5EF4-FFF2-40B4-BE49-F238E27FC236}">
+                <a16:creationId xmlns:a16="http://schemas.microsoft.com/office/drawing/2014/main" id="{7E8CFB91-F75E-E36C-147F-20A44C3D4B09}"/>
+              </a:ext>
+            </a:extLst>
+          </p:cNvPr>
+          <p:cNvCxnSpPr>
+            <a:cxnSpLocks/>
+            <a:stCxn id="60" idx="6"/>
+            <a:endCxn id="25" idx="1"/>
+          </p:cNvCxnSpPr>
+          <p:nvPr/>
+        </p:nvCxnSpPr>
+        <p:spPr>
+          <a:xfrm>
+            <a:off x="4926050" y="5014738"/>
+            <a:ext cx="454013" cy="82589"/>
+          </a:xfrm>
+          <a:prstGeom prst="straightConnector1">
+            <a:avLst/>
+          </a:prstGeom>
+          <a:ln w="12700">
+            <a:solidFill>
+              <a:srgbClr val="00B0F0"/>
+            </a:solidFill>
+            <a:tailEnd type="triangle"/>
+          </a:ln>
+        </p:spPr>
+        <p:style>
+          <a:lnRef idx="2">
+            <a:schemeClr val="accent1"/>
+          </a:lnRef>
+          <a:fillRef idx="0">
+            <a:schemeClr val="accent1"/>
+          </a:fillRef>
+          <a:effectRef idx="1">
+            <a:schemeClr val="accent1"/>
+          </a:effectRef>
+          <a:fontRef idx="minor">
+            <a:schemeClr val="tx1"/>
+          </a:fontRef>
+        </p:style>
+      </p:cxnSp>
+      <p:sp>
+        <p:nvSpPr>
+          <p:cNvPr id="91" name="Rectangle 90">
+            <a:extLst>
+              <a:ext uri="{FF2B5EF4-FFF2-40B4-BE49-F238E27FC236}">
+                <a16:creationId xmlns:a16="http://schemas.microsoft.com/office/drawing/2014/main" id="{FE49770A-9A10-A2E9-A7FD-3152DD9D314F}"/>
+              </a:ext>
+            </a:extLst>
+          </p:cNvPr>
+          <p:cNvSpPr/>
+          <p:nvPr/>
+        </p:nvSpPr>
+        <p:spPr>
+          <a:xfrm>
+            <a:off x="5380063" y="4400807"/>
+            <a:ext cx="379897" cy="446738"/>
+          </a:xfrm>
+          <a:prstGeom prst="rect">
+            <a:avLst/>
+          </a:prstGeom>
+          <a:solidFill>
+            <a:schemeClr val="accent1">
+              <a:lumMod val="60000"/>
+              <a:lumOff val="40000"/>
+            </a:schemeClr>
+          </a:solidFill>
+          <a:ln>
+            <a:noFill/>
+          </a:ln>
+        </p:spPr>
+        <p:style>
+          <a:lnRef idx="2">
+            <a:schemeClr val="accent1">
+              <a:shade val="15000"/>
+            </a:schemeClr>
+          </a:lnRef>
+          <a:fillRef idx="1">
+            <a:schemeClr val="accent1"/>
+          </a:fillRef>
+          <a:effectRef idx="0">
+            <a:schemeClr val="accent1"/>
+          </a:effectRef>
+          <a:fontRef idx="minor">
+            <a:schemeClr val="lt1"/>
+          </a:fontRef>
+        </p:style>
+        <p:txBody>
+          <a:bodyPr rtlCol="0" anchor="ctr"/>
+          <a:lstStyle/>
+          <a:p>
+            <a:pPr algn="ctr"/>
+            <a:endParaRPr lang="en-US" sz="3200"/>
+          </a:p>
+        </p:txBody>
+      </p:sp>
+      <p:grpSp>
+        <p:nvGrpSpPr>
+          <p:cNvPr id="92" name="Group 91">
+            <a:extLst>
+              <a:ext uri="{FF2B5EF4-FFF2-40B4-BE49-F238E27FC236}">
+                <a16:creationId xmlns:a16="http://schemas.microsoft.com/office/drawing/2014/main" id="{6663F760-6F29-158F-C5A5-27237400B1EF}"/>
+              </a:ext>
+            </a:extLst>
+          </p:cNvPr>
+          <p:cNvGrpSpPr/>
+          <p:nvPr/>
+        </p:nvGrpSpPr>
+        <p:grpSpPr>
+          <a:xfrm>
+            <a:off x="3812735" y="3865174"/>
+            <a:ext cx="1798886" cy="2403640"/>
+            <a:chOff x="3696968" y="1254172"/>
+            <a:chExt cx="1604716" cy="2144193"/>
+          </a:xfrm>
+        </p:grpSpPr>
+        <p:grpSp>
+          <p:nvGrpSpPr>
+            <p:cNvPr id="93" name="Group 92">
+              <a:extLst>
+                <a:ext uri="{FF2B5EF4-FFF2-40B4-BE49-F238E27FC236}">
+                  <a16:creationId xmlns:a16="http://schemas.microsoft.com/office/drawing/2014/main" id="{9B6B2190-B6D3-703A-5E4B-77A6EF59AA27}"/>
+                </a:ext>
+              </a:extLst>
+            </p:cNvPr>
+            <p:cNvGrpSpPr/>
+            <p:nvPr/>
+          </p:nvGrpSpPr>
+          <p:grpSpPr>
+            <a:xfrm>
+              <a:off x="3696968" y="1254172"/>
+              <a:ext cx="1604716" cy="1676084"/>
+              <a:chOff x="2255162" y="2085280"/>
+              <a:chExt cx="1039907" cy="2275605"/>
+            </a:xfrm>
+          </p:grpSpPr>
+          <p:sp>
+            <p:nvSpPr>
+              <p:cNvPr id="95" name="TextBox 94">
+                <a:extLst>
+                  <a:ext uri="{FF2B5EF4-FFF2-40B4-BE49-F238E27FC236}">
+                    <a16:creationId xmlns:a16="http://schemas.microsoft.com/office/drawing/2014/main" id="{1117310E-3D79-2BF0-1403-269435CBC943}"/>
+                  </a:ext>
+                </a:extLst>
+              </p:cNvPr>
+              <p:cNvSpPr txBox="1"/>
+              <p:nvPr/>
+            </p:nvSpPr>
+            <p:spPr>
+              <a:xfrm>
+                <a:off x="2255162" y="2085280"/>
+                <a:ext cx="1039907" cy="1018370"/>
+              </a:xfrm>
+              <a:prstGeom prst="rect">
+                <a:avLst/>
+              </a:prstGeom>
+              <a:noFill/>
+              <a:ln>
+                <a:noFill/>
+              </a:ln>
+            </p:spPr>
+            <p:txBody>
+              <a:bodyPr wrap="square" rtlCol="0">
+                <a:spAutoFit/>
+              </a:bodyPr>
+              <a:lstStyle/>
+              <a:p>
+                <a:pPr algn="ctr"/>
+                <a:r>
+                  <a:rPr lang="en-US" sz="2000" b="1" dirty="0">
+                    <a:solidFill>
+                      <a:schemeClr val="accent2"/>
+                    </a:solidFill>
+                  </a:rPr>
+                  <a:t>merge</a:t>
+                </a:r>
+              </a:p>
+              <a:p>
+                <a:endParaRPr lang="en-US" sz="3200" dirty="0"/>
+              </a:p>
+            </p:txBody>
+          </p:sp>
+          <p:sp>
+            <p:nvSpPr>
+              <p:cNvPr id="96" name="Rectangle: Rounded Corners 95">
+                <a:extLst>
+                  <a:ext uri="{FF2B5EF4-FFF2-40B4-BE49-F238E27FC236}">
+                    <a16:creationId xmlns:a16="http://schemas.microsoft.com/office/drawing/2014/main" id="{4E1072F7-54D5-0F09-413C-533E6F08A7C9}"/>
+                  </a:ext>
+                </a:extLst>
+              </p:cNvPr>
+              <p:cNvSpPr/>
+              <p:nvPr/>
+            </p:nvSpPr>
+            <p:spPr>
+              <a:xfrm>
+                <a:off x="2499223" y="2116030"/>
+                <a:ext cx="523728" cy="2244855"/>
+              </a:xfrm>
+              <a:prstGeom prst="roundRect">
+                <a:avLst/>
+              </a:prstGeom>
+              <a:noFill/>
+              <a:ln>
+                <a:solidFill>
+                  <a:schemeClr val="accent2"/>
+                </a:solidFill>
+              </a:ln>
+            </p:spPr>
+            <p:style>
+              <a:lnRef idx="2">
+                <a:schemeClr val="accent1">
+                  <a:shade val="15000"/>
+                </a:schemeClr>
+              </a:lnRef>
+              <a:fillRef idx="1">
+                <a:schemeClr val="accent1"/>
+              </a:fillRef>
+              <a:effectRef idx="0">
+                <a:schemeClr val="accent1"/>
+              </a:effectRef>
+              <a:fontRef idx="minor">
+                <a:schemeClr val="lt1"/>
+              </a:fontRef>
+            </p:style>
+            <p:txBody>
+              <a:bodyPr rtlCol="0" anchor="ctr"/>
+              <a:lstStyle/>
+              <a:p>
+                <a:pPr algn="ctr"/>
+                <a:endParaRPr lang="en-US" sz="3200">
+                  <a:solidFill>
+                    <a:schemeClr val="accent3"/>
+                  </a:solidFill>
+                </a:endParaRPr>
+              </a:p>
+            </p:txBody>
+          </p:sp>
+        </p:grpSp>
+        <p:sp>
+          <p:nvSpPr>
+            <p:cNvPr id="94" name="TextBox 93">
+              <a:extLst>
+                <a:ext uri="{FF2B5EF4-FFF2-40B4-BE49-F238E27FC236}">
+                  <a16:creationId xmlns:a16="http://schemas.microsoft.com/office/drawing/2014/main" id="{BB9BDE6B-F648-BB9D-858C-F2E8069812CA}"/>
+                </a:ext>
+              </a:extLst>
+            </p:cNvPr>
+            <p:cNvSpPr txBox="1"/>
+            <p:nvPr/>
+          </p:nvSpPr>
+          <p:spPr>
+            <a:xfrm>
+              <a:off x="3897985" y="2437421"/>
+              <a:ext cx="1177406" cy="960944"/>
+            </a:xfrm>
+            <a:prstGeom prst="rect">
+              <a:avLst/>
+            </a:prstGeom>
+            <a:noFill/>
+            <a:ln>
+              <a:noFill/>
+            </a:ln>
+          </p:spPr>
+          <p:txBody>
+            <a:bodyPr wrap="square" rtlCol="0">
+              <a:spAutoFit/>
+            </a:bodyPr>
+            <a:lstStyle/>
+            <a:p>
+              <a:pPr algn="ctr"/>
+              <a:r>
+                <a:rPr lang="en-US" sz="1600" b="1" dirty="0">
+                  <a:solidFill>
+                    <a:schemeClr val="accent2"/>
+                  </a:solidFill>
+                </a:rPr>
+                <a:t>…</a:t>
+              </a:r>
+            </a:p>
+            <a:p>
+              <a:pPr algn="ctr"/>
+              <a:r>
+                <a:rPr lang="en-US" sz="1600" b="1" dirty="0">
+                  <a:solidFill>
+                    <a:schemeClr val="accent2"/>
+                  </a:solidFill>
+                </a:rPr>
+                <a:t>(10 tasks)</a:t>
+              </a:r>
+            </a:p>
+            <a:p>
+              <a:endParaRPr lang="en-US" sz="3200" dirty="0"/>
+            </a:p>
+          </p:txBody>
+        </p:sp>
+      </p:grpSp>
+      <p:grpSp>
+        <p:nvGrpSpPr>
+          <p:cNvPr id="97" name="Group 96">
+            <a:extLst>
+              <a:ext uri="{FF2B5EF4-FFF2-40B4-BE49-F238E27FC236}">
+                <a16:creationId xmlns:a16="http://schemas.microsoft.com/office/drawing/2014/main" id="{388B7774-3087-9B54-2D52-A98F48AA3779}"/>
+              </a:ext>
+            </a:extLst>
+          </p:cNvPr>
+          <p:cNvGrpSpPr/>
+          <p:nvPr/>
+        </p:nvGrpSpPr>
+        <p:grpSpPr>
+          <a:xfrm>
+            <a:off x="6412964" y="4364424"/>
+            <a:ext cx="430991" cy="948398"/>
+            <a:chOff x="6234952" y="1863964"/>
+            <a:chExt cx="443753" cy="976481"/>
+          </a:xfrm>
+          <a:solidFill>
+            <a:schemeClr val="accent2">
+              <a:lumMod val="50000"/>
+            </a:schemeClr>
+          </a:solidFill>
+        </p:grpSpPr>
+        <p:sp>
+          <p:nvSpPr>
+            <p:cNvPr id="98" name="Oval 97">
+              <a:extLst>
+                <a:ext uri="{FF2B5EF4-FFF2-40B4-BE49-F238E27FC236}">
+                  <a16:creationId xmlns:a16="http://schemas.microsoft.com/office/drawing/2014/main" id="{8F4B9C47-2D39-EF93-2715-8836A13B969E}"/>
+                </a:ext>
+              </a:extLst>
+            </p:cNvPr>
+            <p:cNvSpPr/>
+            <p:nvPr/>
+          </p:nvSpPr>
+          <p:spPr>
+            <a:xfrm>
+              <a:off x="6234952" y="1863964"/>
+              <a:ext cx="443753" cy="443753"/>
+            </a:xfrm>
+            <a:prstGeom prst="ellipse">
+              <a:avLst/>
+            </a:prstGeom>
+            <a:grpFill/>
+            <a:ln>
+              <a:noFill/>
+            </a:ln>
+          </p:spPr>
+          <p:style>
+            <a:lnRef idx="2">
+              <a:schemeClr val="accent1">
+                <a:shade val="15000"/>
+              </a:schemeClr>
+            </a:lnRef>
+            <a:fillRef idx="1">
+              <a:schemeClr val="accent1"/>
+            </a:fillRef>
+            <a:effectRef idx="0">
+              <a:schemeClr val="accent1"/>
+            </a:effectRef>
+            <a:fontRef idx="minor">
+              <a:schemeClr val="lt1"/>
+            </a:fontRef>
+          </p:style>
+          <p:txBody>
+            <a:bodyPr rtlCol="0" anchor="ctr"/>
+            <a:lstStyle/>
+            <a:p>
+              <a:pPr algn="ctr"/>
+              <a:endParaRPr lang="en-US" sz="3200" dirty="0"/>
+            </a:p>
+          </p:txBody>
+        </p:sp>
+        <p:sp>
+          <p:nvSpPr>
+            <p:cNvPr id="99" name="Oval 98">
+              <a:extLst>
+                <a:ext uri="{FF2B5EF4-FFF2-40B4-BE49-F238E27FC236}">
+                  <a16:creationId xmlns:a16="http://schemas.microsoft.com/office/drawing/2014/main" id="{AD561BCD-6991-45CE-1500-393584307E96}"/>
+                </a:ext>
+              </a:extLst>
+            </p:cNvPr>
+            <p:cNvSpPr/>
+            <p:nvPr/>
+          </p:nvSpPr>
+          <p:spPr>
+            <a:xfrm>
+              <a:off x="6234952" y="2396692"/>
+              <a:ext cx="443753" cy="443753"/>
+            </a:xfrm>
+            <a:prstGeom prst="ellipse">
+              <a:avLst/>
+            </a:prstGeom>
+            <a:grpFill/>
+            <a:ln>
+              <a:noFill/>
+            </a:ln>
+          </p:spPr>
+          <p:style>
+            <a:lnRef idx="2">
+              <a:schemeClr val="accent1">
+                <a:shade val="15000"/>
+              </a:schemeClr>
+            </a:lnRef>
+            <a:fillRef idx="1">
+              <a:schemeClr val="accent1"/>
+            </a:fillRef>
+            <a:effectRef idx="0">
+              <a:schemeClr val="accent1"/>
+            </a:effectRef>
+            <a:fontRef idx="minor">
+              <a:schemeClr val="lt1"/>
+            </a:fontRef>
+          </p:style>
+          <p:txBody>
+            <a:bodyPr rtlCol="0" anchor="ctr"/>
+            <a:lstStyle/>
+            <a:p>
+              <a:pPr algn="ctr"/>
+              <a:endParaRPr lang="en-US" sz="3200" dirty="0"/>
+            </a:p>
+          </p:txBody>
+        </p:sp>
+      </p:grpSp>
+      <p:cxnSp>
+        <p:nvCxnSpPr>
+          <p:cNvPr id="100" name="Straight Arrow Connector 99">
+            <a:extLst>
+              <a:ext uri="{FF2B5EF4-FFF2-40B4-BE49-F238E27FC236}">
+                <a16:creationId xmlns:a16="http://schemas.microsoft.com/office/drawing/2014/main" id="{E36B6FC8-8544-B0F6-FD99-76639CD4B2F8}"/>
+              </a:ext>
+            </a:extLst>
+          </p:cNvPr>
+          <p:cNvCxnSpPr>
+            <a:cxnSpLocks/>
+            <a:stCxn id="25" idx="3"/>
+            <a:endCxn id="99" idx="2"/>
+          </p:cNvCxnSpPr>
+          <p:nvPr/>
+        </p:nvCxnSpPr>
+        <p:spPr>
+          <a:xfrm>
+            <a:off x="5759960" y="5097327"/>
+            <a:ext cx="653004" cy="0"/>
+          </a:xfrm>
+          <a:prstGeom prst="straightConnector1">
+            <a:avLst/>
+          </a:prstGeom>
+          <a:ln w="12700">
+            <a:solidFill>
+              <a:srgbClr val="00B0F0"/>
+            </a:solidFill>
+            <a:tailEnd type="triangle"/>
+          </a:ln>
+        </p:spPr>
+        <p:style>
+          <a:lnRef idx="2">
+            <a:schemeClr val="accent1"/>
+          </a:lnRef>
+          <a:fillRef idx="0">
+            <a:schemeClr val="accent1"/>
+          </a:fillRef>
+          <a:effectRef idx="1">
+            <a:schemeClr val="accent1"/>
+          </a:effectRef>
+          <a:fontRef idx="minor">
+            <a:schemeClr val="tx1"/>
+          </a:fontRef>
+        </p:style>
+      </p:cxnSp>
+      <p:grpSp>
+        <p:nvGrpSpPr>
+          <p:cNvPr id="106" name="Group 105">
+            <a:extLst>
+              <a:ext uri="{FF2B5EF4-FFF2-40B4-BE49-F238E27FC236}">
+                <a16:creationId xmlns:a16="http://schemas.microsoft.com/office/drawing/2014/main" id="{211D5ED9-FD88-1E8A-C801-62F8FAB0B22A}"/>
+              </a:ext>
+            </a:extLst>
+          </p:cNvPr>
+          <p:cNvGrpSpPr/>
+          <p:nvPr/>
+        </p:nvGrpSpPr>
+        <p:grpSpPr>
+          <a:xfrm>
+            <a:off x="7369881" y="4363132"/>
+            <a:ext cx="334694" cy="914743"/>
+            <a:chOff x="6724841" y="1876216"/>
+            <a:chExt cx="363072" cy="992303"/>
+          </a:xfrm>
+          <a:solidFill>
+            <a:schemeClr val="accent1">
+              <a:lumMod val="60000"/>
+              <a:lumOff val="40000"/>
+            </a:schemeClr>
+          </a:solidFill>
+        </p:grpSpPr>
+        <p:sp>
+          <p:nvSpPr>
+            <p:cNvPr id="107" name="Rectangle 106">
+              <a:extLst>
+                <a:ext uri="{FF2B5EF4-FFF2-40B4-BE49-F238E27FC236}">
+                  <a16:creationId xmlns:a16="http://schemas.microsoft.com/office/drawing/2014/main" id="{A8E8C073-3AE1-E60E-2B55-5F5A90914D26}"/>
+                </a:ext>
+              </a:extLst>
+            </p:cNvPr>
+            <p:cNvSpPr/>
+            <p:nvPr/>
+          </p:nvSpPr>
+          <p:spPr>
+            <a:xfrm>
+              <a:off x="6724841" y="1876216"/>
+              <a:ext cx="363071" cy="428482"/>
+            </a:xfrm>
+            <a:prstGeom prst="rect">
+              <a:avLst/>
+            </a:prstGeom>
+            <a:grpFill/>
+            <a:ln>
+              <a:noFill/>
+            </a:ln>
+          </p:spPr>
+          <p:style>
+            <a:lnRef idx="2">
+              <a:schemeClr val="accent1">
+                <a:shade val="15000"/>
+              </a:schemeClr>
+            </a:lnRef>
+            <a:fillRef idx="1">
+              <a:schemeClr val="accent1"/>
+            </a:fillRef>
+            <a:effectRef idx="0">
+              <a:schemeClr val="accent1"/>
+            </a:effectRef>
+            <a:fontRef idx="minor">
+              <a:schemeClr val="lt1"/>
+            </a:fontRef>
+          </p:style>
+          <p:txBody>
+            <a:bodyPr rtlCol="0" anchor="ctr"/>
+            <a:lstStyle/>
+            <a:p>
+              <a:pPr algn="ctr"/>
+              <a:endParaRPr lang="en-US" sz="3200"/>
+            </a:p>
+          </p:txBody>
+        </p:sp>
+        <p:sp>
+          <p:nvSpPr>
+            <p:cNvPr id="108" name="Rectangle 107">
+              <a:extLst>
+                <a:ext uri="{FF2B5EF4-FFF2-40B4-BE49-F238E27FC236}">
+                  <a16:creationId xmlns:a16="http://schemas.microsoft.com/office/drawing/2014/main" id="{A6BB7A8A-5F09-A847-B91E-10B258D9A3F3}"/>
+                </a:ext>
+              </a:extLst>
+            </p:cNvPr>
+            <p:cNvSpPr/>
+            <p:nvPr/>
+          </p:nvSpPr>
+          <p:spPr>
+            <a:xfrm>
+              <a:off x="6724842" y="2472638"/>
+              <a:ext cx="363071" cy="395881"/>
+            </a:xfrm>
+            <a:prstGeom prst="rect">
+              <a:avLst/>
+            </a:prstGeom>
+            <a:grpFill/>
+            <a:ln>
+              <a:noFill/>
+            </a:ln>
+          </p:spPr>
+          <p:style>
+            <a:lnRef idx="2">
+              <a:schemeClr val="accent1">
+                <a:shade val="15000"/>
+              </a:schemeClr>
+            </a:lnRef>
+            <a:fillRef idx="1">
+              <a:schemeClr val="accent1"/>
+            </a:fillRef>
+            <a:effectRef idx="0">
+              <a:schemeClr val="accent1"/>
+            </a:effectRef>
+            <a:fontRef idx="minor">
+              <a:schemeClr val="lt1"/>
+            </a:fontRef>
+          </p:style>
+          <p:txBody>
+            <a:bodyPr rtlCol="0" anchor="ctr"/>
+            <a:lstStyle/>
+            <a:p>
+              <a:pPr algn="ctr"/>
+              <a:endParaRPr lang="en-US" sz="3200"/>
+            </a:p>
+          </p:txBody>
+        </p:sp>
+      </p:grpSp>
+      <p:cxnSp>
+        <p:nvCxnSpPr>
+          <p:cNvPr id="109" name="Straight Arrow Connector 108">
+            <a:extLst>
+              <a:ext uri="{FF2B5EF4-FFF2-40B4-BE49-F238E27FC236}">
+                <a16:creationId xmlns:a16="http://schemas.microsoft.com/office/drawing/2014/main" id="{67A24C1D-C503-F55E-8C8B-14E8ACCAD1CD}"/>
+              </a:ext>
+            </a:extLst>
+          </p:cNvPr>
+          <p:cNvCxnSpPr>
+            <a:cxnSpLocks/>
+            <a:stCxn id="98" idx="6"/>
+            <a:endCxn id="107" idx="1"/>
+          </p:cNvCxnSpPr>
+          <p:nvPr/>
+        </p:nvCxnSpPr>
+        <p:spPr>
+          <a:xfrm flipV="1">
+            <a:off x="6843955" y="4560628"/>
+            <a:ext cx="525926" cy="19292"/>
+          </a:xfrm>
+          <a:prstGeom prst="straightConnector1">
+            <a:avLst/>
+          </a:prstGeom>
+          <a:ln w="12700">
+            <a:solidFill>
+              <a:srgbClr val="00B0F0"/>
+            </a:solidFill>
+            <a:tailEnd type="triangle"/>
+          </a:ln>
+        </p:spPr>
+        <p:style>
+          <a:lnRef idx="2">
+            <a:schemeClr val="accent1"/>
+          </a:lnRef>
+          <a:fillRef idx="0">
+            <a:schemeClr val="accent1"/>
+          </a:fillRef>
+          <a:effectRef idx="1">
+            <a:schemeClr val="accent1"/>
+          </a:effectRef>
+          <a:fontRef idx="minor">
+            <a:schemeClr val="tx1"/>
+          </a:fontRef>
+        </p:style>
+      </p:cxnSp>
+      <p:cxnSp>
+        <p:nvCxnSpPr>
+          <p:cNvPr id="111" name="Straight Arrow Connector 110">
+            <a:extLst>
+              <a:ext uri="{FF2B5EF4-FFF2-40B4-BE49-F238E27FC236}">
+                <a16:creationId xmlns:a16="http://schemas.microsoft.com/office/drawing/2014/main" id="{B5D45406-C54A-B8D1-0A94-AC9473B5C389}"/>
+              </a:ext>
+            </a:extLst>
+          </p:cNvPr>
+          <p:cNvCxnSpPr>
+            <a:cxnSpLocks/>
+            <a:stCxn id="99" idx="6"/>
+            <a:endCxn id="108" idx="1"/>
+          </p:cNvCxnSpPr>
+          <p:nvPr/>
+        </p:nvCxnSpPr>
+        <p:spPr>
+          <a:xfrm flipV="1">
+            <a:off x="6843955" y="5095406"/>
+            <a:ext cx="525927" cy="1921"/>
+          </a:xfrm>
+          <a:prstGeom prst="straightConnector1">
+            <a:avLst/>
+          </a:prstGeom>
+          <a:ln w="12700">
+            <a:solidFill>
+              <a:srgbClr val="00B0F0"/>
+            </a:solidFill>
+            <a:tailEnd type="triangle"/>
+          </a:ln>
+        </p:spPr>
+        <p:style>
+          <a:lnRef idx="2">
+            <a:schemeClr val="accent1"/>
+          </a:lnRef>
+          <a:fillRef idx="0">
+            <a:schemeClr val="accent1"/>
+          </a:fillRef>
+          <a:effectRef idx="1">
+            <a:schemeClr val="accent1"/>
+          </a:effectRef>
+          <a:fontRef idx="minor">
+            <a:schemeClr val="tx1"/>
+          </a:fontRef>
+        </p:style>
+      </p:cxnSp>
+      <p:grpSp>
+        <p:nvGrpSpPr>
+          <p:cNvPr id="112" name="Group 111">
+            <a:extLst>
+              <a:ext uri="{FF2B5EF4-FFF2-40B4-BE49-F238E27FC236}">
+                <a16:creationId xmlns:a16="http://schemas.microsoft.com/office/drawing/2014/main" id="{55014535-01AB-951E-57A0-E6E82DBE10A7}"/>
+              </a:ext>
+            </a:extLst>
+          </p:cNvPr>
+          <p:cNvGrpSpPr/>
+          <p:nvPr/>
+        </p:nvGrpSpPr>
+        <p:grpSpPr>
+          <a:xfrm>
+            <a:off x="5910709" y="4076449"/>
+            <a:ext cx="1415691" cy="1714406"/>
+            <a:chOff x="2237301" y="1597894"/>
+            <a:chExt cx="1039907" cy="2076391"/>
+          </a:xfrm>
+        </p:grpSpPr>
+        <p:sp>
+          <p:nvSpPr>
+            <p:cNvPr id="113" name="TextBox 112">
+              <a:extLst>
+                <a:ext uri="{FF2B5EF4-FFF2-40B4-BE49-F238E27FC236}">
+                  <a16:creationId xmlns:a16="http://schemas.microsoft.com/office/drawing/2014/main" id="{83EF459B-30FE-7D67-28C2-57B58E28E4F6}"/>
+                </a:ext>
+              </a:extLst>
+            </p:cNvPr>
+            <p:cNvSpPr txBox="1"/>
+            <p:nvPr/>
+          </p:nvSpPr>
+          <p:spPr>
+            <a:xfrm>
+              <a:off x="2237301" y="1601835"/>
+              <a:ext cx="1039907" cy="459652"/>
+            </a:xfrm>
+            <a:prstGeom prst="rect">
+              <a:avLst/>
+            </a:prstGeom>
+            <a:noFill/>
+            <a:ln>
+              <a:noFill/>
+            </a:ln>
+          </p:spPr>
+          <p:txBody>
+            <a:bodyPr wrap="square" rtlCol="0">
+              <a:spAutoFit/>
+            </a:bodyPr>
+            <a:lstStyle/>
+            <a:p>
+              <a:pPr algn="ctr"/>
+              <a:r>
+                <a:rPr lang="en-US" sz="1600" b="1" dirty="0">
+                  <a:solidFill>
+                    <a:schemeClr val="accent2">
+                      <a:lumMod val="50000"/>
+                    </a:schemeClr>
+                  </a:solidFill>
+                </a:rPr>
+                <a:t>mutation</a:t>
+              </a:r>
+            </a:p>
+          </p:txBody>
+        </p:sp>
+        <p:sp>
+          <p:nvSpPr>
+            <p:cNvPr id="114" name="Rectangle: Rounded Corners 113">
+              <a:extLst>
+                <a:ext uri="{FF2B5EF4-FFF2-40B4-BE49-F238E27FC236}">
+                  <a16:creationId xmlns:a16="http://schemas.microsoft.com/office/drawing/2014/main" id="{D9671BA3-8E04-CA98-67C1-CC3C4BFAF27B}"/>
+                </a:ext>
+              </a:extLst>
+            </p:cNvPr>
+            <p:cNvSpPr/>
+            <p:nvPr/>
+          </p:nvSpPr>
+          <p:spPr>
+            <a:xfrm>
+              <a:off x="2362200" y="1597894"/>
+              <a:ext cx="776608" cy="2076391"/>
+            </a:xfrm>
+            <a:prstGeom prst="roundRect">
+              <a:avLst/>
+            </a:prstGeom>
+            <a:noFill/>
+            <a:ln>
+              <a:solidFill>
+                <a:schemeClr val="accent2">
+                  <a:lumMod val="50000"/>
+                </a:schemeClr>
+              </a:solidFill>
+            </a:ln>
+          </p:spPr>
+          <p:style>
+            <a:lnRef idx="2">
+              <a:schemeClr val="accent1">
+                <a:shade val="15000"/>
+              </a:schemeClr>
+            </a:lnRef>
+            <a:fillRef idx="1">
+              <a:schemeClr val="accent1"/>
+            </a:fillRef>
+            <a:effectRef idx="0">
+              <a:schemeClr val="accent1"/>
+            </a:effectRef>
+            <a:fontRef idx="minor">
+              <a:schemeClr val="lt1"/>
+            </a:fontRef>
+          </p:style>
+          <p:txBody>
+            <a:bodyPr rtlCol="0" anchor="ctr"/>
+            <a:lstStyle/>
+            <a:p>
+              <a:pPr algn="ctr"/>
+              <a:endParaRPr lang="en-US" sz="3200">
+                <a:solidFill>
+                  <a:schemeClr val="accent3"/>
+                </a:solidFill>
+              </a:endParaRPr>
+            </a:p>
+          </p:txBody>
+        </p:sp>
+      </p:grpSp>
+      <p:cxnSp>
+        <p:nvCxnSpPr>
+          <p:cNvPr id="115" name="Straight Arrow Connector 114">
+            <a:extLst>
+              <a:ext uri="{FF2B5EF4-FFF2-40B4-BE49-F238E27FC236}">
+                <a16:creationId xmlns:a16="http://schemas.microsoft.com/office/drawing/2014/main" id="{91F6D770-0B46-BC95-FF23-262BF677FE4C}"/>
+              </a:ext>
+            </a:extLst>
+          </p:cNvPr>
+          <p:cNvCxnSpPr>
+            <a:cxnSpLocks/>
+            <a:stCxn id="91" idx="3"/>
+            <a:endCxn id="98" idx="2"/>
+          </p:cNvCxnSpPr>
+          <p:nvPr/>
+        </p:nvCxnSpPr>
+        <p:spPr>
+          <a:xfrm flipV="1">
+            <a:off x="5759960" y="4579920"/>
+            <a:ext cx="653004" cy="44256"/>
+          </a:xfrm>
+          <a:prstGeom prst="straightConnector1">
+            <a:avLst/>
+          </a:prstGeom>
+          <a:ln w="12700">
+            <a:solidFill>
+              <a:srgbClr val="00B0F0"/>
+            </a:solidFill>
+            <a:tailEnd type="triangle"/>
+          </a:ln>
+        </p:spPr>
+        <p:style>
+          <a:lnRef idx="2">
+            <a:schemeClr val="accent1"/>
+          </a:lnRef>
+          <a:fillRef idx="0">
+            <a:schemeClr val="accent1"/>
+          </a:fillRef>
+          <a:effectRef idx="1">
+            <a:schemeClr val="accent1"/>
+          </a:effectRef>
+          <a:fontRef idx="minor">
+            <a:schemeClr val="tx1"/>
+          </a:fontRef>
+        </p:style>
+      </p:cxnSp>
+      <p:sp>
+        <p:nvSpPr>
+          <p:cNvPr id="116" name="TextBox 115">
+            <a:extLst>
+              <a:ext uri="{FF2B5EF4-FFF2-40B4-BE49-F238E27FC236}">
+                <a16:creationId xmlns:a16="http://schemas.microsoft.com/office/drawing/2014/main" id="{D0E11F86-F232-AFE2-FB40-69E1171EA0DF}"/>
+              </a:ext>
+            </a:extLst>
+          </p:cNvPr>
+          <p:cNvSpPr txBox="1"/>
+          <p:nvPr/>
+        </p:nvSpPr>
+        <p:spPr>
+          <a:xfrm>
+            <a:off x="5951540" y="5198732"/>
+            <a:ext cx="1319872" cy="1077218"/>
+          </a:xfrm>
+          <a:prstGeom prst="rect">
+            <a:avLst/>
+          </a:prstGeom>
+          <a:noFill/>
+          <a:ln>
+            <a:noFill/>
+          </a:ln>
+        </p:spPr>
+        <p:txBody>
+          <a:bodyPr wrap="square" rtlCol="0">
+            <a:spAutoFit/>
+          </a:bodyPr>
+          <a:lstStyle/>
+          <a:p>
+            <a:pPr algn="ctr"/>
+            <a:r>
+              <a:rPr lang="en-US" sz="1600" b="1" dirty="0">
+                <a:solidFill>
                   <a:schemeClr val="accent2">
                     <a:lumMod val="50000"/>
                   </a:schemeClr>
@@ -10824,7 +10452,7 @@
     </p:spTree>
     <p:extLst>
       <p:ext uri="{BB962C8B-B14F-4D97-AF65-F5344CB8AC3E}">
-        <p14:creationId xmlns:p14="http://schemas.microsoft.com/office/powerpoint/2010/main" val="1296686602"/>
+        <p14:creationId xmlns:p14="http://schemas.microsoft.com/office/powerpoint/2010/main" val="2998382849"/>
       </p:ext>
     </p:extLst>
   </p:cSld>
